--- a/report/MS_Meishan_ADO_445239_260716_improved.pptx
+++ b/report/MS_Meishan_ADO_445239_260716_improved.pptx
@@ -12,13 +12,21 @@
   </p:handoutMasterIdLst>
   <p:sldIdLst>
     <p:sldId id="273" r:id="rId2"/>
-    <p:sldId id="291" r:id="rId20"/>
-    <p:sldId id="292" r:id="rId21"/>
-    <p:sldId id="293" r:id="rId22"/>
     <p:sldId id="269" r:id="rId3"/>
     <p:sldId id="280" r:id="rId4"/>
     <p:sldId id="290" r:id="rId5"/>
     <p:sldId id="261" r:id="rId6"/>
+    <p:sldId id="291" r:id="rId20"/>
+    <p:sldId id="292" r:id="rId21"/>
+    <p:sldId id="293" r:id="rId22"/>
+    <p:sldId id="294" r:id="rId23"/>
+    <p:sldId id="295" r:id="rId24"/>
+    <p:sldId id="296" r:id="rId25"/>
+    <p:sldId id="297" r:id="rId26"/>
+    <p:sldId id="298" r:id="rId27"/>
+    <p:sldId id="299" r:id="rId28"/>
+    <p:sldId id="300" r:id="rId29"/>
+    <p:sldId id="301" r:id="rId30"/>
   </p:sldIdLst>
   <p:sldSz cx="12192000" cy="6858000"/>
   <p:notesSz cx="6858000" cy="9144000"/>
@@ -10897,6 +10905,3058 @@
 </p:sld>
 </file>
 
+<file path=ppt/slides/slide10.xml><?xml version="1.0" encoding="utf-8"?>
+<p:sld xmlns:a="http://schemas.openxmlformats.org/drawingml/2006/main" xmlns:p="http://schemas.openxmlformats.org/presentationml/2006/main" xmlns:r="http://schemas.openxmlformats.org/officeDocument/2006/relationships">
+  <p:cSld>
+    <p:spTree>
+      <p:nvGrpSpPr>
+        <p:cNvPr id="1" name=""/>
+        <p:cNvGrpSpPr/>
+        <p:nvPr/>
+      </p:nvGrpSpPr>
+      <p:grpSpPr/>
+      <p:sp>
+        <p:nvSpPr>
+          <p:cNvPr id="2" name="Text Placeholder 1"/>
+          <p:cNvSpPr>
+            <a:spLocks noGrp="1"/>
+          </p:cNvSpPr>
+          <p:nvPr>
+            <p:ph type="body" idx="10" sz="quarter"/>
+          </p:nvPr>
+        </p:nvSpPr>
+        <p:spPr/>
+        <p:txBody>
+          <a:bodyPr/>
+          <a:lstStyle/>
+          <a:p>
+            <a:pPr>
+              <a:defRPr b="1" sz="1800">
+                <a:solidFill>
+                  <a:srgbClr val="0070C0"/>
+                </a:solidFill>
+              </a:defRPr>
+            </a:pPr>
+            <a:r>
+              <a:t>為什麼需要 5-Why:</a:t>
+            </a:r>
+          </a:p>
+          <a:p>
+            <a:pPr>
+              <a:defRPr sz="1400"/>
+            </a:pPr>
+            <a:r>
+              <a:t>僅呈現 Robot Log 與測試參數，完全沒有展示任何實質的失效分析手段（如 SEM, X-ray 或軟體 Debug 過程），流程極度不完整。</a:t>
+            </a:r>
+          </a:p>
+          <a:p>
+            <a:pPr>
+              <a:defRPr sz="1400"/>
+            </a:pPr>
+            <a:r>
+              <a:t>報告中完全沒有提及任何根因分析（Root Cause Analysis），亦無 5-Why 或邏輯推導過程。</a:t>
+            </a:r>
+          </a:p>
+          <a:p>
+            <a:br/>
+            <a:pPr>
+              <a:defRPr b="1"/>
+            </a:pPr>
+            <a:r>
+              <a:t>[推導流程]</a:t>
+            </a:r>
+          </a:p>
+          <a:p>
+            <a:pPr>
+              <a:defRPr sz="1200"/>
+            </a:pPr>
+            <a:r>
+              <a:t>• 設定 DVT 正常品 vs PVT 異常品之對照組</a:t>
+            </a:r>
+          </a:p>
+          <a:p>
+            <a:pPr>
+              <a:defRPr sz="1200"/>
+            </a:pPr>
+            <a:r>
+              <a:t>• 使用獨立樣本 t 檢定驗證參數顯著性 (p &lt; 0.05)</a:t>
+            </a:r>
+          </a:p>
+          <a:p>
+            <a:pPr>
+              <a:defRPr sz="1200"/>
+            </a:pPr>
+            <a:r>
+              <a:t>• 確保統計證據支持最終提到的根本原因</a:t>
+            </a:r>
+          </a:p>
+        </p:txBody>
+      </p:sp>
+      <p:sp>
+        <p:nvSpPr>
+          <p:cNvPr id="3" name="Text Placeholder 2"/>
+          <p:cNvSpPr>
+            <a:spLocks noGrp="1"/>
+          </p:cNvSpPr>
+          <p:nvPr>
+            <p:ph type="body" idx="12" sz="quarter"/>
+          </p:nvPr>
+        </p:nvSpPr>
+        <p:spPr/>
+        <p:txBody>
+          <a:bodyPr/>
+          <a:lstStyle/>
+          <a:p/>
+        </p:txBody>
+      </p:sp>
+      <p:sp>
+        <p:nvSpPr>
+          <p:cNvPr id="4" name="TextBox 3"/>
+          <p:cNvSpPr txBox="1"/>
+          <p:nvPr/>
+        </p:nvSpPr>
+        <p:spPr>
+          <a:xfrm>
+            <a:off x="457200" y="274320"/>
+            <a:ext cx="11277600" cy="914400"/>
+          </a:xfrm>
+          <a:prstGeom prst="rect">
+            <a:avLst/>
+          </a:prstGeom>
+          <a:noFill/>
+        </p:spPr>
+        <p:txBody>
+          <a:bodyPr wrap="none">
+            <a:spAutoFit/>
+          </a:bodyPr>
+          <a:lstStyle/>
+          <a:p>
+            <a:r>
+              <a:t>5-Why 根因推導</a:t>
+            </a:r>
+          </a:p>
+        </p:txBody>
+      </p:sp>
+      <p:sp>
+        <p:nvSpPr>
+          <p:cNvPr id="5" name="Rounded Rectangle 4"/>
+          <p:cNvSpPr/>
+          <p:nvPr/>
+        </p:nvSpPr>
+        <p:spPr>
+          <a:xfrm>
+            <a:off x="548640" y="4114800"/>
+            <a:ext cx="2072640" cy="2286000"/>
+          </a:xfrm>
+          <a:prstGeom prst="roundRect">
+            <a:avLst/>
+          </a:prstGeom>
+          <a:solidFill>
+            <a:srgbClr val="1F4E79"/>
+          </a:solidFill>
+          <a:ln>
+            <a:solidFill>
+              <a:srgbClr val="1F4E79"/>
+            </a:solidFill>
+          </a:ln>
+        </p:spPr>
+        <p:style>
+          <a:lnRef idx="1">
+            <a:schemeClr val="accent1"/>
+          </a:lnRef>
+          <a:fillRef idx="3">
+            <a:schemeClr val="accent1"/>
+          </a:fillRef>
+          <a:effectRef idx="2">
+            <a:schemeClr val="accent1"/>
+          </a:effectRef>
+          <a:fontRef idx="minor">
+            <a:schemeClr val="lt1"/>
+          </a:fontRef>
+        </p:style>
+        <p:txBody>
+          <a:bodyPr rtlCol="0" anchor="ctr" wrap="square" lIns="45720" rIns="45720" tIns="18288" bIns="18288"/>
+          <a:lstStyle/>
+          <a:p>
+            <a:pPr algn="ctr"/>
+            <a:r>
+              <a:rPr sz="1100" b="1">
+                <a:solidFill>
+                  <a:srgbClr val="FFFFFF"/>
+                </a:solidFill>
+              </a:rPr>
+              <a:t>僅呈現 Robot Log 與</a:t>
+            </a:r>
+          </a:p>
+        </p:txBody>
+      </p:sp>
+      <p:sp>
+        <p:nvSpPr>
+          <p:cNvPr id="6" name="Right Arrow 5"/>
+          <p:cNvSpPr/>
+          <p:nvPr/>
+        </p:nvSpPr>
+        <p:spPr>
+          <a:xfrm>
+            <a:off x="2575560" y="5166360"/>
+            <a:ext cx="182880" cy="182880"/>
+          </a:xfrm>
+          <a:prstGeom prst="rightArrow">
+            <a:avLst/>
+          </a:prstGeom>
+          <a:solidFill>
+            <a:srgbClr val="D9D9D9"/>
+          </a:solidFill>
+          <a:ln>
+            <a:noFill/>
+          </a:ln>
+        </p:spPr>
+        <p:style>
+          <a:lnRef idx="1">
+            <a:schemeClr val="accent1"/>
+          </a:lnRef>
+          <a:fillRef idx="3">
+            <a:schemeClr val="accent1"/>
+          </a:fillRef>
+          <a:effectRef idx="2">
+            <a:schemeClr val="accent1"/>
+          </a:effectRef>
+          <a:fontRef idx="minor">
+            <a:schemeClr val="lt1"/>
+          </a:fontRef>
+        </p:style>
+        <p:txBody>
+          <a:bodyPr rtlCol="0" anchor="ctr"/>
+          <a:lstStyle/>
+          <a:p>
+            <a:pPr algn="ctr"/>
+          </a:p>
+        </p:txBody>
+      </p:sp>
+      <p:sp>
+        <p:nvSpPr>
+          <p:cNvPr id="7" name="Rounded Rectangle 6"/>
+          <p:cNvSpPr/>
+          <p:nvPr/>
+        </p:nvSpPr>
+        <p:spPr>
+          <a:xfrm>
+            <a:off x="2804160" y="4114800"/>
+            <a:ext cx="2072640" cy="2286000"/>
+          </a:xfrm>
+          <a:prstGeom prst="roundRect">
+            <a:avLst/>
+          </a:prstGeom>
+          <a:solidFill>
+            <a:srgbClr val="1F4E79"/>
+          </a:solidFill>
+          <a:ln>
+            <a:solidFill>
+              <a:srgbClr val="1F4E79"/>
+            </a:solidFill>
+          </a:ln>
+        </p:spPr>
+        <p:style>
+          <a:lnRef idx="1">
+            <a:schemeClr val="accent1"/>
+          </a:lnRef>
+          <a:fillRef idx="3">
+            <a:schemeClr val="accent1"/>
+          </a:fillRef>
+          <a:effectRef idx="2">
+            <a:schemeClr val="accent1"/>
+          </a:effectRef>
+          <a:fontRef idx="minor">
+            <a:schemeClr val="lt1"/>
+          </a:fontRef>
+        </p:style>
+        <p:txBody>
+          <a:bodyPr rtlCol="0" anchor="ctr" wrap="square" lIns="45720" rIns="45720" tIns="18288" bIns="18288"/>
+          <a:lstStyle/>
+          <a:p>
+            <a:pPr algn="ctr"/>
+            <a:r>
+              <a:rPr sz="1100" b="1">
+                <a:solidFill>
+                  <a:srgbClr val="FFFFFF"/>
+                </a:solidFill>
+              </a:rPr>
+              <a:t>報告中完全沒有提及任何根因分析</a:t>
+            </a:r>
+          </a:p>
+        </p:txBody>
+      </p:sp>
+      <p:sp>
+        <p:nvSpPr>
+          <p:cNvPr id="8" name="Right Arrow 7"/>
+          <p:cNvSpPr/>
+          <p:nvPr/>
+        </p:nvSpPr>
+        <p:spPr>
+          <a:xfrm>
+            <a:off x="4831080" y="5166360"/>
+            <a:ext cx="182880" cy="182880"/>
+          </a:xfrm>
+          <a:prstGeom prst="rightArrow">
+            <a:avLst/>
+          </a:prstGeom>
+          <a:solidFill>
+            <a:srgbClr val="D9D9D9"/>
+          </a:solidFill>
+          <a:ln>
+            <a:noFill/>
+          </a:ln>
+        </p:spPr>
+        <p:style>
+          <a:lnRef idx="1">
+            <a:schemeClr val="accent1"/>
+          </a:lnRef>
+          <a:fillRef idx="3">
+            <a:schemeClr val="accent1"/>
+          </a:fillRef>
+          <a:effectRef idx="2">
+            <a:schemeClr val="accent1"/>
+          </a:effectRef>
+          <a:fontRef idx="minor">
+            <a:schemeClr val="lt1"/>
+          </a:fontRef>
+        </p:style>
+        <p:txBody>
+          <a:bodyPr rtlCol="0" anchor="ctr"/>
+          <a:lstStyle/>
+          <a:p>
+            <a:pPr algn="ctr"/>
+          </a:p>
+        </p:txBody>
+      </p:sp>
+      <p:sp>
+        <p:nvSpPr>
+          <p:cNvPr id="9" name="Rounded Rectangle 8"/>
+          <p:cNvSpPr/>
+          <p:nvPr/>
+        </p:nvSpPr>
+        <p:spPr>
+          <a:xfrm>
+            <a:off x="5059680" y="4114800"/>
+            <a:ext cx="2072640" cy="2286000"/>
+          </a:xfrm>
+          <a:prstGeom prst="roundRect">
+            <a:avLst/>
+          </a:prstGeom>
+          <a:solidFill>
+            <a:srgbClr val="1F4E79"/>
+          </a:solidFill>
+          <a:ln>
+            <a:solidFill>
+              <a:srgbClr val="1F4E79"/>
+            </a:solidFill>
+          </a:ln>
+        </p:spPr>
+        <p:style>
+          <a:lnRef idx="1">
+            <a:schemeClr val="accent1"/>
+          </a:lnRef>
+          <a:fillRef idx="3">
+            <a:schemeClr val="accent1"/>
+          </a:fillRef>
+          <a:effectRef idx="2">
+            <a:schemeClr val="accent1"/>
+          </a:effectRef>
+          <a:fontRef idx="minor">
+            <a:schemeClr val="lt1"/>
+          </a:fontRef>
+        </p:style>
+        <p:txBody>
+          <a:bodyPr rtlCol="0" anchor="ctr" wrap="square" lIns="45720" rIns="45720" tIns="18288" bIns="18288"/>
+          <a:lstStyle/>
+          <a:p>
+            <a:pPr algn="ctr"/>
+            <a:r>
+              <a:rPr sz="1100" b="1">
+                <a:solidFill>
+                  <a:srgbClr val="FFFFFF"/>
+                </a:solidFill>
+              </a:rPr>
+              <a:t>Why 1: 表層現象</a:t>
+            </a:r>
+          </a:p>
+        </p:txBody>
+      </p:sp>
+      <p:sp>
+        <p:nvSpPr>
+          <p:cNvPr id="10" name="Right Arrow 9"/>
+          <p:cNvSpPr/>
+          <p:nvPr/>
+        </p:nvSpPr>
+        <p:spPr>
+          <a:xfrm>
+            <a:off x="7086600" y="5166360"/>
+            <a:ext cx="182880" cy="182880"/>
+          </a:xfrm>
+          <a:prstGeom prst="rightArrow">
+            <a:avLst/>
+          </a:prstGeom>
+          <a:solidFill>
+            <a:srgbClr val="D9D9D9"/>
+          </a:solidFill>
+          <a:ln>
+            <a:noFill/>
+          </a:ln>
+        </p:spPr>
+        <p:style>
+          <a:lnRef idx="1">
+            <a:schemeClr val="accent1"/>
+          </a:lnRef>
+          <a:fillRef idx="3">
+            <a:schemeClr val="accent1"/>
+          </a:fillRef>
+          <a:effectRef idx="2">
+            <a:schemeClr val="accent1"/>
+          </a:effectRef>
+          <a:fontRef idx="minor">
+            <a:schemeClr val="lt1"/>
+          </a:fontRef>
+        </p:style>
+        <p:txBody>
+          <a:bodyPr rtlCol="0" anchor="ctr"/>
+          <a:lstStyle/>
+          <a:p>
+            <a:pPr algn="ctr"/>
+          </a:p>
+        </p:txBody>
+      </p:sp>
+      <p:sp>
+        <p:nvSpPr>
+          <p:cNvPr id="11" name="Rounded Rectangle 10"/>
+          <p:cNvSpPr/>
+          <p:nvPr/>
+        </p:nvSpPr>
+        <p:spPr>
+          <a:xfrm>
+            <a:off x="7315200" y="4114800"/>
+            <a:ext cx="2072640" cy="2286000"/>
+          </a:xfrm>
+          <a:prstGeom prst="roundRect">
+            <a:avLst/>
+          </a:prstGeom>
+          <a:solidFill>
+            <a:srgbClr val="1F4E79"/>
+          </a:solidFill>
+          <a:ln>
+            <a:solidFill>
+              <a:srgbClr val="1F4E79"/>
+            </a:solidFill>
+          </a:ln>
+        </p:spPr>
+        <p:style>
+          <a:lnRef idx="1">
+            <a:schemeClr val="accent1"/>
+          </a:lnRef>
+          <a:fillRef idx="3">
+            <a:schemeClr val="accent1"/>
+          </a:fillRef>
+          <a:effectRef idx="2">
+            <a:schemeClr val="accent1"/>
+          </a:effectRef>
+          <a:fontRef idx="minor">
+            <a:schemeClr val="lt1"/>
+          </a:fontRef>
+        </p:style>
+        <p:txBody>
+          <a:bodyPr rtlCol="0" anchor="ctr" wrap="square" lIns="45720" rIns="45720" tIns="18288" bIns="18288"/>
+          <a:lstStyle/>
+          <a:p>
+            <a:pPr algn="ctr"/>
+            <a:r>
+              <a:rPr sz="1100" b="1">
+                <a:solidFill>
+                  <a:srgbClr val="FFFFFF"/>
+                </a:solidFill>
+              </a:rPr>
+              <a:t>Why 2: 直接原因</a:t>
+            </a:r>
+          </a:p>
+        </p:txBody>
+      </p:sp>
+      <p:sp>
+        <p:nvSpPr>
+          <p:cNvPr id="12" name="Right Arrow 11"/>
+          <p:cNvSpPr/>
+          <p:nvPr/>
+        </p:nvSpPr>
+        <p:spPr>
+          <a:xfrm>
+            <a:off x="9342120" y="5166360"/>
+            <a:ext cx="182880" cy="182880"/>
+          </a:xfrm>
+          <a:prstGeom prst="rightArrow">
+            <a:avLst/>
+          </a:prstGeom>
+          <a:solidFill>
+            <a:srgbClr val="D9D9D9"/>
+          </a:solidFill>
+          <a:ln>
+            <a:noFill/>
+          </a:ln>
+        </p:spPr>
+        <p:style>
+          <a:lnRef idx="1">
+            <a:schemeClr val="accent1"/>
+          </a:lnRef>
+          <a:fillRef idx="3">
+            <a:schemeClr val="accent1"/>
+          </a:fillRef>
+          <a:effectRef idx="2">
+            <a:schemeClr val="accent1"/>
+          </a:effectRef>
+          <a:fontRef idx="minor">
+            <a:schemeClr val="lt1"/>
+          </a:fontRef>
+        </p:style>
+        <p:txBody>
+          <a:bodyPr rtlCol="0" anchor="ctr"/>
+          <a:lstStyle/>
+          <a:p>
+            <a:pPr algn="ctr"/>
+          </a:p>
+        </p:txBody>
+      </p:sp>
+      <p:sp>
+        <p:nvSpPr>
+          <p:cNvPr id="13" name="Rounded Rectangle 12"/>
+          <p:cNvSpPr/>
+          <p:nvPr/>
+        </p:nvSpPr>
+        <p:spPr>
+          <a:xfrm>
+            <a:off x="9570720" y="4114800"/>
+            <a:ext cx="2072640" cy="2286000"/>
+          </a:xfrm>
+          <a:prstGeom prst="roundRect">
+            <a:avLst/>
+          </a:prstGeom>
+          <a:solidFill>
+            <a:srgbClr val="1F4E79"/>
+          </a:solidFill>
+          <a:ln>
+            <a:solidFill>
+              <a:srgbClr val="1F4E79"/>
+            </a:solidFill>
+          </a:ln>
+        </p:spPr>
+        <p:style>
+          <a:lnRef idx="1">
+            <a:schemeClr val="accent1"/>
+          </a:lnRef>
+          <a:fillRef idx="3">
+            <a:schemeClr val="accent1"/>
+          </a:fillRef>
+          <a:effectRef idx="2">
+            <a:schemeClr val="accent1"/>
+          </a:effectRef>
+          <a:fontRef idx="minor">
+            <a:schemeClr val="lt1"/>
+          </a:fontRef>
+        </p:style>
+        <p:txBody>
+          <a:bodyPr rtlCol="0" anchor="ctr" wrap="square" lIns="45720" rIns="45720" tIns="18288" bIns="18288"/>
+          <a:lstStyle/>
+          <a:p>
+            <a:pPr algn="ctr"/>
+            <a:r>
+              <a:rPr sz="1100" b="1">
+                <a:solidFill>
+                  <a:srgbClr val="FFFFFF"/>
+                </a:solidFill>
+              </a:rPr>
+              <a:t>Why 3: 間接原因</a:t>
+            </a:r>
+          </a:p>
+        </p:txBody>
+      </p:sp>
+    </p:spTree>
+  </p:cSld>
+  <p:clrMapOvr>
+    <a:masterClrMapping/>
+  </p:clrMapOvr>
+</p:sld>
+</file>
+
+<file path=ppt/slides/slide11.xml><?xml version="1.0" encoding="utf-8"?>
+<p:sld xmlns:a="http://schemas.openxmlformats.org/drawingml/2006/main" xmlns:p="http://schemas.openxmlformats.org/presentationml/2006/main" xmlns:r="http://schemas.openxmlformats.org/officeDocument/2006/relationships">
+  <p:cSld>
+    <p:spTree>
+      <p:nvGrpSpPr>
+        <p:cNvPr id="1" name=""/>
+        <p:cNvGrpSpPr/>
+        <p:nvPr/>
+      </p:nvGrpSpPr>
+      <p:grpSpPr/>
+      <p:sp>
+        <p:nvSpPr>
+          <p:cNvPr id="2" name="Text Placeholder 1"/>
+          <p:cNvSpPr>
+            <a:spLocks noGrp="1"/>
+          </p:cNvSpPr>
+          <p:nvPr>
+            <p:ph type="body" idx="10" sz="quarter"/>
+          </p:nvPr>
+        </p:nvSpPr>
+        <p:spPr/>
+        <p:txBody>
+          <a:bodyPr/>
+          <a:lstStyle/>
+          <a:p/>
+        </p:txBody>
+      </p:sp>
+      <p:sp>
+        <p:nvSpPr>
+          <p:cNvPr id="3" name="Text Placeholder 2"/>
+          <p:cNvSpPr>
+            <a:spLocks noGrp="1"/>
+          </p:cNvSpPr>
+          <p:nvPr>
+            <p:ph type="body" idx="12" sz="quarter"/>
+          </p:nvPr>
+        </p:nvSpPr>
+        <p:spPr/>
+        <p:txBody>
+          <a:bodyPr/>
+          <a:lstStyle/>
+          <a:p/>
+        </p:txBody>
+      </p:sp>
+      <p:sp>
+        <p:nvSpPr>
+          <p:cNvPr id="4" name="TextBox 3"/>
+          <p:cNvSpPr txBox="1"/>
+          <p:nvPr/>
+        </p:nvSpPr>
+        <p:spPr>
+          <a:xfrm>
+            <a:off x="457200" y="274320"/>
+            <a:ext cx="8229600" cy="914400"/>
+          </a:xfrm>
+          <a:prstGeom prst="rect">
+            <a:avLst/>
+          </a:prstGeom>
+          <a:noFill/>
+        </p:spPr>
+        <p:txBody>
+          <a:bodyPr wrap="none">
+            <a:spAutoFit/>
+          </a:bodyPr>
+          <a:lstStyle/>
+          <a:p>
+            <a:r>
+              <a:t>控制組 / 對照組分析</a:t>
+            </a:r>
+          </a:p>
+        </p:txBody>
+      </p:sp>
+      <p:graphicFrame>
+        <p:nvGraphicFramePr>
+          <p:cNvPr id="5" name="Table 4"/>
+          <p:cNvGraphicFramePr>
+            <a:graphicFrameLocks noGrp="1"/>
+          </p:cNvGraphicFramePr>
+          <p:nvPr/>
+        </p:nvGraphicFramePr>
+        <p:xfrm>
+          <a:off x="457200" y="1280160"/>
+          <a:ext cx="11277600" cy="4572000"/>
+        </p:xfrm>
+        <a:graphic>
+          <a:graphicData uri="http://schemas.openxmlformats.org/drawingml/2006/table">
+            <a:tbl>
+              <a:tblPr firstRow="1" bandRow="1">
+                <a:tableStyleId>{5C22544A-7EE6-4342-B048-85BDC9FD1C3A}</a:tableStyleId>
+              </a:tblPr>
+              <a:tblGrid>
+                <a:gridCol w="3759200"/>
+                <a:gridCol w="3759200"/>
+                <a:gridCol w="3759200"/>
+              </a:tblGrid>
+              <a:tr h="914400">
+                <a:tc>
+                  <a:txBody>
+                    <a:bodyPr/>
+                    <a:lstStyle/>
+                    <a:p>
+                      <a:r>
+                        <a:rPr b="1" sz="1100">
+                          <a:solidFill>
+                            <a:srgbClr val="FFFFFF"/>
+                          </a:solidFill>
+                        </a:rPr>
+                        <a:t>對照組設定</a:t>
+                      </a:r>
+                    </a:p>
+                  </a:txBody>
+                  <a:tcPr>
+                    <a:solidFill>
+                      <a:srgbClr val="1F4E79"/>
+                    </a:solidFill>
+                  </a:tcPr>
+                </a:tc>
+                <a:tc>
+                  <a:txBody>
+                    <a:bodyPr/>
+                    <a:lstStyle/>
+                    <a:p>
+                      <a:r>
+                        <a:rPr b="1" sz="1100">
+                          <a:solidFill>
+                            <a:srgbClr val="FFFFFF"/>
+                          </a:solidFill>
+                        </a:rPr>
+                        <a:t>目的</a:t>
+                      </a:r>
+                    </a:p>
+                  </a:txBody>
+                  <a:tcPr>
+                    <a:solidFill>
+                      <a:srgbClr val="1F4E79"/>
+                    </a:solidFill>
+                  </a:tcPr>
+                </a:tc>
+                <a:tc>
+                  <a:txBody>
+                    <a:bodyPr/>
+                    <a:lstStyle/>
+                    <a:p>
+                      <a:r>
+                        <a:rPr b="1" sz="1100">
+                          <a:solidFill>
+                            <a:srgbClr val="FFFFFF"/>
+                          </a:solidFill>
+                        </a:rPr>
+                        <a:t>驗證邏輯</a:t>
+                      </a:r>
+                    </a:p>
+                  </a:txBody>
+                  <a:tcPr>
+                    <a:solidFill>
+                      <a:srgbClr val="1F4E79"/>
+                    </a:solidFill>
+                  </a:tcPr>
+                </a:tc>
+              </a:tr>
+              <a:tr h="914400">
+                <a:tc>
+                  <a:txBody>
+                    <a:bodyPr/>
+                    <a:lstStyle/>
+                    <a:p>
+                      <a:r>
+                        <a:rPr sz="1000"/>
+                        <a:t>Golden Sample</a:t>
+                      </a:r>
+                    </a:p>
+                  </a:txBody>
+                  <a:tcPr/>
+                </a:tc>
+                <a:tc>
+                  <a:txBody>
+                    <a:bodyPr/>
+                    <a:lstStyle/>
+                    <a:p>
+                      <a:r>
+                        <a:rPr sz="1000"/>
+                        <a:t>建立失效基準</a:t>
+                      </a:r>
+                    </a:p>
+                  </a:txBody>
+                  <a:tcPr/>
+                </a:tc>
+                <a:tc>
+                  <a:txBody>
+                    <a:bodyPr/>
+                    <a:lstStyle/>
+                    <a:p>
+                      <a:r>
+                        <a:rPr sz="1000"/>
+                        <a:t>與異常品並列比對</a:t>
+                      </a:r>
+                    </a:p>
+                  </a:txBody>
+                  <a:tcPr/>
+                </a:tc>
+              </a:tr>
+              <a:tr h="914400">
+                <a:tc>
+                  <a:txBody>
+                    <a:bodyPr/>
+                    <a:lstStyle/>
+                    <a:p>
+                      <a:r>
+                        <a:rPr sz="1000"/>
+                        <a:t>DVT 正常品</a:t>
+                      </a:r>
+                    </a:p>
+                  </a:txBody>
+                  <a:tcPr/>
+                </a:tc>
+                <a:tc>
+                  <a:txBody>
+                    <a:bodyPr/>
+                    <a:lstStyle/>
+                    <a:p>
+                      <a:r>
+                        <a:rPr sz="1000"/>
+                        <a:t>製程能力驗證</a:t>
+                      </a:r>
+                    </a:p>
+                  </a:txBody>
+                  <a:tcPr/>
+                </a:tc>
+                <a:tc>
+                  <a:txBody>
+                    <a:bodyPr/>
+                    <a:lstStyle/>
+                    <a:p>
+                      <a:r>
+                        <a:rPr sz="1000"/>
+                        <a:t>統計差異分析 (t-test)</a:t>
+                      </a:r>
+                    </a:p>
+                  </a:txBody>
+                  <a:tcPr/>
+                </a:tc>
+              </a:tr>
+              <a:tr h="914400">
+                <a:tc>
+                  <a:txBody>
+                    <a:bodyPr/>
+                    <a:lstStyle/>
+                    <a:p>
+                      <a:r>
+                        <a:rPr sz="1000"/>
+                        <a:t>同批 PVT</a:t>
+                      </a:r>
+                    </a:p>
+                  </a:txBody>
+                  <a:tcPr/>
+                </a:tc>
+                <a:tc>
+                  <a:txBody>
+                    <a:bodyPr/>
+                    <a:lstStyle/>
+                    <a:p>
+                      <a:r>
+                        <a:rPr sz="1000"/>
+                        <a:t>排除批次性失效</a:t>
+                      </a:r>
+                    </a:p>
+                  </a:txBody>
+                  <a:tcPr/>
+                </a:tc>
+                <a:tc>
+                  <a:txBody>
+                    <a:bodyPr/>
+                    <a:lstStyle/>
+                    <a:p>
+                      <a:r>
+                        <a:rPr sz="1000"/>
+                        <a:t>批次間變異數分析</a:t>
+                      </a:r>
+                    </a:p>
+                  </a:txBody>
+                  <a:tcPr/>
+                </a:tc>
+              </a:tr>
+              <a:tr h="914400">
+                <a:tc>
+                  <a:txBody>
+                    <a:bodyPr/>
+                    <a:lstStyle/>
+                    <a:p>
+                      <a:r>
+                        <a:rPr sz="1000"/>
+                        <a:t>跨批抽樣</a:t>
+                      </a:r>
+                    </a:p>
+                  </a:txBody>
+                  <a:tcPr/>
+                </a:tc>
+                <a:tc>
+                  <a:txBody>
+                    <a:bodyPr/>
+                    <a:lstStyle/>
+                    <a:p>
+                      <a:r>
+                        <a:rPr sz="1000"/>
+                        <a:t>長期趨勢監測</a:t>
+                      </a:r>
+                    </a:p>
+                  </a:txBody>
+                  <a:tcPr/>
+                </a:tc>
+                <a:tc>
+                  <a:txBody>
+                    <a:bodyPr/>
+                    <a:lstStyle/>
+                    <a:p>
+                      <a:r>
+                        <a:rPr sz="1000"/>
+                        <a:t>管制圖 (Control Chart)</a:t>
+                      </a:r>
+                    </a:p>
+                  </a:txBody>
+                  <a:tcPr/>
+                </a:tc>
+              </a:tr>
+            </a:tbl>
+          </a:graphicData>
+        </a:graphic>
+      </p:graphicFrame>
+      <p:sp>
+        <p:nvSpPr>
+          <p:cNvPr id="6" name="TextBox 5"/>
+          <p:cNvSpPr txBox="1"/>
+          <p:nvPr/>
+        </p:nvSpPr>
+        <p:spPr>
+          <a:xfrm>
+            <a:off x="457200" y="6035040"/>
+            <a:ext cx="11277600" cy="457200"/>
+          </a:xfrm>
+          <a:prstGeom prst="rect">
+            <a:avLst/>
+          </a:prstGeom>
+          <a:noFill/>
+        </p:spPr>
+        <p:txBody>
+          <a:bodyPr wrap="square">
+            <a:spAutoFit/>
+          </a:bodyPr>
+          <a:lstStyle/>
+          <a:p>
+            <a:pPr>
+              <a:defRPr sz="1000">
+                <a:solidFill>
+                  <a:srgbClr val="808080"/>
+                </a:solidFill>
+              </a:defRPr>
+            </a:pPr>
+            <a:r>
+              <a:t>✓ 此頁為 v3.1.1 新增,提供控制組/對照組/證據型根因分析的標準範本</a:t>
+            </a:r>
+          </a:p>
+        </p:txBody>
+      </p:sp>
+    </p:spTree>
+  </p:cSld>
+  <p:clrMapOvr>
+    <a:masterClrMapping/>
+  </p:clrMapOvr>
+</p:sld>
+</file>
+
+<file path=ppt/slides/slide12.xml><?xml version="1.0" encoding="utf-8"?>
+<p:sld xmlns:a="http://schemas.openxmlformats.org/drawingml/2006/main" xmlns:p="http://schemas.openxmlformats.org/presentationml/2006/main" xmlns:r="http://schemas.openxmlformats.org/officeDocument/2006/relationships">
+  <p:cSld>
+    <p:spTree>
+      <p:nvGrpSpPr>
+        <p:cNvPr id="1" name=""/>
+        <p:cNvGrpSpPr/>
+        <p:nvPr/>
+      </p:nvGrpSpPr>
+      <p:grpSpPr/>
+      <p:sp>
+        <p:nvSpPr>
+          <p:cNvPr id="2" name="Text Placeholder 1"/>
+          <p:cNvSpPr>
+            <a:spLocks noGrp="1"/>
+          </p:cNvSpPr>
+          <p:nvPr>
+            <p:ph type="body" idx="10" sz="quarter"/>
+          </p:nvPr>
+        </p:nvSpPr>
+        <p:spPr/>
+        <p:txBody>
+          <a:bodyPr/>
+          <a:lstStyle/>
+          <a:p/>
+        </p:txBody>
+      </p:sp>
+      <p:sp>
+        <p:nvSpPr>
+          <p:cNvPr id="3" name="Text Placeholder 2"/>
+          <p:cNvSpPr>
+            <a:spLocks noGrp="1"/>
+          </p:cNvSpPr>
+          <p:nvPr>
+            <p:ph type="body" idx="12" sz="quarter"/>
+          </p:nvPr>
+        </p:nvSpPr>
+        <p:spPr/>
+        <p:txBody>
+          <a:bodyPr/>
+          <a:lstStyle/>
+          <a:p/>
+        </p:txBody>
+      </p:sp>
+      <p:sp>
+        <p:nvSpPr>
+          <p:cNvPr id="4" name="TextBox 3"/>
+          <p:cNvSpPr txBox="1"/>
+          <p:nvPr/>
+        </p:nvSpPr>
+        <p:spPr>
+          <a:xfrm>
+            <a:off x="457200" y="274320"/>
+            <a:ext cx="8229600" cy="914400"/>
+          </a:xfrm>
+          <a:prstGeom prst="rect">
+            <a:avLst/>
+          </a:prstGeom>
+          <a:noFill/>
+        </p:spPr>
+        <p:txBody>
+          <a:bodyPr wrap="none">
+            <a:spAutoFit/>
+          </a:bodyPr>
+          <a:lstStyle/>
+          <a:p>
+            <a:r>
+              <a:t>證據型根因分析</a:t>
+            </a:r>
+          </a:p>
+        </p:txBody>
+      </p:sp>
+      <p:graphicFrame>
+        <p:nvGraphicFramePr>
+          <p:cNvPr id="5" name="Table 4"/>
+          <p:cNvGraphicFramePr>
+            <a:graphicFrameLocks noGrp="1"/>
+          </p:cNvGraphicFramePr>
+          <p:nvPr/>
+        </p:nvGraphicFramePr>
+        <p:xfrm>
+          <a:off x="457200" y="1280160"/>
+          <a:ext cx="11277600" cy="4572000"/>
+        </p:xfrm>
+        <a:graphic>
+          <a:graphicData uri="http://schemas.openxmlformats.org/drawingml/2006/table">
+            <a:tbl>
+              <a:tblPr firstRow="1" bandRow="1">
+                <a:tableStyleId>{5C22544A-7EE6-4342-B048-85BDC9FD1C3A}</a:tableStyleId>
+              </a:tblPr>
+              <a:tblGrid>
+                <a:gridCol w="3759200"/>
+                <a:gridCol w="3759200"/>
+                <a:gridCol w="3759200"/>
+              </a:tblGrid>
+              <a:tr h="762000">
+                <a:tc>
+                  <a:txBody>
+                    <a:bodyPr/>
+                    <a:lstStyle/>
+                    <a:p>
+                      <a:r>
+                        <a:rPr b="1" sz="1100">
+                          <a:solidFill>
+                            <a:srgbClr val="FFFFFF"/>
+                          </a:solidFill>
+                        </a:rPr>
+                        <a:t>證據類型</a:t>
+                      </a:r>
+                    </a:p>
+                  </a:txBody>
+                  <a:tcPr>
+                    <a:solidFill>
+                      <a:srgbClr val="1F4E79"/>
+                    </a:solidFill>
+                  </a:tcPr>
+                </a:tc>
+                <a:tc>
+                  <a:txBody>
+                    <a:bodyPr/>
+                    <a:lstStyle/>
+                    <a:p>
+                      <a:r>
+                        <a:rPr b="1" sz="1100">
+                          <a:solidFill>
+                            <a:srgbClr val="FFFFFF"/>
+                          </a:solidFill>
+                        </a:rPr>
+                        <a:t>取得方式</a:t>
+                      </a:r>
+                    </a:p>
+                  </a:txBody>
+                  <a:tcPr>
+                    <a:solidFill>
+                      <a:srgbClr val="1F4E79"/>
+                    </a:solidFill>
+                  </a:tcPr>
+                </a:tc>
+                <a:tc>
+                  <a:txBody>
+                    <a:bodyPr/>
+                    <a:lstStyle/>
+                    <a:p>
+                      <a:r>
+                        <a:rPr b="1" sz="1100">
+                          <a:solidFill>
+                            <a:srgbClr val="FFFFFF"/>
+                          </a:solidFill>
+                        </a:rPr>
+                        <a:t>說服力</a:t>
+                      </a:r>
+                    </a:p>
+                  </a:txBody>
+                  <a:tcPr>
+                    <a:solidFill>
+                      <a:srgbClr val="1F4E79"/>
+                    </a:solidFill>
+                  </a:tcPr>
+                </a:tc>
+              </a:tr>
+              <a:tr h="762000">
+                <a:tc>
+                  <a:txBody>
+                    <a:bodyPr/>
+                    <a:lstStyle/>
+                    <a:p>
+                      <a:r>
+                        <a:rPr sz="1000"/>
+                        <a:t>電性數據</a:t>
+                      </a:r>
+                    </a:p>
+                  </a:txBody>
+                  <a:tcPr/>
+                </a:tc>
+                <a:tc>
+                  <a:txBody>
+                    <a:bodyPr/>
+                    <a:lstStyle/>
+                    <a:p>
+                      <a:r>
+                        <a:rPr sz="1000"/>
+                        <a:t>I/V 曲線、阻抗</a:t>
+                      </a:r>
+                    </a:p>
+                  </a:txBody>
+                  <a:tcPr/>
+                </a:tc>
+                <a:tc>
+                  <a:txBody>
+                    <a:bodyPr/>
+                    <a:lstStyle/>
+                    <a:p>
+                      <a:r>
+                        <a:rPr sz="1000"/>
+                        <a:t>高</a:t>
+                      </a:r>
+                    </a:p>
+                  </a:txBody>
+                  <a:tcPr/>
+                </a:tc>
+              </a:tr>
+              <a:tr h="762000">
+                <a:tc>
+                  <a:txBody>
+                    <a:bodyPr/>
+                    <a:lstStyle/>
+                    <a:p>
+                      <a:r>
+                        <a:rPr sz="1000"/>
+                        <a:t>結構影像</a:t>
+                      </a:r>
+                    </a:p>
+                  </a:txBody>
+                  <a:tcPr/>
+                </a:tc>
+                <a:tc>
+                  <a:txBody>
+                    <a:bodyPr/>
+                    <a:lstStyle/>
+                    <a:p>
+                      <a:r>
+                        <a:rPr sz="1000"/>
+                        <a:t>SEM、X-ray</a:t>
+                      </a:r>
+                    </a:p>
+                  </a:txBody>
+                  <a:tcPr/>
+                </a:tc>
+                <a:tc>
+                  <a:txBody>
+                    <a:bodyPr/>
+                    <a:lstStyle/>
+                    <a:p>
+                      <a:r>
+                        <a:rPr sz="1000"/>
+                        <a:t>高</a:t>
+                      </a:r>
+                    </a:p>
+                  </a:txBody>
+                  <a:tcPr/>
+                </a:tc>
+              </a:tr>
+              <a:tr h="762000">
+                <a:tc>
+                  <a:txBody>
+                    <a:bodyPr/>
+                    <a:lstStyle/>
+                    <a:p>
+                      <a:r>
+                        <a:rPr sz="1000"/>
+                        <a:t>成分分析</a:t>
+                      </a:r>
+                    </a:p>
+                  </a:txBody>
+                  <a:tcPr/>
+                </a:tc>
+                <a:tc>
+                  <a:txBody>
+                    <a:bodyPr/>
+                    <a:lstStyle/>
+                    <a:p>
+                      <a:r>
+                        <a:rPr sz="1000"/>
+                        <a:t>EDX、XRD</a:t>
+                      </a:r>
+                    </a:p>
+                  </a:txBody>
+                  <a:tcPr/>
+                </a:tc>
+                <a:tc>
+                  <a:txBody>
+                    <a:bodyPr/>
+                    <a:lstStyle/>
+                    <a:p>
+                      <a:r>
+                        <a:rPr sz="1000"/>
+                        <a:t>中</a:t>
+                      </a:r>
+                    </a:p>
+                  </a:txBody>
+                  <a:tcPr/>
+                </a:tc>
+              </a:tr>
+              <a:tr h="762000">
+                <a:tc>
+                  <a:txBody>
+                    <a:bodyPr/>
+                    <a:lstStyle/>
+                    <a:p>
+                      <a:r>
+                        <a:rPr sz="1000"/>
+                        <a:t>失效重現</a:t>
+                      </a:r>
+                    </a:p>
+                  </a:txBody>
+                  <a:tcPr/>
+                </a:tc>
+                <a:tc>
+                  <a:txBody>
+                    <a:bodyPr/>
+                    <a:lstStyle/>
+                    <a:p>
+                      <a:r>
+                        <a:rPr sz="1000"/>
+                        <a:t>HTSL、HAST</a:t>
+                      </a:r>
+                    </a:p>
+                  </a:txBody>
+                  <a:tcPr/>
+                </a:tc>
+                <a:tc>
+                  <a:txBody>
+                    <a:bodyPr/>
+                    <a:lstStyle/>
+                    <a:p>
+                      <a:r>
+                        <a:rPr sz="1000"/>
+                        <a:t>高</a:t>
+                      </a:r>
+                    </a:p>
+                  </a:txBody>
+                  <a:tcPr/>
+                </a:tc>
+              </a:tr>
+              <a:tr h="762000">
+                <a:tc>
+                  <a:txBody>
+                    <a:bodyPr/>
+                    <a:lstStyle/>
+                    <a:p>
+                      <a:r>
+                        <a:rPr sz="1000"/>
+                        <a:t>統計分析</a:t>
+                      </a:r>
+                    </a:p>
+                  </a:txBody>
+                  <a:tcPr/>
+                </a:tc>
+                <a:tc>
+                  <a:txBody>
+                    <a:bodyPr/>
+                    <a:lstStyle/>
+                    <a:p>
+                      <a:r>
+                        <a:rPr sz="1000"/>
+                        <a:t>p-value、CI</a:t>
+                      </a:r>
+                    </a:p>
+                  </a:txBody>
+                  <a:tcPr/>
+                </a:tc>
+                <a:tc>
+                  <a:txBody>
+                    <a:bodyPr/>
+                    <a:lstStyle/>
+                    <a:p>
+                      <a:r>
+                        <a:rPr sz="1000"/>
+                        <a:t>中</a:t>
+                      </a:r>
+                    </a:p>
+                  </a:txBody>
+                  <a:tcPr/>
+                </a:tc>
+              </a:tr>
+            </a:tbl>
+          </a:graphicData>
+        </a:graphic>
+      </p:graphicFrame>
+      <p:sp>
+        <p:nvSpPr>
+          <p:cNvPr id="6" name="TextBox 5"/>
+          <p:cNvSpPr txBox="1"/>
+          <p:nvPr/>
+        </p:nvSpPr>
+        <p:spPr>
+          <a:xfrm>
+            <a:off x="457200" y="6035040"/>
+            <a:ext cx="11277600" cy="457200"/>
+          </a:xfrm>
+          <a:prstGeom prst="rect">
+            <a:avLst/>
+          </a:prstGeom>
+          <a:noFill/>
+        </p:spPr>
+        <p:txBody>
+          <a:bodyPr wrap="square">
+            <a:spAutoFit/>
+          </a:bodyPr>
+          <a:lstStyle/>
+          <a:p>
+            <a:pPr>
+              <a:defRPr sz="1000">
+                <a:solidFill>
+                  <a:srgbClr val="808080"/>
+                </a:solidFill>
+              </a:defRPr>
+            </a:pPr>
+            <a:r>
+              <a:t>✓ 此頁為 v3.1.1 新增,提供控制組/對照組/證據型根因分析的標準範本</a:t>
+            </a:r>
+          </a:p>
+        </p:txBody>
+      </p:sp>
+    </p:spTree>
+  </p:cSld>
+  <p:clrMapOvr>
+    <a:masterClrMapping/>
+  </p:clrMapOvr>
+</p:sld>
+</file>
+
+<file path=ppt/slides/slide13.xml><?xml version="1.0" encoding="utf-8"?>
+<p:sld xmlns:a="http://schemas.openxmlformats.org/drawingml/2006/main" xmlns:p="http://schemas.openxmlformats.org/presentationml/2006/main" xmlns:r="http://schemas.openxmlformats.org/officeDocument/2006/relationships">
+  <p:cSld>
+    <p:spTree>
+      <p:nvGrpSpPr>
+        <p:cNvPr id="1" name=""/>
+        <p:cNvGrpSpPr/>
+        <p:nvPr/>
+      </p:nvGrpSpPr>
+      <p:grpSpPr/>
+      <p:sp>
+        <p:nvSpPr>
+          <p:cNvPr id="2" name="Text Placeholder 1"/>
+          <p:cNvSpPr>
+            <a:spLocks noGrp="1"/>
+          </p:cNvSpPr>
+          <p:nvPr>
+            <p:ph type="body" idx="10" sz="quarter"/>
+          </p:nvPr>
+        </p:nvSpPr>
+        <p:spPr/>
+        <p:txBody>
+          <a:bodyPr/>
+          <a:lstStyle/>
+          <a:p>
+            <a:pPr>
+              <a:defRPr b="1" sz="1800">
+                <a:solidFill>
+                  <a:srgbClr val="0070C0"/>
+                </a:solidFill>
+              </a:defRPr>
+            </a:pPr>
+            <a:r>
+              <a:t>針對問題點之深度分析建議:</a:t>
+            </a:r>
+          </a:p>
+          <a:p>
+            <a:pPr>
+              <a:defRPr sz="1400"/>
+            </a:pPr>
+            <a:r>
+              <a:t>僅呈現 Robot Log 與測試參數，完全沒有展示任何實質的失效分析手段（如 SEM, X-ray 或軟體 Debug 過程），流程極度不完整。</a:t>
+            </a:r>
+          </a:p>
+          <a:p>
+            <a:pPr>
+              <a:defRPr sz="1400"/>
+            </a:pPr>
+            <a:r>
+              <a:t>報告中完全沒有提及任何根因分析（Root Cause Analysis），亦無 5-Why 或邏輯推導過程。</a:t>
+            </a:r>
+          </a:p>
+          <a:p>
+            <a:br/>
+            <a:pPr>
+              <a:defRPr b="1"/>
+            </a:pPr>
+            <a:r>
+              <a:t>[建議執行動作]</a:t>
+            </a:r>
+          </a:p>
+          <a:p>
+            <a:pPr>
+              <a:defRPr sz="1200"/>
+            </a:pPr>
+            <a:r>
+              <a:t>• 設定 DVT 正常品 vs PVT 異常品之對照組</a:t>
+            </a:r>
+          </a:p>
+          <a:p>
+            <a:pPr>
+              <a:defRPr sz="1200"/>
+            </a:pPr>
+            <a:r>
+              <a:t>• 使用獨立樣本 t 檢定驗證參數顯著性 (p &lt; 0.05)</a:t>
+            </a:r>
+          </a:p>
+          <a:p>
+            <a:pPr>
+              <a:defRPr sz="1200"/>
+            </a:pPr>
+            <a:r>
+              <a:t>• 確保統計證據支持最終提到的根本原因</a:t>
+            </a:r>
+          </a:p>
+        </p:txBody>
+      </p:sp>
+      <p:sp>
+        <p:nvSpPr>
+          <p:cNvPr id="3" name="Text Placeholder 2"/>
+          <p:cNvSpPr>
+            <a:spLocks noGrp="1"/>
+          </p:cNvSpPr>
+          <p:nvPr>
+            <p:ph type="body" idx="12" sz="quarter"/>
+          </p:nvPr>
+        </p:nvSpPr>
+        <p:spPr/>
+        <p:txBody>
+          <a:bodyPr/>
+          <a:lstStyle/>
+          <a:p/>
+        </p:txBody>
+      </p:sp>
+      <p:sp>
+        <p:nvSpPr>
+          <p:cNvPr id="4" name="TextBox 3"/>
+          <p:cNvSpPr txBox="1"/>
+          <p:nvPr/>
+        </p:nvSpPr>
+        <p:spPr>
+          <a:xfrm>
+            <a:off x="457200" y="274320"/>
+            <a:ext cx="11277600" cy="914400"/>
+          </a:xfrm>
+          <a:prstGeom prst="rect">
+            <a:avLst/>
+          </a:prstGeom>
+          <a:noFill/>
+        </p:spPr>
+        <p:txBody>
+          <a:bodyPr wrap="none">
+            <a:spAutoFit/>
+          </a:bodyPr>
+          <a:lstStyle/>
+          <a:p>
+            <a:r>
+              <a:t>根因驗證及統計分析</a:t>
+            </a:r>
+          </a:p>
+        </p:txBody>
+      </p:sp>
+    </p:spTree>
+  </p:cSld>
+  <p:clrMapOvr>
+    <a:masterClrMapping/>
+  </p:clrMapOvr>
+</p:sld>
+</file>
+
+<file path=ppt/slides/slide14.xml><?xml version="1.0" encoding="utf-8"?>
+<p:sld xmlns:a="http://schemas.openxmlformats.org/drawingml/2006/main" xmlns:p="http://schemas.openxmlformats.org/presentationml/2006/main" xmlns:r="http://schemas.openxmlformats.org/officeDocument/2006/relationships">
+  <p:cSld>
+    <p:spTree>
+      <p:nvGrpSpPr>
+        <p:cNvPr id="1" name=""/>
+        <p:cNvGrpSpPr/>
+        <p:nvPr/>
+      </p:nvGrpSpPr>
+      <p:grpSpPr/>
+      <p:sp>
+        <p:nvSpPr>
+          <p:cNvPr id="2" name="Text Placeholder 1"/>
+          <p:cNvSpPr>
+            <a:spLocks noGrp="1"/>
+          </p:cNvSpPr>
+          <p:nvPr>
+            <p:ph type="body" idx="10" sz="quarter"/>
+          </p:nvPr>
+        </p:nvSpPr>
+        <p:spPr/>
+        <p:txBody>
+          <a:bodyPr/>
+          <a:lstStyle/>
+          <a:p>
+            <a:pPr>
+              <a:defRPr b="1" sz="1800">
+                <a:solidFill>
+                  <a:srgbClr val="0070C0"/>
+                </a:solidFill>
+              </a:defRPr>
+            </a:pPr>
+            <a:r>
+              <a:t>擬議改善對策項目:</a:t>
+            </a:r>
+          </a:p>
+          <a:p>
+            <a:pPr>
+              <a:defRPr sz="1400"/>
+            </a:pPr>
+            <a:r>
+              <a:t>僅提供部分編號與日期，缺乏產品型號、客戶資訊、製造日期及負責工程師等核心資訊。</a:t>
+            </a:r>
+          </a:p>
+          <a:p>
+            <a:pPr>
+              <a:defRPr sz="1400"/>
+            </a:pPr>
+            <a:r>
+              <a:t>有定義測試方法與失效狀態（Fail），但缺乏失效現象的具體描述、失效影響範圍及失效率統計。</a:t>
+            </a:r>
+          </a:p>
+          <a:p>
+            <a:pPr>
+              <a:defRPr sz="1400"/>
+            </a:pPr>
+            <a:r>
+              <a:t>僅呈現 Robot Log 與測試參數，完全沒有展示任何實質的失效分析手段（如 SEM, X-ray 或軟體 Debug 過程），流程極度不完整。</a:t>
+            </a:r>
+          </a:p>
+          <a:p>
+            <a:br/>
+            <a:pPr>
+              <a:defRPr b="1"/>
+            </a:pPr>
+            <a:r>
+              <a:t>[標準化與監測計畫]</a:t>
+            </a:r>
+          </a:p>
+          <a:p>
+            <a:pPr>
+              <a:defRPr sz="1200"/>
+            </a:pPr>
+            <a:r>
+              <a:t>• 建立入料檢驗 (IQC) SOP 與測試閾值</a:t>
+            </a:r>
+          </a:p>
+          <a:p>
+            <a:pPr>
+              <a:defRPr sz="1200"/>
+            </a:pPr>
+            <a:r>
+              <a:t>• 導入自動化監測設備於生產線</a:t>
+            </a:r>
+          </a:p>
+          <a:p>
+            <a:pPr>
+              <a:defRPr sz="1200"/>
+            </a:pPr>
+            <a:r>
+              <a:t>• 將此案例納入知識管理資料庫以利後續追蹤</a:t>
+            </a:r>
+          </a:p>
+        </p:txBody>
+      </p:sp>
+      <p:sp>
+        <p:nvSpPr>
+          <p:cNvPr id="3" name="Text Placeholder 2"/>
+          <p:cNvSpPr>
+            <a:spLocks noGrp="1"/>
+          </p:cNvSpPr>
+          <p:nvPr>
+            <p:ph type="body" idx="12" sz="quarter"/>
+          </p:nvPr>
+        </p:nvSpPr>
+        <p:spPr/>
+        <p:txBody>
+          <a:bodyPr/>
+          <a:lstStyle/>
+          <a:p/>
+        </p:txBody>
+      </p:sp>
+      <p:sp>
+        <p:nvSpPr>
+          <p:cNvPr id="4" name="TextBox 3"/>
+          <p:cNvSpPr txBox="1"/>
+          <p:nvPr/>
+        </p:nvSpPr>
+        <p:spPr>
+          <a:xfrm>
+            <a:off x="457200" y="274320"/>
+            <a:ext cx="11277600" cy="914400"/>
+          </a:xfrm>
+          <a:prstGeom prst="rect">
+            <a:avLst/>
+          </a:prstGeom>
+          <a:noFill/>
+        </p:spPr>
+        <p:txBody>
+          <a:bodyPr wrap="none">
+            <a:spAutoFit/>
+          </a:bodyPr>
+          <a:lstStyle/>
+          <a:p>
+            <a:r>
+              <a:t>長期預防措施與改善對策</a:t>
+            </a:r>
+          </a:p>
+        </p:txBody>
+      </p:sp>
+      <p:sp>
+        <p:nvSpPr>
+          <p:cNvPr id="5" name="Rectangle 4"/>
+          <p:cNvSpPr/>
+          <p:nvPr/>
+        </p:nvSpPr>
+        <p:spPr>
+          <a:xfrm>
+            <a:off x="457200" y="5669280"/>
+            <a:ext cx="11277600" cy="91440"/>
+          </a:xfrm>
+          <a:prstGeom prst="rect">
+            <a:avLst/>
+          </a:prstGeom>
+          <a:solidFill>
+            <a:srgbClr val="808080"/>
+          </a:solidFill>
+          <a:ln>
+            <a:noFill/>
+          </a:ln>
+        </p:spPr>
+        <p:style>
+          <a:lnRef idx="1">
+            <a:schemeClr val="accent1"/>
+          </a:lnRef>
+          <a:fillRef idx="3">
+            <a:schemeClr val="accent1"/>
+          </a:fillRef>
+          <a:effectRef idx="2">
+            <a:schemeClr val="accent1"/>
+          </a:effectRef>
+          <a:fontRef idx="minor">
+            <a:schemeClr val="lt1"/>
+          </a:fontRef>
+        </p:style>
+        <p:txBody>
+          <a:bodyPr rtlCol="0" anchor="ctr"/>
+          <a:lstStyle/>
+          <a:p>
+            <a:pPr algn="ctr"/>
+          </a:p>
+        </p:txBody>
+      </p:sp>
+      <p:sp>
+        <p:nvSpPr>
+          <p:cNvPr id="6" name="Oval 5"/>
+          <p:cNvSpPr/>
+          <p:nvPr/>
+        </p:nvSpPr>
+        <p:spPr>
+          <a:xfrm>
+            <a:off x="2153920" y="5532120"/>
+            <a:ext cx="365760" cy="365760"/>
+          </a:xfrm>
+          <a:prstGeom prst="ellipse">
+            <a:avLst/>
+          </a:prstGeom>
+          <a:solidFill>
+            <a:srgbClr val="ED7D31"/>
+          </a:solidFill>
+          <a:ln>
+            <a:solidFill>
+              <a:srgbClr val="ED7D31"/>
+            </a:solidFill>
+          </a:ln>
+        </p:spPr>
+        <p:style>
+          <a:lnRef idx="1">
+            <a:schemeClr val="accent1"/>
+          </a:lnRef>
+          <a:fillRef idx="3">
+            <a:schemeClr val="accent1"/>
+          </a:fillRef>
+          <a:effectRef idx="2">
+            <a:schemeClr val="accent1"/>
+          </a:effectRef>
+          <a:fontRef idx="minor">
+            <a:schemeClr val="lt1"/>
+          </a:fontRef>
+        </p:style>
+        <p:txBody>
+          <a:bodyPr rtlCol="0" anchor="ctr" wrap="square" lIns="45720" rIns="45720" tIns="18288" bIns="18288"/>
+          <a:lstStyle/>
+          <a:p>
+            <a:pPr algn="ctr"/>
+            <a:r>
+              <a:rPr sz="1400" b="1">
+                <a:solidFill>
+                  <a:srgbClr val="FFFFFF"/>
+                </a:solidFill>
+              </a:rPr>
+              <a:t>1</a:t>
+            </a:r>
+          </a:p>
+        </p:txBody>
+      </p:sp>
+      <p:sp>
+        <p:nvSpPr>
+          <p:cNvPr id="7" name="TextBox 6"/>
+          <p:cNvSpPr txBox="1"/>
+          <p:nvPr/>
+        </p:nvSpPr>
+        <p:spPr>
+          <a:xfrm>
+            <a:off x="457200" y="5943600"/>
+            <a:ext cx="3759200" cy="365760"/>
+          </a:xfrm>
+          <a:prstGeom prst="rect">
+            <a:avLst/>
+          </a:prstGeom>
+          <a:noFill/>
+        </p:spPr>
+        <p:txBody>
+          <a:bodyPr wrap="square">
+            <a:spAutoFit/>
+          </a:bodyPr>
+          <a:lstStyle/>
+          <a:p>
+            <a:pPr algn="ctr"/>
+            <a:r>
+              <a:rPr sz="1100" b="1">
+                <a:solidFill>
+                  <a:srgbClr val="ED7D31"/>
+                </a:solidFill>
+              </a:rPr>
+              <a:t>短期 (&lt; 1 個月)</a:t>
+            </a:r>
+          </a:p>
+        </p:txBody>
+      </p:sp>
+      <p:sp>
+        <p:nvSpPr>
+          <p:cNvPr id="8" name="TextBox 7"/>
+          <p:cNvSpPr txBox="1"/>
+          <p:nvPr/>
+        </p:nvSpPr>
+        <p:spPr>
+          <a:xfrm>
+            <a:off x="457200" y="6217920"/>
+            <a:ext cx="3759200" cy="274320"/>
+          </a:xfrm>
+          <a:prstGeom prst="rect">
+            <a:avLst/>
+          </a:prstGeom>
+          <a:noFill/>
+        </p:spPr>
+        <p:txBody>
+          <a:bodyPr wrap="square">
+            <a:spAutoFit/>
+          </a:bodyPr>
+          <a:lstStyle/>
+          <a:p>
+            <a:pPr algn="ctr"/>
+            <a:r>
+              <a:rPr sz="900">
+                <a:solidFill>
+                  <a:srgbClr val="808080"/>
+                </a:solidFill>
+              </a:rPr>
+              <a:t>D+0 ~ D+30</a:t>
+            </a:r>
+          </a:p>
+        </p:txBody>
+      </p:sp>
+      <p:sp>
+        <p:nvSpPr>
+          <p:cNvPr id="9" name="Oval 8"/>
+          <p:cNvSpPr/>
+          <p:nvPr/>
+        </p:nvSpPr>
+        <p:spPr>
+          <a:xfrm>
+            <a:off x="5913120" y="5532120"/>
+            <a:ext cx="365760" cy="365760"/>
+          </a:xfrm>
+          <a:prstGeom prst="ellipse">
+            <a:avLst/>
+          </a:prstGeom>
+          <a:solidFill>
+            <a:srgbClr val="1F4E79"/>
+          </a:solidFill>
+          <a:ln>
+            <a:solidFill>
+              <a:srgbClr val="1F4E79"/>
+            </a:solidFill>
+          </a:ln>
+        </p:spPr>
+        <p:style>
+          <a:lnRef idx="1">
+            <a:schemeClr val="accent1"/>
+          </a:lnRef>
+          <a:fillRef idx="3">
+            <a:schemeClr val="accent1"/>
+          </a:fillRef>
+          <a:effectRef idx="2">
+            <a:schemeClr val="accent1"/>
+          </a:effectRef>
+          <a:fontRef idx="minor">
+            <a:schemeClr val="lt1"/>
+          </a:fontRef>
+        </p:style>
+        <p:txBody>
+          <a:bodyPr rtlCol="0" anchor="ctr" wrap="square" lIns="45720" rIns="45720" tIns="18288" bIns="18288"/>
+          <a:lstStyle/>
+          <a:p>
+            <a:pPr algn="ctr"/>
+            <a:r>
+              <a:rPr sz="1400" b="1">
+                <a:solidFill>
+                  <a:srgbClr val="FFFFFF"/>
+                </a:solidFill>
+              </a:rPr>
+              <a:t>2</a:t>
+            </a:r>
+          </a:p>
+        </p:txBody>
+      </p:sp>
+      <p:sp>
+        <p:nvSpPr>
+          <p:cNvPr id="10" name="TextBox 9"/>
+          <p:cNvSpPr txBox="1"/>
+          <p:nvPr/>
+        </p:nvSpPr>
+        <p:spPr>
+          <a:xfrm>
+            <a:off x="4216400" y="5943600"/>
+            <a:ext cx="3759200" cy="365760"/>
+          </a:xfrm>
+          <a:prstGeom prst="rect">
+            <a:avLst/>
+          </a:prstGeom>
+          <a:noFill/>
+        </p:spPr>
+        <p:txBody>
+          <a:bodyPr wrap="square">
+            <a:spAutoFit/>
+          </a:bodyPr>
+          <a:lstStyle/>
+          <a:p>
+            <a:pPr algn="ctr"/>
+            <a:r>
+              <a:rPr sz="1100" b="1">
+                <a:solidFill>
+                  <a:srgbClr val="1F4E79"/>
+                </a:solidFill>
+              </a:rPr>
+              <a:t>中期 (1-3 個月)</a:t>
+            </a:r>
+          </a:p>
+        </p:txBody>
+      </p:sp>
+      <p:sp>
+        <p:nvSpPr>
+          <p:cNvPr id="11" name="TextBox 10"/>
+          <p:cNvSpPr txBox="1"/>
+          <p:nvPr/>
+        </p:nvSpPr>
+        <p:spPr>
+          <a:xfrm>
+            <a:off x="4216400" y="6217920"/>
+            <a:ext cx="3759200" cy="274320"/>
+          </a:xfrm>
+          <a:prstGeom prst="rect">
+            <a:avLst/>
+          </a:prstGeom>
+          <a:noFill/>
+        </p:spPr>
+        <p:txBody>
+          <a:bodyPr wrap="square">
+            <a:spAutoFit/>
+          </a:bodyPr>
+          <a:lstStyle/>
+          <a:p>
+            <a:pPr algn="ctr"/>
+            <a:r>
+              <a:rPr sz="900">
+                <a:solidFill>
+                  <a:srgbClr val="808080"/>
+                </a:solidFill>
+              </a:rPr>
+              <a:t>D+30 ~ D+90</a:t>
+            </a:r>
+          </a:p>
+        </p:txBody>
+      </p:sp>
+      <p:sp>
+        <p:nvSpPr>
+          <p:cNvPr id="12" name="Oval 11"/>
+          <p:cNvSpPr/>
+          <p:nvPr/>
+        </p:nvSpPr>
+        <p:spPr>
+          <a:xfrm>
+            <a:off x="9672320" y="5532120"/>
+            <a:ext cx="365760" cy="365760"/>
+          </a:xfrm>
+          <a:prstGeom prst="ellipse">
+            <a:avLst/>
+          </a:prstGeom>
+          <a:solidFill>
+            <a:srgbClr val="70AD47"/>
+          </a:solidFill>
+          <a:ln>
+            <a:solidFill>
+              <a:srgbClr val="70AD47"/>
+            </a:solidFill>
+          </a:ln>
+        </p:spPr>
+        <p:style>
+          <a:lnRef idx="1">
+            <a:schemeClr val="accent1"/>
+          </a:lnRef>
+          <a:fillRef idx="3">
+            <a:schemeClr val="accent1"/>
+          </a:fillRef>
+          <a:effectRef idx="2">
+            <a:schemeClr val="accent1"/>
+          </a:effectRef>
+          <a:fontRef idx="minor">
+            <a:schemeClr val="lt1"/>
+          </a:fontRef>
+        </p:style>
+        <p:txBody>
+          <a:bodyPr rtlCol="0" anchor="ctr" wrap="square" lIns="45720" rIns="45720" tIns="18288" bIns="18288"/>
+          <a:lstStyle/>
+          <a:p>
+            <a:pPr algn="ctr"/>
+            <a:r>
+              <a:rPr sz="1400" b="1">
+                <a:solidFill>
+                  <a:srgbClr val="FFFFFF"/>
+                </a:solidFill>
+              </a:rPr>
+              <a:t>3</a:t>
+            </a:r>
+          </a:p>
+        </p:txBody>
+      </p:sp>
+      <p:sp>
+        <p:nvSpPr>
+          <p:cNvPr id="13" name="TextBox 12"/>
+          <p:cNvSpPr txBox="1"/>
+          <p:nvPr/>
+        </p:nvSpPr>
+        <p:spPr>
+          <a:xfrm>
+            <a:off x="7975600" y="5943600"/>
+            <a:ext cx="3759200" cy="365760"/>
+          </a:xfrm>
+          <a:prstGeom prst="rect">
+            <a:avLst/>
+          </a:prstGeom>
+          <a:noFill/>
+        </p:spPr>
+        <p:txBody>
+          <a:bodyPr wrap="square">
+            <a:spAutoFit/>
+          </a:bodyPr>
+          <a:lstStyle/>
+          <a:p>
+            <a:pPr algn="ctr"/>
+            <a:r>
+              <a:rPr sz="1100" b="1">
+                <a:solidFill>
+                  <a:srgbClr val="70AD47"/>
+                </a:solidFill>
+              </a:rPr>
+              <a:t>長期 (&gt; 3 個月)</a:t>
+            </a:r>
+          </a:p>
+        </p:txBody>
+      </p:sp>
+      <p:sp>
+        <p:nvSpPr>
+          <p:cNvPr id="14" name="TextBox 13"/>
+          <p:cNvSpPr txBox="1"/>
+          <p:nvPr/>
+        </p:nvSpPr>
+        <p:spPr>
+          <a:xfrm>
+            <a:off x="7975600" y="6217920"/>
+            <a:ext cx="3759200" cy="274320"/>
+          </a:xfrm>
+          <a:prstGeom prst="rect">
+            <a:avLst/>
+          </a:prstGeom>
+          <a:noFill/>
+        </p:spPr>
+        <p:txBody>
+          <a:bodyPr wrap="square">
+            <a:spAutoFit/>
+          </a:bodyPr>
+          <a:lstStyle/>
+          <a:p>
+            <a:pPr algn="ctr"/>
+            <a:r>
+              <a:rPr sz="900">
+                <a:solidFill>
+                  <a:srgbClr val="808080"/>
+                </a:solidFill>
+              </a:rPr>
+              <a:t>D+90 ~ D+180</a:t>
+            </a:r>
+          </a:p>
+        </p:txBody>
+      </p:sp>
+    </p:spTree>
+  </p:cSld>
+  <p:clrMapOvr>
+    <a:masterClrMapping/>
+  </p:clrMapOvr>
+</p:sld>
+</file>
+
+<file path=ppt/slides/slide15.xml><?xml version="1.0" encoding="utf-8"?>
+<p:sld xmlns:a="http://schemas.openxmlformats.org/drawingml/2006/main" xmlns:p="http://schemas.openxmlformats.org/presentationml/2006/main" xmlns:r="http://schemas.openxmlformats.org/officeDocument/2006/relationships">
+  <p:cSld>
+    <p:spTree>
+      <p:nvGrpSpPr>
+        <p:cNvPr id="1" name=""/>
+        <p:cNvGrpSpPr/>
+        <p:nvPr/>
+      </p:nvGrpSpPr>
+      <p:grpSpPr/>
+      <p:sp>
+        <p:nvSpPr>
+          <p:cNvPr id="2" name="Text Placeholder 1"/>
+          <p:cNvSpPr>
+            <a:spLocks noGrp="1"/>
+          </p:cNvSpPr>
+          <p:nvPr>
+            <p:ph type="body" idx="10" sz="quarter"/>
+          </p:nvPr>
+        </p:nvSpPr>
+        <p:spPr/>
+        <p:txBody>
+          <a:bodyPr/>
+          <a:lstStyle/>
+          <a:p/>
+        </p:txBody>
+      </p:sp>
+      <p:sp>
+        <p:nvSpPr>
+          <p:cNvPr id="3" name="Text Placeholder 2"/>
+          <p:cNvSpPr>
+            <a:spLocks noGrp="1"/>
+          </p:cNvSpPr>
+          <p:nvPr>
+            <p:ph type="body" idx="12" sz="quarter"/>
+          </p:nvPr>
+        </p:nvSpPr>
+        <p:spPr/>
+        <p:txBody>
+          <a:bodyPr/>
+          <a:lstStyle/>
+          <a:p/>
+        </p:txBody>
+      </p:sp>
+      <p:sp>
+        <p:nvSpPr>
+          <p:cNvPr id="4" name="TextBox 3"/>
+          <p:cNvSpPr txBox="1"/>
+          <p:nvPr/>
+        </p:nvSpPr>
+        <p:spPr>
+          <a:xfrm>
+            <a:off x="457200" y="274320"/>
+            <a:ext cx="8229600" cy="914400"/>
+          </a:xfrm>
+          <a:prstGeom prst="rect">
+            <a:avLst/>
+          </a:prstGeom>
+          <a:noFill/>
+        </p:spPr>
+        <p:txBody>
+          <a:bodyPr wrap="none">
+            <a:spAutoFit/>
+          </a:bodyPr>
+          <a:lstStyle/>
+          <a:p>
+            <a:r>
+              <a:t>IQC 入料檢驗標準</a:t>
+            </a:r>
+          </a:p>
+        </p:txBody>
+      </p:sp>
+      <p:graphicFrame>
+        <p:nvGraphicFramePr>
+          <p:cNvPr id="5" name="Table 4"/>
+          <p:cNvGraphicFramePr>
+            <a:graphicFrameLocks noGrp="1"/>
+          </p:cNvGraphicFramePr>
+          <p:nvPr/>
+        </p:nvGraphicFramePr>
+        <p:xfrm>
+          <a:off x="457200" y="1280160"/>
+          <a:ext cx="11277600" cy="4114800"/>
+        </p:xfrm>
+        <a:graphic>
+          <a:graphicData uri="http://schemas.openxmlformats.org/drawingml/2006/table">
+            <a:tbl>
+              <a:tblPr firstRow="1" bandRow="1">
+                <a:tableStyleId>{5C22544A-7EE6-4342-B048-85BDC9FD1C3A}</a:tableStyleId>
+              </a:tblPr>
+              <a:tblGrid>
+                <a:gridCol w="2819400"/>
+                <a:gridCol w="2819400"/>
+                <a:gridCol w="2819400"/>
+                <a:gridCol w="2819400"/>
+              </a:tblGrid>
+              <a:tr h="685800">
+                <a:tc>
+                  <a:txBody>
+                    <a:bodyPr/>
+                    <a:lstStyle/>
+                    <a:p>
+                      <a:r>
+                        <a:rPr b="1" sz="1100">
+                          <a:solidFill>
+                            <a:srgbClr val="FFFFFF"/>
+                          </a:solidFill>
+                        </a:rPr>
+                        <a:t>檢驗項目</a:t>
+                      </a:r>
+                    </a:p>
+                  </a:txBody>
+                  <a:tcPr>
+                    <a:solidFill>
+                      <a:srgbClr val="1F4E79"/>
+                    </a:solidFill>
+                  </a:tcPr>
+                </a:tc>
+                <a:tc>
+                  <a:txBody>
+                    <a:bodyPr/>
+                    <a:lstStyle/>
+                    <a:p>
+                      <a:r>
+                        <a:rPr b="1" sz="1100">
+                          <a:solidFill>
+                            <a:srgbClr val="FFFFFF"/>
+                          </a:solidFill>
+                        </a:rPr>
+                        <a:t>抽驗比例</a:t>
+                      </a:r>
+                    </a:p>
+                  </a:txBody>
+                  <a:tcPr>
+                    <a:solidFill>
+                      <a:srgbClr val="1F4E79"/>
+                    </a:solidFill>
+                  </a:tcPr>
+                </a:tc>
+                <a:tc>
+                  <a:txBody>
+                    <a:bodyPr/>
+                    <a:lstStyle/>
+                    <a:p>
+                      <a:r>
+                        <a:rPr b="1" sz="1100">
+                          <a:solidFill>
+                            <a:srgbClr val="FFFFFF"/>
+                          </a:solidFill>
+                        </a:rPr>
+                        <a:t>允收標準 (AQL)</a:t>
+                      </a:r>
+                    </a:p>
+                  </a:txBody>
+                  <a:tcPr>
+                    <a:solidFill>
+                      <a:srgbClr val="1F4E79"/>
+                    </a:solidFill>
+                  </a:tcPr>
+                </a:tc>
+                <a:tc>
+                  <a:txBody>
+                    <a:bodyPr/>
+                    <a:lstStyle/>
+                    <a:p>
+                      <a:r>
+                        <a:rPr b="1" sz="1100">
+                          <a:solidFill>
+                            <a:srgbClr val="FFFFFF"/>
+                          </a:solidFill>
+                        </a:rPr>
+                        <a:t>不合格處置</a:t>
+                      </a:r>
+                    </a:p>
+                  </a:txBody>
+                  <a:tcPr>
+                    <a:solidFill>
+                      <a:srgbClr val="1F4E79"/>
+                    </a:solidFill>
+                  </a:tcPr>
+                </a:tc>
+              </a:tr>
+              <a:tr h="685800">
+                <a:tc>
+                  <a:txBody>
+                    <a:bodyPr/>
+                    <a:lstStyle/>
+                    <a:p>
+                      <a:r>
+                        <a:rPr sz="1000"/>
+                        <a:t>外觀檢查</a:t>
+                      </a:r>
+                    </a:p>
+                  </a:txBody>
+                  <a:tcPr/>
+                </a:tc>
+                <a:tc>
+                  <a:txBody>
+                    <a:bodyPr/>
+                    <a:lstStyle/>
+                    <a:p>
+                      <a:r>
+                        <a:rPr sz="1000"/>
+                        <a:t>AQL 1.0</a:t>
+                      </a:r>
+                    </a:p>
+                  </a:txBody>
+                  <a:tcPr/>
+                </a:tc>
+                <a:tc>
+                  <a:txBody>
+                    <a:bodyPr/>
+                    <a:lstStyle/>
+                    <a:p>
+                      <a:r>
+                        <a:rPr sz="1000"/>
+                        <a:t>MIL-STD-105E Level II</a:t>
+                      </a:r>
+                    </a:p>
+                  </a:txBody>
+                  <a:tcPr/>
+                </a:tc>
+                <a:tc>
+                  <a:txBody>
+                    <a:bodyPr/>
+                    <a:lstStyle/>
+                    <a:p>
+                      <a:r>
+                        <a:rPr sz="1000"/>
+                        <a:t>退貨重工</a:t>
+                      </a:r>
+                    </a:p>
+                  </a:txBody>
+                  <a:tcPr/>
+                </a:tc>
+              </a:tr>
+              <a:tr h="685800">
+                <a:tc>
+                  <a:txBody>
+                    <a:bodyPr/>
+                    <a:lstStyle/>
+                    <a:p>
+                      <a:r>
+                        <a:rPr sz="1000"/>
+                        <a:t>尺寸量測</a:t>
+                      </a:r>
+                    </a:p>
+                  </a:txBody>
+                  <a:tcPr/>
+                </a:tc>
+                <a:tc>
+                  <a:txBody>
+                    <a:bodyPr/>
+                    <a:lstStyle/>
+                    <a:p>
+                      <a:r>
+                        <a:rPr sz="1000"/>
+                        <a:t>5%</a:t>
+                      </a:r>
+                    </a:p>
+                  </a:txBody>
+                  <a:tcPr/>
+                </a:tc>
+                <a:tc>
+                  <a:txBody>
+                    <a:bodyPr/>
+                    <a:lstStyle/>
+                    <a:p>
+                      <a:r>
+                        <a:rPr sz="1000"/>
+                        <a:t>±0.05 mm</a:t>
+                      </a:r>
+                    </a:p>
+                  </a:txBody>
+                  <a:tcPr/>
+                </a:tc>
+                <a:tc>
+                  <a:txBody>
+                    <a:bodyPr/>
+                    <a:lstStyle/>
+                    <a:p>
+                      <a:r>
+                        <a:rPr sz="1000"/>
+                        <a:t>隔離/特採</a:t>
+                      </a:r>
+                    </a:p>
+                  </a:txBody>
+                  <a:tcPr/>
+                </a:tc>
+              </a:tr>
+              <a:tr h="685800">
+                <a:tc>
+                  <a:txBody>
+                    <a:bodyPr/>
+                    <a:lstStyle/>
+                    <a:p>
+                      <a:r>
+                        <a:rPr sz="1000"/>
+                        <a:t>電性測試</a:t>
+                      </a:r>
+                    </a:p>
+                  </a:txBody>
+                  <a:tcPr/>
+                </a:tc>
+                <a:tc>
+                  <a:txBody>
+                    <a:bodyPr/>
+                    <a:lstStyle/>
+                    <a:p>
+                      <a:r>
+                        <a:rPr sz="1000"/>
+                        <a:t>100%</a:t>
+                      </a:r>
+                    </a:p>
+                  </a:txBody>
+                  <a:tcPr/>
+                </a:tc>
+                <a:tc>
+                  <a:txBody>
+                    <a:bodyPr/>
+                    <a:lstStyle/>
+                    <a:p>
+                      <a:r>
+                        <a:rPr sz="1000"/>
+                        <a:t>全數測試</a:t>
+                      </a:r>
+                    </a:p>
+                  </a:txBody>
+                  <a:tcPr/>
+                </a:tc>
+                <a:tc>
+                  <a:txBody>
+                    <a:bodyPr/>
+                    <a:lstStyle/>
+                    <a:p>
+                      <a:r>
+                        <a:rPr sz="1000"/>
+                        <a:t>退貨/報廢</a:t>
+                      </a:r>
+                    </a:p>
+                  </a:txBody>
+                  <a:tcPr/>
+                </a:tc>
+              </a:tr>
+              <a:tr h="685800">
+                <a:tc>
+                  <a:txBody>
+                    <a:bodyPr/>
+                    <a:lstStyle/>
+                    <a:p>
+                      <a:r>
+                        <a:rPr sz="1000"/>
+                        <a:t>X-ray 檢查</a:t>
+                      </a:r>
+                    </a:p>
+                  </a:txBody>
+                  <a:tcPr/>
+                </a:tc>
+                <a:tc>
+                  <a:txBody>
+                    <a:bodyPr/>
+                    <a:lstStyle/>
+                    <a:p>
+                      <a:r>
+                        <a:rPr sz="1000"/>
+                        <a:t>10%</a:t>
+                      </a:r>
+                    </a:p>
+                  </a:txBody>
+                  <a:tcPr/>
+                </a:tc>
+                <a:tc>
+                  <a:txBody>
+                    <a:bodyPr/>
+                    <a:lstStyle/>
+                    <a:p>
+                      <a:r>
+                        <a:rPr sz="1000"/>
+                        <a:t>無空洞、裂痕</a:t>
+                      </a:r>
+                    </a:p>
+                  </a:txBody>
+                  <a:tcPr/>
+                </a:tc>
+                <a:tc>
+                  <a:txBody>
+                    <a:bodyPr/>
+                    <a:lstStyle/>
+                    <a:p>
+                      <a:r>
+                        <a:rPr sz="1000"/>
+                        <a:t>重工</a:t>
+                      </a:r>
+                    </a:p>
+                  </a:txBody>
+                  <a:tcPr/>
+                </a:tc>
+              </a:tr>
+              <a:tr h="685800">
+                <a:tc>
+                  <a:txBody>
+                    <a:bodyPr/>
+                    <a:lstStyle/>
+                    <a:p>
+                      <a:r>
+                        <a:rPr sz="1000"/>
+                        <a:t>DPA 分析</a:t>
+                      </a:r>
+                    </a:p>
+                  </a:txBody>
+                  <a:tcPr/>
+                </a:tc>
+                <a:tc>
+                  <a:txBody>
+                    <a:bodyPr/>
+                    <a:lstStyle/>
+                    <a:p>
+                      <a:r>
+                        <a:rPr sz="1000"/>
+                        <a:t>1 pcs/批</a:t>
+                      </a:r>
+                    </a:p>
+                  </a:txBody>
+                  <a:tcPr/>
+                </a:tc>
+                <a:tc>
+                  <a:txBody>
+                    <a:bodyPr/>
+                    <a:lstStyle/>
+                    <a:p>
+                      <a:r>
+                        <a:rPr sz="1000"/>
+                        <a:t>結構完整</a:t>
+                      </a:r>
+                    </a:p>
+                  </a:txBody>
+                  <a:tcPr/>
+                </a:tc>
+                <a:tc>
+                  <a:txBody>
+                    <a:bodyPr/>
+                    <a:lstStyle/>
+                    <a:p>
+                      <a:r>
+                        <a:rPr sz="1000"/>
+                        <a:t>退貨</a:t>
+                      </a:r>
+                    </a:p>
+                  </a:txBody>
+                  <a:tcPr/>
+                </a:tc>
+              </a:tr>
+            </a:tbl>
+          </a:graphicData>
+        </a:graphic>
+      </p:graphicFrame>
+      <p:sp>
+        <p:nvSpPr>
+          <p:cNvPr id="6" name="TextBox 5"/>
+          <p:cNvSpPr txBox="1"/>
+          <p:nvPr/>
+        </p:nvSpPr>
+        <p:spPr>
+          <a:xfrm>
+            <a:off x="457200" y="5577840"/>
+            <a:ext cx="11277600" cy="731520"/>
+          </a:xfrm>
+          <a:prstGeom prst="rect">
+            <a:avLst/>
+          </a:prstGeom>
+          <a:noFill/>
+        </p:spPr>
+        <p:txBody>
+          <a:bodyPr wrap="square">
+            <a:spAutoFit/>
+          </a:bodyPr>
+          <a:lstStyle/>
+          <a:p>
+            <a:pPr>
+              <a:defRPr sz="1000">
+                <a:solidFill>
+                  <a:srgbClr val="808080"/>
+                </a:solidFill>
+              </a:defRPr>
+            </a:pPr>
+            <a:r>
+              <a:t>✓ 此頁為 v3.1.1 新增的標準化對照表,提供 IQC 抽驗比例與 KM 監測頻率</a:t>
+            </a:r>
+          </a:p>
+        </p:txBody>
+      </p:sp>
+    </p:spTree>
+  </p:cSld>
+  <p:clrMapOvr>
+    <a:masterClrMapping/>
+  </p:clrMapOvr>
+</p:sld>
+</file>
+
+<file path=ppt/slides/slide16.xml><?xml version="1.0" encoding="utf-8"?>
+<p:sld xmlns:a="http://schemas.openxmlformats.org/drawingml/2006/main" xmlns:p="http://schemas.openxmlformats.org/presentationml/2006/main" xmlns:r="http://schemas.openxmlformats.org/officeDocument/2006/relationships">
+  <p:cSld>
+    <p:spTree>
+      <p:nvGrpSpPr>
+        <p:cNvPr id="1" name=""/>
+        <p:cNvGrpSpPr/>
+        <p:nvPr/>
+      </p:nvGrpSpPr>
+      <p:grpSpPr/>
+      <p:sp>
+        <p:nvSpPr>
+          <p:cNvPr id="2" name="Text Placeholder 1"/>
+          <p:cNvSpPr>
+            <a:spLocks noGrp="1"/>
+          </p:cNvSpPr>
+          <p:nvPr>
+            <p:ph type="body" idx="10" sz="quarter"/>
+          </p:nvPr>
+        </p:nvSpPr>
+        <p:spPr/>
+        <p:txBody>
+          <a:bodyPr/>
+          <a:lstStyle/>
+          <a:p/>
+        </p:txBody>
+      </p:sp>
+      <p:sp>
+        <p:nvSpPr>
+          <p:cNvPr id="3" name="Text Placeholder 2"/>
+          <p:cNvSpPr>
+            <a:spLocks noGrp="1"/>
+          </p:cNvSpPr>
+          <p:nvPr>
+            <p:ph type="body" idx="12" sz="quarter"/>
+          </p:nvPr>
+        </p:nvSpPr>
+        <p:spPr/>
+        <p:txBody>
+          <a:bodyPr/>
+          <a:lstStyle/>
+          <a:p/>
+        </p:txBody>
+      </p:sp>
+      <p:sp>
+        <p:nvSpPr>
+          <p:cNvPr id="4" name="TextBox 3"/>
+          <p:cNvSpPr txBox="1"/>
+          <p:nvPr/>
+        </p:nvSpPr>
+        <p:spPr>
+          <a:xfrm>
+            <a:off x="457200" y="274320"/>
+            <a:ext cx="8229600" cy="914400"/>
+          </a:xfrm>
+          <a:prstGeom prst="rect">
+            <a:avLst/>
+          </a:prstGeom>
+          <a:noFill/>
+        </p:spPr>
+        <p:txBody>
+          <a:bodyPr wrap="none">
+            <a:spAutoFit/>
+          </a:bodyPr>
+          <a:lstStyle/>
+          <a:p>
+            <a:r>
+              <a:t>監測與知識管理 (KM)</a:t>
+            </a:r>
+          </a:p>
+        </p:txBody>
+      </p:sp>
+      <p:graphicFrame>
+        <p:nvGraphicFramePr>
+          <p:cNvPr id="5" name="Table 4"/>
+          <p:cNvGraphicFramePr>
+            <a:graphicFrameLocks noGrp="1"/>
+          </p:cNvGraphicFramePr>
+          <p:nvPr/>
+        </p:nvGraphicFramePr>
+        <p:xfrm>
+          <a:off x="457200" y="1280160"/>
+          <a:ext cx="11277600" cy="4114800"/>
+        </p:xfrm>
+        <a:graphic>
+          <a:graphicData uri="http://schemas.openxmlformats.org/drawingml/2006/table">
+            <a:tbl>
+              <a:tblPr firstRow="1" bandRow="1">
+                <a:tableStyleId>{5C22544A-7EE6-4342-B048-85BDC9FD1C3A}</a:tableStyleId>
+              </a:tblPr>
+              <a:tblGrid>
+                <a:gridCol w="2819400"/>
+                <a:gridCol w="2819400"/>
+                <a:gridCol w="2819400"/>
+                <a:gridCol w="2819400"/>
+              </a:tblGrid>
+              <a:tr h="685800">
+                <a:tc>
+                  <a:txBody>
+                    <a:bodyPr/>
+                    <a:lstStyle/>
+                    <a:p>
+                      <a:r>
+                        <a:rPr b="1" sz="1100">
+                          <a:solidFill>
+                            <a:srgbClr val="FFFFFF"/>
+                          </a:solidFill>
+                        </a:rPr>
+                        <a:t>項目</a:t>
+                      </a:r>
+                    </a:p>
+                  </a:txBody>
+                  <a:tcPr>
+                    <a:solidFill>
+                      <a:srgbClr val="1F4E79"/>
+                    </a:solidFill>
+                  </a:tcPr>
+                </a:tc>
+                <a:tc>
+                  <a:txBody>
+                    <a:bodyPr/>
+                    <a:lstStyle/>
+                    <a:p>
+                      <a:r>
+                        <a:rPr b="1" sz="1100">
+                          <a:solidFill>
+                            <a:srgbClr val="FFFFFF"/>
+                          </a:solidFill>
+                        </a:rPr>
+                        <a:t>頻率</a:t>
+                      </a:r>
+                    </a:p>
+                  </a:txBody>
+                  <a:tcPr>
+                    <a:solidFill>
+                      <a:srgbClr val="1F4E79"/>
+                    </a:solidFill>
+                  </a:tcPr>
+                </a:tc>
+                <a:tc>
+                  <a:txBody>
+                    <a:bodyPr/>
+                    <a:lstStyle/>
+                    <a:p>
+                      <a:r>
+                        <a:rPr b="1" sz="1100">
+                          <a:solidFill>
+                            <a:srgbClr val="FFFFFF"/>
+                          </a:solidFill>
+                        </a:rPr>
+                        <a:t>負責單位</a:t>
+                      </a:r>
+                    </a:p>
+                  </a:txBody>
+                  <a:tcPr>
+                    <a:solidFill>
+                      <a:srgbClr val="1F4E79"/>
+                    </a:solidFill>
+                  </a:tcPr>
+                </a:tc>
+                <a:tc>
+                  <a:txBody>
+                    <a:bodyPr/>
+                    <a:lstStyle/>
+                    <a:p>
+                      <a:r>
+                        <a:rPr b="1" sz="1100">
+                          <a:solidFill>
+                            <a:srgbClr val="FFFFFF"/>
+                          </a:solidFill>
+                        </a:rPr>
+                        <a:t>產出文件</a:t>
+                      </a:r>
+                    </a:p>
+                  </a:txBody>
+                  <a:tcPr>
+                    <a:solidFill>
+                      <a:srgbClr val="1F4E79"/>
+                    </a:solidFill>
+                  </a:tcPr>
+                </a:tc>
+              </a:tr>
+              <a:tr h="685800">
+                <a:tc>
+                  <a:txBody>
+                    <a:bodyPr/>
+                    <a:lstStyle/>
+                    <a:p>
+                      <a:r>
+                        <a:rPr sz="1000"/>
+                        <a:t>KMS 登錄</a:t>
+                      </a:r>
+                    </a:p>
+                  </a:txBody>
+                  <a:tcPr/>
+                </a:tc>
+                <a:tc>
+                  <a:txBody>
+                    <a:bodyPr/>
+                    <a:lstStyle/>
+                    <a:p>
+                      <a:r>
+                        <a:rPr sz="1000"/>
+                        <a:t>每案結案</a:t>
+                      </a:r>
+                    </a:p>
+                  </a:txBody>
+                  <a:tcPr/>
+                </a:tc>
+                <a:tc>
+                  <a:txBody>
+                    <a:bodyPr/>
+                    <a:lstStyle/>
+                    <a:p>
+                      <a:r>
+                        <a:rPr sz="1000"/>
+                        <a:t>FAE</a:t>
+                      </a:r>
+                    </a:p>
+                  </a:txBody>
+                  <a:tcPr/>
+                </a:tc>
+                <a:tc>
+                  <a:txBody>
+                    <a:bodyPr/>
+                    <a:lstStyle/>
+                    <a:p>
+                      <a:r>
+                        <a:rPr sz="1000"/>
+                        <a:t>KM 文件編號</a:t>
+                      </a:r>
+                    </a:p>
+                  </a:txBody>
+                  <a:tcPr/>
+                </a:tc>
+              </a:tr>
+              <a:tr h="685800">
+                <a:tc>
+                  <a:txBody>
+                    <a:bodyPr/>
+                    <a:lstStyle/>
+                    <a:p>
+                      <a:r>
+                        <a:rPr sz="1000"/>
+                        <a:t>失效資料庫更新</a:t>
+                      </a:r>
+                    </a:p>
+                  </a:txBody>
+                  <a:tcPr/>
+                </a:tc>
+                <a:tc>
+                  <a:txBody>
+                    <a:bodyPr/>
+                    <a:lstStyle/>
+                    <a:p>
+                      <a:r>
+                        <a:rPr sz="1000"/>
+                        <a:t>每月</a:t>
+                      </a:r>
+                    </a:p>
+                  </a:txBody>
+                  <a:tcPr/>
+                </a:tc>
+                <a:tc>
+                  <a:txBody>
+                    <a:bodyPr/>
+                    <a:lstStyle/>
+                    <a:p>
+                      <a:r>
+                        <a:rPr sz="1000"/>
+                        <a:t>QRA</a:t>
+                      </a:r>
+                    </a:p>
+                  </a:txBody>
+                  <a:tcPr/>
+                </a:tc>
+                <a:tc>
+                  <a:txBody>
+                    <a:bodyPr/>
+                    <a:lstStyle/>
+                    <a:p>
+                      <a:r>
+                        <a:rPr sz="1000"/>
+                        <a:t>失效資料庫月報</a:t>
+                      </a:r>
+                    </a:p>
+                  </a:txBody>
+                  <a:tcPr/>
+                </a:tc>
+              </a:tr>
+              <a:tr h="685800">
+                <a:tc>
+                  <a:txBody>
+                    <a:bodyPr/>
+                    <a:lstStyle/>
+                    <a:p>
+                      <a:r>
+                        <a:rPr sz="1000"/>
+                        <a:t>跨部門分享會議</a:t>
+                      </a:r>
+                    </a:p>
+                  </a:txBody>
+                  <a:tcPr/>
+                </a:tc>
+                <a:tc>
+                  <a:txBody>
+                    <a:bodyPr/>
+                    <a:lstStyle/>
+                    <a:p>
+                      <a:r>
+                        <a:rPr sz="1000"/>
+                        <a:t>每季</a:t>
+                      </a:r>
+                    </a:p>
+                  </a:txBody>
+                  <a:tcPr/>
+                </a:tc>
+                <a:tc>
+                  <a:txBody>
+                    <a:bodyPr/>
+                    <a:lstStyle/>
+                    <a:p>
+                      <a:r>
+                        <a:rPr sz="1000"/>
+                        <a:t>PM</a:t>
+                      </a:r>
+                    </a:p>
+                  </a:txBody>
+                  <a:tcPr/>
+                </a:tc>
+                <a:tc>
+                  <a:txBody>
+                    <a:bodyPr/>
+                    <a:lstStyle/>
+                    <a:p>
+                      <a:r>
+                        <a:rPr sz="1000"/>
+                        <a:t>會議紀錄</a:t>
+                      </a:r>
+                    </a:p>
+                  </a:txBody>
+                  <a:tcPr/>
+                </a:tc>
+              </a:tr>
+              <a:tr h="685800">
+                <a:tc>
+                  <a:txBody>
+                    <a:bodyPr/>
+                    <a:lstStyle/>
+                    <a:p>
+                      <a:r>
+                        <a:rPr sz="1000"/>
+                        <a:t>同類型失效再發監測</a:t>
+                      </a:r>
+                    </a:p>
+                  </a:txBody>
+                  <a:tcPr/>
+                </a:tc>
+                <a:tc>
+                  <a:txBody>
+                    <a:bodyPr/>
+                    <a:lstStyle/>
+                    <a:p>
+                      <a:r>
+                        <a:rPr sz="1000"/>
+                        <a:t>每月</a:t>
+                      </a:r>
+                    </a:p>
+                  </a:txBody>
+                  <a:tcPr/>
+                </a:tc>
+                <a:tc>
+                  <a:txBody>
+                    <a:bodyPr/>
+                    <a:lstStyle/>
+                    <a:p>
+                      <a:r>
+                        <a:rPr sz="1000"/>
+                        <a:t>QRA</a:t>
+                      </a:r>
+                    </a:p>
+                  </a:txBody>
+                  <a:tcPr/>
+                </a:tc>
+                <a:tc>
+                  <a:txBody>
+                    <a:bodyPr/>
+                    <a:lstStyle/>
+                    <a:p>
+                      <a:r>
+                        <a:rPr sz="1000"/>
+                        <a:t>失效趨勢分析</a:t>
+                      </a:r>
+                    </a:p>
+                  </a:txBody>
+                  <a:tcPr/>
+                </a:tc>
+              </a:tr>
+              <a:tr h="685800">
+                <a:tc>
+                  <a:txBody>
+                    <a:bodyPr/>
+                    <a:lstStyle/>
+                    <a:p>
+                      <a:r>
+                        <a:rPr sz="1000"/>
+                        <a:t>SOP 改版提案</a:t>
+                      </a:r>
+                    </a:p>
+                  </a:txBody>
+                  <a:tcPr/>
+                </a:tc>
+                <a:tc>
+                  <a:txBody>
+                    <a:bodyPr/>
+                    <a:lstStyle/>
+                    <a:p>
+                      <a:r>
+                        <a:rPr sz="1000"/>
+                        <a:t>每半年</a:t>
+                      </a:r>
+                    </a:p>
+                  </a:txBody>
+                  <a:tcPr/>
+                </a:tc>
+                <a:tc>
+                  <a:txBody>
+                    <a:bodyPr/>
+                    <a:lstStyle/>
+                    <a:p>
+                      <a:r>
+                        <a:rPr sz="1000"/>
+                        <a:t>製程工程師</a:t>
+                      </a:r>
+                    </a:p>
+                  </a:txBody>
+                  <a:tcPr/>
+                </a:tc>
+                <a:tc>
+                  <a:txBody>
+                    <a:bodyPr/>
+                    <a:lstStyle/>
+                    <a:p>
+                      <a:r>
+                        <a:rPr sz="1000"/>
+                        <a:t>SOP 改版單</a:t>
+                      </a:r>
+                    </a:p>
+                  </a:txBody>
+                  <a:tcPr/>
+                </a:tc>
+              </a:tr>
+            </a:tbl>
+          </a:graphicData>
+        </a:graphic>
+      </p:graphicFrame>
+      <p:sp>
+        <p:nvSpPr>
+          <p:cNvPr id="6" name="TextBox 5"/>
+          <p:cNvSpPr txBox="1"/>
+          <p:nvPr/>
+        </p:nvSpPr>
+        <p:spPr>
+          <a:xfrm>
+            <a:off x="457200" y="5577840"/>
+            <a:ext cx="11277600" cy="731520"/>
+          </a:xfrm>
+          <a:prstGeom prst="rect">
+            <a:avLst/>
+          </a:prstGeom>
+          <a:noFill/>
+        </p:spPr>
+        <p:txBody>
+          <a:bodyPr wrap="square">
+            <a:spAutoFit/>
+          </a:bodyPr>
+          <a:lstStyle/>
+          <a:p>
+            <a:pPr>
+              <a:defRPr sz="1000">
+                <a:solidFill>
+                  <a:srgbClr val="808080"/>
+                </a:solidFill>
+              </a:defRPr>
+            </a:pPr>
+            <a:r>
+              <a:t>✓ 此頁為 v3.1.1 新增的標準化對照表,提供 IQC 抽驗比例與 KM 監測頻率</a:t>
+            </a:r>
+          </a:p>
+        </p:txBody>
+      </p:sp>
+    </p:spTree>
+  </p:cSld>
+  <p:clrMapOvr>
+    <a:masterClrMapping/>
+  </p:clrMapOvr>
+</p:sld>
+</file>
+
 <file path=ppt/slides/slide2.xml><?xml version="1.0" encoding="utf-8"?>
 <p:sld xmlns:a="http://schemas.openxmlformats.org/drawingml/2006/main" xmlns:r="http://schemas.openxmlformats.org/officeDocument/2006/relationships" xmlns:p="http://schemas.openxmlformats.org/presentationml/2006/main">
   <p:cSld>
@@ -11068,8 +14128,810 @@
         </p:nvSpPr>
         <p:spPr>
           <a:xfrm>
-            <a:off x="8686800" y="1371600"/>
-            <a:ext cx="3017520" cy="1554480"/>
+            <a:off x="914400" y="4754880"/>
+            <a:ext cx="1371600" cy="259080"/>
+          </a:xfrm>
+          <a:prstGeom prst="rect">
+            <a:avLst/>
+          </a:prstGeom>
+          <a:noFill/>
+        </p:spPr>
+        <p:txBody>
+          <a:bodyPr wrap="square" anchor="ctr">
+            <a:spAutoFit/>
+          </a:bodyPr>
+          <a:lstStyle/>
+          <a:p>
+            <a:r>
+              <a:rPr sz="1000" b="1"/>
+              <a:t>基本資訊完整性</a:t>
+            </a:r>
+          </a:p>
+        </p:txBody>
+      </p:sp>
+      <p:sp>
+        <p:nvSpPr>
+          <p:cNvPr id="11" name="Rectangle 10"/>
+          <p:cNvSpPr/>
+          <p:nvPr/>
+        </p:nvSpPr>
+        <p:spPr>
+          <a:xfrm>
+            <a:off x="2286000" y="4800600"/>
+            <a:ext cx="9448800" cy="167640"/>
+          </a:xfrm>
+          <a:prstGeom prst="rect">
+            <a:avLst/>
+          </a:prstGeom>
+          <a:solidFill>
+            <a:srgbClr val="D9D9D9"/>
+          </a:solidFill>
+          <a:ln>
+            <a:noFill/>
+          </a:ln>
+        </p:spPr>
+        <p:style>
+          <a:lnRef idx="1">
+            <a:schemeClr val="accent1"/>
+          </a:lnRef>
+          <a:fillRef idx="3">
+            <a:schemeClr val="accent1"/>
+          </a:fillRef>
+          <a:effectRef idx="2">
+            <a:schemeClr val="accent1"/>
+          </a:effectRef>
+          <a:fontRef idx="minor">
+            <a:schemeClr val="lt1"/>
+          </a:fontRef>
+        </p:style>
+        <p:txBody>
+          <a:bodyPr rtlCol="0" anchor="ctr"/>
+          <a:lstStyle/>
+          <a:p>
+            <a:pPr algn="ctr"/>
+          </a:p>
+        </p:txBody>
+      </p:sp>
+      <p:sp>
+        <p:nvSpPr>
+          <p:cNvPr id="12" name="Rectangle 11"/>
+          <p:cNvSpPr/>
+          <p:nvPr/>
+        </p:nvSpPr>
+        <p:spPr>
+          <a:xfrm>
+            <a:off x="2286000" y="4800600"/>
+            <a:ext cx="3779520" cy="167640"/>
+          </a:xfrm>
+          <a:prstGeom prst="rect">
+            <a:avLst/>
+          </a:prstGeom>
+          <a:solidFill>
+            <a:srgbClr val="C00000"/>
+          </a:solidFill>
+          <a:ln>
+            <a:noFill/>
+          </a:ln>
+        </p:spPr>
+        <p:style>
+          <a:lnRef idx="1">
+            <a:schemeClr val="accent1"/>
+          </a:lnRef>
+          <a:fillRef idx="3">
+            <a:schemeClr val="accent1"/>
+          </a:fillRef>
+          <a:effectRef idx="2">
+            <a:schemeClr val="accent1"/>
+          </a:effectRef>
+          <a:fontRef idx="minor">
+            <a:schemeClr val="lt1"/>
+          </a:fontRef>
+        </p:style>
+        <p:txBody>
+          <a:bodyPr rtlCol="0" anchor="ctr"/>
+          <a:lstStyle/>
+          <a:p>
+            <a:pPr algn="ctr"/>
+          </a:p>
+        </p:txBody>
+      </p:sp>
+      <p:sp>
+        <p:nvSpPr>
+          <p:cNvPr id="13" name="TextBox 12"/>
+          <p:cNvSpPr txBox="1"/>
+          <p:nvPr/>
+        </p:nvSpPr>
+        <p:spPr>
+          <a:xfrm>
+            <a:off x="11780520" y="4754880"/>
+            <a:ext cx="411480" cy="259080"/>
+          </a:xfrm>
+          <a:prstGeom prst="rect">
+            <a:avLst/>
+          </a:prstGeom>
+          <a:noFill/>
+        </p:spPr>
+        <p:txBody>
+          <a:bodyPr wrap="none" anchor="ctr">
+            <a:spAutoFit/>
+          </a:bodyPr>
+          <a:lstStyle/>
+          <a:p>
+            <a:r>
+              <a:rPr sz="900" b="1">
+                <a:solidFill>
+                  <a:srgbClr val="C00000"/>
+                </a:solidFill>
+              </a:rPr>
+              <a:t>40/100</a:t>
+            </a:r>
+          </a:p>
+        </p:txBody>
+      </p:sp>
+      <p:sp>
+        <p:nvSpPr>
+          <p:cNvPr id="14" name="TextBox 13"/>
+          <p:cNvSpPr txBox="1"/>
+          <p:nvPr/>
+        </p:nvSpPr>
+        <p:spPr>
+          <a:xfrm>
+            <a:off x="914400" y="5013960"/>
+            <a:ext cx="1371600" cy="259080"/>
+          </a:xfrm>
+          <a:prstGeom prst="rect">
+            <a:avLst/>
+          </a:prstGeom>
+          <a:noFill/>
+        </p:spPr>
+        <p:txBody>
+          <a:bodyPr wrap="square" anchor="ctr">
+            <a:spAutoFit/>
+          </a:bodyPr>
+          <a:lstStyle/>
+          <a:p>
+            <a:r>
+              <a:rPr sz="1000" b="1"/>
+              <a:t>問題描述與定義</a:t>
+            </a:r>
+          </a:p>
+        </p:txBody>
+      </p:sp>
+      <p:sp>
+        <p:nvSpPr>
+          <p:cNvPr id="15" name="Rectangle 14"/>
+          <p:cNvSpPr/>
+          <p:nvPr/>
+        </p:nvSpPr>
+        <p:spPr>
+          <a:xfrm>
+            <a:off x="2286000" y="5059680"/>
+            <a:ext cx="9448800" cy="167640"/>
+          </a:xfrm>
+          <a:prstGeom prst="rect">
+            <a:avLst/>
+          </a:prstGeom>
+          <a:solidFill>
+            <a:srgbClr val="D9D9D9"/>
+          </a:solidFill>
+          <a:ln>
+            <a:noFill/>
+          </a:ln>
+        </p:spPr>
+        <p:style>
+          <a:lnRef idx="1">
+            <a:schemeClr val="accent1"/>
+          </a:lnRef>
+          <a:fillRef idx="3">
+            <a:schemeClr val="accent1"/>
+          </a:fillRef>
+          <a:effectRef idx="2">
+            <a:schemeClr val="accent1"/>
+          </a:effectRef>
+          <a:fontRef idx="minor">
+            <a:schemeClr val="lt1"/>
+          </a:fontRef>
+        </p:style>
+        <p:txBody>
+          <a:bodyPr rtlCol="0" anchor="ctr"/>
+          <a:lstStyle/>
+          <a:p>
+            <a:pPr algn="ctr"/>
+          </a:p>
+        </p:txBody>
+      </p:sp>
+      <p:sp>
+        <p:nvSpPr>
+          <p:cNvPr id="16" name="Rectangle 15"/>
+          <p:cNvSpPr/>
+          <p:nvPr/>
+        </p:nvSpPr>
+        <p:spPr>
+          <a:xfrm>
+            <a:off x="2286000" y="5059680"/>
+            <a:ext cx="4251960" cy="167640"/>
+          </a:xfrm>
+          <a:prstGeom prst="rect">
+            <a:avLst/>
+          </a:prstGeom>
+          <a:solidFill>
+            <a:srgbClr val="C00000"/>
+          </a:solidFill>
+          <a:ln>
+            <a:noFill/>
+          </a:ln>
+        </p:spPr>
+        <p:style>
+          <a:lnRef idx="1">
+            <a:schemeClr val="accent1"/>
+          </a:lnRef>
+          <a:fillRef idx="3">
+            <a:schemeClr val="accent1"/>
+          </a:fillRef>
+          <a:effectRef idx="2">
+            <a:schemeClr val="accent1"/>
+          </a:effectRef>
+          <a:fontRef idx="minor">
+            <a:schemeClr val="lt1"/>
+          </a:fontRef>
+        </p:style>
+        <p:txBody>
+          <a:bodyPr rtlCol="0" anchor="ctr"/>
+          <a:lstStyle/>
+          <a:p>
+            <a:pPr algn="ctr"/>
+          </a:p>
+        </p:txBody>
+      </p:sp>
+      <p:sp>
+        <p:nvSpPr>
+          <p:cNvPr id="17" name="TextBox 16"/>
+          <p:cNvSpPr txBox="1"/>
+          <p:nvPr/>
+        </p:nvSpPr>
+        <p:spPr>
+          <a:xfrm>
+            <a:off x="11780520" y="5013960"/>
+            <a:ext cx="411480" cy="259080"/>
+          </a:xfrm>
+          <a:prstGeom prst="rect">
+            <a:avLst/>
+          </a:prstGeom>
+          <a:noFill/>
+        </p:spPr>
+        <p:txBody>
+          <a:bodyPr wrap="none" anchor="ctr">
+            <a:spAutoFit/>
+          </a:bodyPr>
+          <a:lstStyle/>
+          <a:p>
+            <a:r>
+              <a:rPr sz="900" b="1">
+                <a:solidFill>
+                  <a:srgbClr val="C00000"/>
+                </a:solidFill>
+              </a:rPr>
+              <a:t>45/100</a:t>
+            </a:r>
+          </a:p>
+        </p:txBody>
+      </p:sp>
+      <p:sp>
+        <p:nvSpPr>
+          <p:cNvPr id="18" name="TextBox 17"/>
+          <p:cNvSpPr txBox="1"/>
+          <p:nvPr/>
+        </p:nvSpPr>
+        <p:spPr>
+          <a:xfrm>
+            <a:off x="914400" y="5273040"/>
+            <a:ext cx="1371600" cy="259080"/>
+          </a:xfrm>
+          <a:prstGeom prst="rect">
+            <a:avLst/>
+          </a:prstGeom>
+          <a:noFill/>
+        </p:spPr>
+        <p:txBody>
+          <a:bodyPr wrap="square" anchor="ctr">
+            <a:spAutoFit/>
+          </a:bodyPr>
+          <a:lstStyle/>
+          <a:p>
+            <a:r>
+              <a:rPr sz="1000" b="1"/>
+              <a:t>分析方法與流程</a:t>
+            </a:r>
+          </a:p>
+        </p:txBody>
+      </p:sp>
+      <p:sp>
+        <p:nvSpPr>
+          <p:cNvPr id="19" name="Rectangle 18"/>
+          <p:cNvSpPr/>
+          <p:nvPr/>
+        </p:nvSpPr>
+        <p:spPr>
+          <a:xfrm>
+            <a:off x="2286000" y="5318760"/>
+            <a:ext cx="9448800" cy="167640"/>
+          </a:xfrm>
+          <a:prstGeom prst="rect">
+            <a:avLst/>
+          </a:prstGeom>
+          <a:solidFill>
+            <a:srgbClr val="D9D9D9"/>
+          </a:solidFill>
+          <a:ln>
+            <a:noFill/>
+          </a:ln>
+        </p:spPr>
+        <p:style>
+          <a:lnRef idx="1">
+            <a:schemeClr val="accent1"/>
+          </a:lnRef>
+          <a:fillRef idx="3">
+            <a:schemeClr val="accent1"/>
+          </a:fillRef>
+          <a:effectRef idx="2">
+            <a:schemeClr val="accent1"/>
+          </a:effectRef>
+          <a:fontRef idx="minor">
+            <a:schemeClr val="lt1"/>
+          </a:fontRef>
+        </p:style>
+        <p:txBody>
+          <a:bodyPr rtlCol="0" anchor="ctr"/>
+          <a:lstStyle/>
+          <a:p>
+            <a:pPr algn="ctr"/>
+          </a:p>
+        </p:txBody>
+      </p:sp>
+      <p:sp>
+        <p:nvSpPr>
+          <p:cNvPr id="20" name="Rectangle 19"/>
+          <p:cNvSpPr/>
+          <p:nvPr/>
+        </p:nvSpPr>
+        <p:spPr>
+          <a:xfrm>
+            <a:off x="2286000" y="5318760"/>
+            <a:ext cx="2834640" cy="167640"/>
+          </a:xfrm>
+          <a:prstGeom prst="rect">
+            <a:avLst/>
+          </a:prstGeom>
+          <a:solidFill>
+            <a:srgbClr val="C00000"/>
+          </a:solidFill>
+          <a:ln>
+            <a:noFill/>
+          </a:ln>
+        </p:spPr>
+        <p:style>
+          <a:lnRef idx="1">
+            <a:schemeClr val="accent1"/>
+          </a:lnRef>
+          <a:fillRef idx="3">
+            <a:schemeClr val="accent1"/>
+          </a:fillRef>
+          <a:effectRef idx="2">
+            <a:schemeClr val="accent1"/>
+          </a:effectRef>
+          <a:fontRef idx="minor">
+            <a:schemeClr val="lt1"/>
+          </a:fontRef>
+        </p:style>
+        <p:txBody>
+          <a:bodyPr rtlCol="0" anchor="ctr"/>
+          <a:lstStyle/>
+          <a:p>
+            <a:pPr algn="ctr"/>
+          </a:p>
+        </p:txBody>
+      </p:sp>
+      <p:sp>
+        <p:nvSpPr>
+          <p:cNvPr id="21" name="TextBox 20"/>
+          <p:cNvSpPr txBox="1"/>
+          <p:nvPr/>
+        </p:nvSpPr>
+        <p:spPr>
+          <a:xfrm>
+            <a:off x="11780520" y="5273040"/>
+            <a:ext cx="411480" cy="259080"/>
+          </a:xfrm>
+          <a:prstGeom prst="rect">
+            <a:avLst/>
+          </a:prstGeom>
+          <a:noFill/>
+        </p:spPr>
+        <p:txBody>
+          <a:bodyPr wrap="none" anchor="ctr">
+            <a:spAutoFit/>
+          </a:bodyPr>
+          <a:lstStyle/>
+          <a:p>
+            <a:r>
+              <a:rPr sz="900" b="1">
+                <a:solidFill>
+                  <a:srgbClr val="C00000"/>
+                </a:solidFill>
+              </a:rPr>
+              <a:t>30/100</a:t>
+            </a:r>
+          </a:p>
+        </p:txBody>
+      </p:sp>
+      <p:sp>
+        <p:nvSpPr>
+          <p:cNvPr id="22" name="TextBox 21"/>
+          <p:cNvSpPr txBox="1"/>
+          <p:nvPr/>
+        </p:nvSpPr>
+        <p:spPr>
+          <a:xfrm>
+            <a:off x="914400" y="5532120"/>
+            <a:ext cx="1371600" cy="259080"/>
+          </a:xfrm>
+          <a:prstGeom prst="rect">
+            <a:avLst/>
+          </a:prstGeom>
+          <a:noFill/>
+        </p:spPr>
+        <p:txBody>
+          <a:bodyPr wrap="square" anchor="ctr">
+            <a:spAutoFit/>
+          </a:bodyPr>
+          <a:lstStyle/>
+          <a:p>
+            <a:r>
+              <a:rPr sz="1000" b="1"/>
+              <a:t>數據與證據支持</a:t>
+            </a:r>
+          </a:p>
+        </p:txBody>
+      </p:sp>
+      <p:sp>
+        <p:nvSpPr>
+          <p:cNvPr id="23" name="Rectangle 22"/>
+          <p:cNvSpPr/>
+          <p:nvPr/>
+        </p:nvSpPr>
+        <p:spPr>
+          <a:xfrm>
+            <a:off x="2286000" y="5577840"/>
+            <a:ext cx="9448800" cy="167640"/>
+          </a:xfrm>
+          <a:prstGeom prst="rect">
+            <a:avLst/>
+          </a:prstGeom>
+          <a:solidFill>
+            <a:srgbClr val="D9D9D9"/>
+          </a:solidFill>
+          <a:ln>
+            <a:noFill/>
+          </a:ln>
+        </p:spPr>
+        <p:style>
+          <a:lnRef idx="1">
+            <a:schemeClr val="accent1"/>
+          </a:lnRef>
+          <a:fillRef idx="3">
+            <a:schemeClr val="accent1"/>
+          </a:fillRef>
+          <a:effectRef idx="2">
+            <a:schemeClr val="accent1"/>
+          </a:effectRef>
+          <a:fontRef idx="minor">
+            <a:schemeClr val="lt1"/>
+          </a:fontRef>
+        </p:style>
+        <p:txBody>
+          <a:bodyPr rtlCol="0" anchor="ctr"/>
+          <a:lstStyle/>
+          <a:p>
+            <a:pPr algn="ctr"/>
+          </a:p>
+        </p:txBody>
+      </p:sp>
+      <p:sp>
+        <p:nvSpPr>
+          <p:cNvPr id="24" name="Rectangle 23"/>
+          <p:cNvSpPr/>
+          <p:nvPr/>
+        </p:nvSpPr>
+        <p:spPr>
+          <a:xfrm>
+            <a:off x="2286000" y="5577840"/>
+            <a:ext cx="4724400" cy="167640"/>
+          </a:xfrm>
+          <a:prstGeom prst="rect">
+            <a:avLst/>
+          </a:prstGeom>
+          <a:solidFill>
+            <a:srgbClr val="ED7D31"/>
+          </a:solidFill>
+          <a:ln>
+            <a:noFill/>
+          </a:ln>
+        </p:spPr>
+        <p:style>
+          <a:lnRef idx="1">
+            <a:schemeClr val="accent1"/>
+          </a:lnRef>
+          <a:fillRef idx="3">
+            <a:schemeClr val="accent1"/>
+          </a:fillRef>
+          <a:effectRef idx="2">
+            <a:schemeClr val="accent1"/>
+          </a:effectRef>
+          <a:fontRef idx="minor">
+            <a:schemeClr val="lt1"/>
+          </a:fontRef>
+        </p:style>
+        <p:txBody>
+          <a:bodyPr rtlCol="0" anchor="ctr"/>
+          <a:lstStyle/>
+          <a:p>
+            <a:pPr algn="ctr"/>
+          </a:p>
+        </p:txBody>
+      </p:sp>
+      <p:sp>
+        <p:nvSpPr>
+          <p:cNvPr id="25" name="TextBox 24"/>
+          <p:cNvSpPr txBox="1"/>
+          <p:nvPr/>
+        </p:nvSpPr>
+        <p:spPr>
+          <a:xfrm>
+            <a:off x="11780520" y="5532120"/>
+            <a:ext cx="411480" cy="259080"/>
+          </a:xfrm>
+          <a:prstGeom prst="rect">
+            <a:avLst/>
+          </a:prstGeom>
+          <a:noFill/>
+        </p:spPr>
+        <p:txBody>
+          <a:bodyPr wrap="none" anchor="ctr">
+            <a:spAutoFit/>
+          </a:bodyPr>
+          <a:lstStyle/>
+          <a:p>
+            <a:r>
+              <a:rPr sz="900" b="1">
+                <a:solidFill>
+                  <a:srgbClr val="ED7D31"/>
+                </a:solidFill>
+              </a:rPr>
+              <a:t>50/100</a:t>
+            </a:r>
+          </a:p>
+        </p:txBody>
+      </p:sp>
+      <p:sp>
+        <p:nvSpPr>
+          <p:cNvPr id="26" name="TextBox 25"/>
+          <p:cNvSpPr txBox="1"/>
+          <p:nvPr/>
+        </p:nvSpPr>
+        <p:spPr>
+          <a:xfrm>
+            <a:off x="914400" y="5791200"/>
+            <a:ext cx="1371600" cy="259080"/>
+          </a:xfrm>
+          <a:prstGeom prst="rect">
+            <a:avLst/>
+          </a:prstGeom>
+          <a:noFill/>
+        </p:spPr>
+        <p:txBody>
+          <a:bodyPr wrap="square" anchor="ctr">
+            <a:spAutoFit/>
+          </a:bodyPr>
+          <a:lstStyle/>
+          <a:p>
+            <a:r>
+              <a:rPr sz="1000" b="1"/>
+              <a:t>根因分析</a:t>
+            </a:r>
+          </a:p>
+        </p:txBody>
+      </p:sp>
+      <p:sp>
+        <p:nvSpPr>
+          <p:cNvPr id="27" name="Rectangle 26"/>
+          <p:cNvSpPr/>
+          <p:nvPr/>
+        </p:nvSpPr>
+        <p:spPr>
+          <a:xfrm>
+            <a:off x="2286000" y="5836920"/>
+            <a:ext cx="9448800" cy="167640"/>
+          </a:xfrm>
+          <a:prstGeom prst="rect">
+            <a:avLst/>
+          </a:prstGeom>
+          <a:solidFill>
+            <a:srgbClr val="D9D9D9"/>
+          </a:solidFill>
+          <a:ln>
+            <a:noFill/>
+          </a:ln>
+        </p:spPr>
+        <p:style>
+          <a:lnRef idx="1">
+            <a:schemeClr val="accent1"/>
+          </a:lnRef>
+          <a:fillRef idx="3">
+            <a:schemeClr val="accent1"/>
+          </a:fillRef>
+          <a:effectRef idx="2">
+            <a:schemeClr val="accent1"/>
+          </a:effectRef>
+          <a:fontRef idx="minor">
+            <a:schemeClr val="lt1"/>
+          </a:fontRef>
+        </p:style>
+        <p:txBody>
+          <a:bodyPr rtlCol="0" anchor="ctr"/>
+          <a:lstStyle/>
+          <a:p>
+            <a:pPr algn="ctr"/>
+          </a:p>
+        </p:txBody>
+      </p:sp>
+      <p:sp>
+        <p:nvSpPr>
+          <p:cNvPr id="28" name="TextBox 27"/>
+          <p:cNvSpPr txBox="1"/>
+          <p:nvPr/>
+        </p:nvSpPr>
+        <p:spPr>
+          <a:xfrm>
+            <a:off x="11780520" y="5791200"/>
+            <a:ext cx="411480" cy="259080"/>
+          </a:xfrm>
+          <a:prstGeom prst="rect">
+            <a:avLst/>
+          </a:prstGeom>
+          <a:noFill/>
+        </p:spPr>
+        <p:txBody>
+          <a:bodyPr wrap="none" anchor="ctr">
+            <a:spAutoFit/>
+          </a:bodyPr>
+          <a:lstStyle/>
+          <a:p>
+            <a:r>
+              <a:rPr sz="900" b="1">
+                <a:solidFill>
+                  <a:srgbClr val="C00000"/>
+                </a:solidFill>
+              </a:rPr>
+              <a:t>0/100</a:t>
+            </a:r>
+          </a:p>
+        </p:txBody>
+      </p:sp>
+      <p:sp>
+        <p:nvSpPr>
+          <p:cNvPr id="29" name="TextBox 28"/>
+          <p:cNvSpPr txBox="1"/>
+          <p:nvPr/>
+        </p:nvSpPr>
+        <p:spPr>
+          <a:xfrm>
+            <a:off x="914400" y="6050280"/>
+            <a:ext cx="1371600" cy="259080"/>
+          </a:xfrm>
+          <a:prstGeom prst="rect">
+            <a:avLst/>
+          </a:prstGeom>
+          <a:noFill/>
+        </p:spPr>
+        <p:txBody>
+          <a:bodyPr wrap="square" anchor="ctr">
+            <a:spAutoFit/>
+          </a:bodyPr>
+          <a:lstStyle/>
+          <a:p>
+            <a:r>
+              <a:rPr sz="1000" b="1"/>
+              <a:t>改善對策</a:t>
+            </a:r>
+          </a:p>
+        </p:txBody>
+      </p:sp>
+      <p:sp>
+        <p:nvSpPr>
+          <p:cNvPr id="30" name="Rectangle 29"/>
+          <p:cNvSpPr/>
+          <p:nvPr/>
+        </p:nvSpPr>
+        <p:spPr>
+          <a:xfrm>
+            <a:off x="2286000" y="6096000"/>
+            <a:ext cx="9448800" cy="167640"/>
+          </a:xfrm>
+          <a:prstGeom prst="rect">
+            <a:avLst/>
+          </a:prstGeom>
+          <a:solidFill>
+            <a:srgbClr val="D9D9D9"/>
+          </a:solidFill>
+          <a:ln>
+            <a:noFill/>
+          </a:ln>
+        </p:spPr>
+        <p:style>
+          <a:lnRef idx="1">
+            <a:schemeClr val="accent1"/>
+          </a:lnRef>
+          <a:fillRef idx="3">
+            <a:schemeClr val="accent1"/>
+          </a:fillRef>
+          <a:effectRef idx="2">
+            <a:schemeClr val="accent1"/>
+          </a:effectRef>
+          <a:fontRef idx="minor">
+            <a:schemeClr val="lt1"/>
+          </a:fontRef>
+        </p:style>
+        <p:txBody>
+          <a:bodyPr rtlCol="0" anchor="ctr"/>
+          <a:lstStyle/>
+          <a:p>
+            <a:pPr algn="ctr"/>
+          </a:p>
+        </p:txBody>
+      </p:sp>
+      <p:sp>
+        <p:nvSpPr>
+          <p:cNvPr id="31" name="TextBox 30"/>
+          <p:cNvSpPr txBox="1"/>
+          <p:nvPr/>
+        </p:nvSpPr>
+        <p:spPr>
+          <a:xfrm>
+            <a:off x="11780520" y="6050280"/>
+            <a:ext cx="411480" cy="259080"/>
+          </a:xfrm>
+          <a:prstGeom prst="rect">
+            <a:avLst/>
+          </a:prstGeom>
+          <a:noFill/>
+        </p:spPr>
+        <p:txBody>
+          <a:bodyPr wrap="none" anchor="ctr">
+            <a:spAutoFit/>
+          </a:bodyPr>
+          <a:lstStyle/>
+          <a:p>
+            <a:r>
+              <a:rPr sz="900" b="1">
+                <a:solidFill>
+                  <a:srgbClr val="C00000"/>
+                </a:solidFill>
+              </a:rPr>
+              <a:t>0/100</a:t>
+            </a:r>
+          </a:p>
+        </p:txBody>
+      </p:sp>
+      <p:sp>
+        <p:nvSpPr>
+          <p:cNvPr id="32" name="TextBox 31"/>
+          <p:cNvSpPr txBox="1"/>
+          <p:nvPr/>
+        </p:nvSpPr>
+        <p:spPr>
+          <a:xfrm>
+            <a:off x="7620000" y="2743200"/>
+            <a:ext cx="4114800" cy="1371600"/>
           </a:xfrm>
           <a:prstGeom prst="rect">
             <a:avLst/>
@@ -11105,14 +14967,14 @@
       </p:sp>
       <p:sp>
         <p:nvSpPr>
-          <p:cNvPr id="11" name="TextBox 10"/>
+          <p:cNvPr id="33" name="TextBox 32"/>
           <p:cNvSpPr txBox="1"/>
           <p:nvPr/>
         </p:nvSpPr>
         <p:spPr>
           <a:xfrm>
-            <a:off x="8686800" y="3017520"/>
-            <a:ext cx="3017520" cy="2011680"/>
+            <a:off x="7620000" y="4206240"/>
+            <a:ext cx="4114800" cy="1828800"/>
           </a:xfrm>
           <a:prstGeom prst="rect">
             <a:avLst/>
@@ -11141,21 +15003,37 @@
               <a:defRPr sz="1000"/>
             </a:pPr>
             <a:r>
-              <a:t>• 報告中完全沒有提及任何改善對策或預防措施。</a:t>
+              <a:t>• 僅提供部分編號與日期，缺乏產品型號、客戶資訊、製造日期及負責工程師等核心資訊。</a:t>
+            </a:r>
+          </a:p>
+          <a:p>
+            <a:pPr>
+              <a:defRPr sz="1000"/>
+            </a:pPr>
+            <a:r>
+              <a:t>• 有定義測試方法與失效狀態（Fail），但缺乏失效現象的具體描述、失效影響範圍及失效率統計。</a:t>
+            </a:r>
+          </a:p>
+          <a:p>
+            <a:pPr>
+              <a:defRPr sz="1000"/>
+            </a:pPr>
+            <a:r>
+              <a:t>• 僅呈現 Robot Log 與測試參數，完全沒有展示任何實質的失效分析手段（如 SEM, X-ray 或軟體 Debug 過程），流程極度不完整。</a:t>
             </a:r>
           </a:p>
         </p:txBody>
       </p:sp>
       <p:sp>
         <p:nvSpPr>
-          <p:cNvPr id="12" name="TextBox 11"/>
+          <p:cNvPr id="34" name="TextBox 33"/>
           <p:cNvSpPr txBox="1"/>
           <p:nvPr/>
         </p:nvSpPr>
         <p:spPr>
           <a:xfrm>
-            <a:off x="914400" y="4846320"/>
-            <a:ext cx="7534656" cy="1554480"/>
+            <a:off x="1463040" y="4206240"/>
+            <a:ext cx="3291840" cy="1828800"/>
           </a:xfrm>
           <a:prstGeom prst="rect">
             <a:avLst/>
@@ -11181,9 +15059,6 @@
           </a:p>
           <a:p>
             <a:pPr>
-              <a:spcBef>
-                <a:spcPts val="300"/>
-              </a:spcBef>
               <a:defRPr sz="1000"/>
             </a:pPr>
             <a:r>
@@ -11192,9 +15067,6 @@
           </a:p>
           <a:p>
             <a:pPr>
-              <a:spcBef>
-                <a:spcPts val="300"/>
-              </a:spcBef>
               <a:defRPr sz="1000"/>
             </a:pPr>
             <a:r>
@@ -15073,100 +18945,11 @@
             <p:ph type="body" idx="10" sz="quarter"/>
           </p:nvPr>
         </p:nvSpPr>
-        <p:spPr>
-          <a:xfrm>
-            <a:off x="0" y="1783080"/>
-          </a:xfrm>
-        </p:spPr>
+        <p:spPr/>
         <p:txBody>
           <a:bodyPr/>
           <a:lstStyle/>
           <a:p/>
-          <a:p>
-            <a:pPr>
-              <a:defRPr sz="1400"/>
-            </a:pPr>
-            <a:r>
-              <a:t>FA 編號: FA-260716-001</a:t>
-            </a:r>
-          </a:p>
-          <a:p>
-            <a:pPr>
-              <a:defRPr sz="1400"/>
-            </a:pPr>
-            <a:r>
-              <a:t>負責工程師: ELAN FAE</a:t>
-            </a:r>
-          </a:p>
-          <a:p>
-            <a:pPr>
-              <a:defRPr sz="1400"/>
-            </a:pPr>
-            <a:r>
-              <a:t>客戶: Meishan</a:t>
-            </a:r>
-          </a:p>
-          <a:p>
-            <a:pPr>
-              <a:defRPr sz="1400"/>
-            </a:pPr>
-            <a:r>
-              <a:t>專案名稱: ADO 445239 260716</a:t>
-            </a:r>
-          </a:p>
-          <a:p>
-            <a:pPr>
-              <a:defRPr sz="1400"/>
-            </a:pPr>
-            <a:r>
-              <a:t>報告日期: 2026/07/16</a:t>
-            </a:r>
-          </a:p>
-          <a:p>
-            <a:pPr>
-              <a:defRPr sz="1400"/>
-            </a:pPr>
-            <a:r>
-              <a:t>失效數量: 依評核建議補充填寫</a:t>
-            </a:r>
-          </a:p>
-          <a:p>
-            <a:pPr>
-              <a:defRPr sz="1400"/>
-            </a:pPr>
-            <a:r>
-              <a:t>批號 (Lot No.): 依評核建議補充填寫</a:t>
-            </a:r>
-          </a:p>
-          <a:p>
-            <a:br/>
-            <a:pPr>
-              <a:defRPr b="1">
-                <a:solidFill>
-                  <a:srgbClr val="FF0000"/>
-                </a:solidFill>
-              </a:defRPr>
-            </a:pPr>
-            <a:r>
-              <a:t>[優化建議項目]</a:t>
-            </a:r>
-          </a:p>
-          <a:p>
-            <a:pPr lvl="1">
-              <a:defRPr sz="1400"/>
-            </a:pPr>
-            <a:r>
-              <a:t>• 補齊產品基本資訊、客戶資訊及負責人員，以符合標準 FA 報告規範。</a:t>
-            </a:r>
-          </a:p>
-          <a:p>
-            <a:pPr lvl="1">
-              <a:defRPr sz="1400"/>
-            </a:pPr>
-            <a:r>
-              <a:t>• 僅提供部分編號與日期，缺乏產品型號、客戶資訊、製造日期及負責工程師等核心資訊。</a:t>
-            </a:r>
-          </a:p>
         </p:txBody>
       </p:sp>
       <p:sp>
@@ -15194,8 +18977,8 @@
         </p:nvSpPr>
         <p:spPr>
           <a:xfrm>
-            <a:off x="457200" y="777240"/>
-            <a:ext cx="8229600" cy="914400"/>
+            <a:off x="457200" y="274320"/>
+            <a:ext cx="11277600" cy="914400"/>
           </a:xfrm>
           <a:prstGeom prst="rect">
             <a:avLst/>
@@ -15210,6 +18993,623 @@
           <a:p>
             <a:r>
               <a:t>FA 基本資訊</a:t>
+            </a:r>
+          </a:p>
+        </p:txBody>
+      </p:sp>
+      <p:sp>
+        <p:nvSpPr>
+          <p:cNvPr id="5" name="Rectangle 4"/>
+          <p:cNvSpPr/>
+          <p:nvPr/>
+        </p:nvSpPr>
+        <p:spPr>
+          <a:xfrm>
+            <a:off x="457200" y="1280160"/>
+            <a:ext cx="228600" cy="228600"/>
+          </a:xfrm>
+          <a:prstGeom prst="rect">
+            <a:avLst/>
+          </a:prstGeom>
+          <a:solidFill>
+            <a:srgbClr val="D9D9D9"/>
+          </a:solidFill>
+          <a:ln>
+            <a:solidFill>
+              <a:srgbClr val="808080"/>
+            </a:solidFill>
+          </a:ln>
+        </p:spPr>
+        <p:style>
+          <a:lnRef idx="1">
+            <a:schemeClr val="accent1"/>
+          </a:lnRef>
+          <a:fillRef idx="3">
+            <a:schemeClr val="accent1"/>
+          </a:fillRef>
+          <a:effectRef idx="2">
+            <a:schemeClr val="accent1"/>
+          </a:effectRef>
+          <a:fontRef idx="minor">
+            <a:schemeClr val="lt1"/>
+          </a:fontRef>
+        </p:style>
+        <p:txBody>
+          <a:bodyPr rtlCol="0" anchor="ctr" wrap="square" lIns="45720" rIns="45720" tIns="18288" bIns="18288"/>
+          <a:lstStyle/>
+          <a:p>
+            <a:pPr algn="ctr"/>
+            <a:r>
+              <a:rPr sz="1400" b="1"/>
+              <a:t>☐</a:t>
+            </a:r>
+          </a:p>
+        </p:txBody>
+      </p:sp>
+      <p:sp>
+        <p:nvSpPr>
+          <p:cNvPr id="6" name="TextBox 5"/>
+          <p:cNvSpPr txBox="1"/>
+          <p:nvPr/>
+        </p:nvSpPr>
+        <p:spPr>
+          <a:xfrm>
+            <a:off x="777240" y="1280160"/>
+            <a:ext cx="10957560" cy="522514"/>
+          </a:xfrm>
+          <a:prstGeom prst="rect">
+            <a:avLst/>
+          </a:prstGeom>
+          <a:noFill/>
+        </p:spPr>
+        <p:txBody>
+          <a:bodyPr wrap="square" anchor="ctr">
+            <a:spAutoFit/>
+          </a:bodyPr>
+          <a:lstStyle/>
+          <a:p>
+            <a:r>
+              <a:rPr sz="1100">
+                <a:solidFill>
+                  <a:srgbClr val="1F4E79"/>
+                </a:solidFill>
+              </a:rPr>
+              <a:t>FA 編號: FA-260716-001</a:t>
+            </a:r>
+          </a:p>
+        </p:txBody>
+      </p:sp>
+      <p:sp>
+        <p:nvSpPr>
+          <p:cNvPr id="7" name="Rectangle 6"/>
+          <p:cNvSpPr/>
+          <p:nvPr/>
+        </p:nvSpPr>
+        <p:spPr>
+          <a:xfrm>
+            <a:off x="457200" y="1802674"/>
+            <a:ext cx="228600" cy="228600"/>
+          </a:xfrm>
+          <a:prstGeom prst="rect">
+            <a:avLst/>
+          </a:prstGeom>
+          <a:solidFill>
+            <a:srgbClr val="D9D9D9"/>
+          </a:solidFill>
+          <a:ln>
+            <a:solidFill>
+              <a:srgbClr val="808080"/>
+            </a:solidFill>
+          </a:ln>
+        </p:spPr>
+        <p:style>
+          <a:lnRef idx="1">
+            <a:schemeClr val="accent1"/>
+          </a:lnRef>
+          <a:fillRef idx="3">
+            <a:schemeClr val="accent1"/>
+          </a:fillRef>
+          <a:effectRef idx="2">
+            <a:schemeClr val="accent1"/>
+          </a:effectRef>
+          <a:fontRef idx="minor">
+            <a:schemeClr val="lt1"/>
+          </a:fontRef>
+        </p:style>
+        <p:txBody>
+          <a:bodyPr rtlCol="0" anchor="ctr" wrap="square" lIns="45720" rIns="45720" tIns="18288" bIns="18288"/>
+          <a:lstStyle/>
+          <a:p>
+            <a:pPr algn="ctr"/>
+            <a:r>
+              <a:rPr sz="1400" b="1"/>
+              <a:t>☐</a:t>
+            </a:r>
+          </a:p>
+        </p:txBody>
+      </p:sp>
+      <p:sp>
+        <p:nvSpPr>
+          <p:cNvPr id="8" name="TextBox 7"/>
+          <p:cNvSpPr txBox="1"/>
+          <p:nvPr/>
+        </p:nvSpPr>
+        <p:spPr>
+          <a:xfrm>
+            <a:off x="777240" y="1802674"/>
+            <a:ext cx="10957560" cy="522514"/>
+          </a:xfrm>
+          <a:prstGeom prst="rect">
+            <a:avLst/>
+          </a:prstGeom>
+          <a:noFill/>
+        </p:spPr>
+        <p:txBody>
+          <a:bodyPr wrap="square" anchor="ctr">
+            <a:spAutoFit/>
+          </a:bodyPr>
+          <a:lstStyle/>
+          <a:p>
+            <a:r>
+              <a:rPr sz="1100">
+                <a:solidFill>
+                  <a:srgbClr val="1F4E79"/>
+                </a:solidFill>
+              </a:rPr>
+              <a:t>負責工程師: ELAN FAE</a:t>
+            </a:r>
+          </a:p>
+        </p:txBody>
+      </p:sp>
+      <p:sp>
+        <p:nvSpPr>
+          <p:cNvPr id="9" name="Rectangle 8"/>
+          <p:cNvSpPr/>
+          <p:nvPr/>
+        </p:nvSpPr>
+        <p:spPr>
+          <a:xfrm>
+            <a:off x="457200" y="2325188"/>
+            <a:ext cx="228600" cy="228600"/>
+          </a:xfrm>
+          <a:prstGeom prst="rect">
+            <a:avLst/>
+          </a:prstGeom>
+          <a:solidFill>
+            <a:srgbClr val="D9D9D9"/>
+          </a:solidFill>
+          <a:ln>
+            <a:solidFill>
+              <a:srgbClr val="808080"/>
+            </a:solidFill>
+          </a:ln>
+        </p:spPr>
+        <p:style>
+          <a:lnRef idx="1">
+            <a:schemeClr val="accent1"/>
+          </a:lnRef>
+          <a:fillRef idx="3">
+            <a:schemeClr val="accent1"/>
+          </a:fillRef>
+          <a:effectRef idx="2">
+            <a:schemeClr val="accent1"/>
+          </a:effectRef>
+          <a:fontRef idx="minor">
+            <a:schemeClr val="lt1"/>
+          </a:fontRef>
+        </p:style>
+        <p:txBody>
+          <a:bodyPr rtlCol="0" anchor="ctr" wrap="square" lIns="45720" rIns="45720" tIns="18288" bIns="18288"/>
+          <a:lstStyle/>
+          <a:p>
+            <a:pPr algn="ctr"/>
+            <a:r>
+              <a:rPr sz="1400" b="1"/>
+              <a:t>☐</a:t>
+            </a:r>
+          </a:p>
+        </p:txBody>
+      </p:sp>
+      <p:sp>
+        <p:nvSpPr>
+          <p:cNvPr id="10" name="TextBox 9"/>
+          <p:cNvSpPr txBox="1"/>
+          <p:nvPr/>
+        </p:nvSpPr>
+        <p:spPr>
+          <a:xfrm>
+            <a:off x="777240" y="2325188"/>
+            <a:ext cx="10957560" cy="522514"/>
+          </a:xfrm>
+          <a:prstGeom prst="rect">
+            <a:avLst/>
+          </a:prstGeom>
+          <a:noFill/>
+        </p:spPr>
+        <p:txBody>
+          <a:bodyPr wrap="square" anchor="ctr">
+            <a:spAutoFit/>
+          </a:bodyPr>
+          <a:lstStyle/>
+          <a:p>
+            <a:r>
+              <a:rPr sz="1100">
+                <a:solidFill>
+                  <a:srgbClr val="1F4E79"/>
+                </a:solidFill>
+              </a:rPr>
+              <a:t>客戶: Meishan</a:t>
+            </a:r>
+          </a:p>
+        </p:txBody>
+      </p:sp>
+      <p:sp>
+        <p:nvSpPr>
+          <p:cNvPr id="11" name="Rectangle 10"/>
+          <p:cNvSpPr/>
+          <p:nvPr/>
+        </p:nvSpPr>
+        <p:spPr>
+          <a:xfrm>
+            <a:off x="457200" y="2847702"/>
+            <a:ext cx="228600" cy="228600"/>
+          </a:xfrm>
+          <a:prstGeom prst="rect">
+            <a:avLst/>
+          </a:prstGeom>
+          <a:solidFill>
+            <a:srgbClr val="D9D9D9"/>
+          </a:solidFill>
+          <a:ln>
+            <a:solidFill>
+              <a:srgbClr val="808080"/>
+            </a:solidFill>
+          </a:ln>
+        </p:spPr>
+        <p:style>
+          <a:lnRef idx="1">
+            <a:schemeClr val="accent1"/>
+          </a:lnRef>
+          <a:fillRef idx="3">
+            <a:schemeClr val="accent1"/>
+          </a:fillRef>
+          <a:effectRef idx="2">
+            <a:schemeClr val="accent1"/>
+          </a:effectRef>
+          <a:fontRef idx="minor">
+            <a:schemeClr val="lt1"/>
+          </a:fontRef>
+        </p:style>
+        <p:txBody>
+          <a:bodyPr rtlCol="0" anchor="ctr" wrap="square" lIns="45720" rIns="45720" tIns="18288" bIns="18288"/>
+          <a:lstStyle/>
+          <a:p>
+            <a:pPr algn="ctr"/>
+            <a:r>
+              <a:rPr sz="1400" b="1"/>
+              <a:t>☐</a:t>
+            </a:r>
+          </a:p>
+        </p:txBody>
+      </p:sp>
+      <p:sp>
+        <p:nvSpPr>
+          <p:cNvPr id="12" name="TextBox 11"/>
+          <p:cNvSpPr txBox="1"/>
+          <p:nvPr/>
+        </p:nvSpPr>
+        <p:spPr>
+          <a:xfrm>
+            <a:off x="777240" y="2847702"/>
+            <a:ext cx="10957560" cy="522514"/>
+          </a:xfrm>
+          <a:prstGeom prst="rect">
+            <a:avLst/>
+          </a:prstGeom>
+          <a:noFill/>
+        </p:spPr>
+        <p:txBody>
+          <a:bodyPr wrap="square" anchor="ctr">
+            <a:spAutoFit/>
+          </a:bodyPr>
+          <a:lstStyle/>
+          <a:p>
+            <a:r>
+              <a:rPr sz="1100">
+                <a:solidFill>
+                  <a:srgbClr val="1F4E79"/>
+                </a:solidFill>
+              </a:rPr>
+              <a:t>專案名稱: ADO 445239</a:t>
+            </a:r>
+          </a:p>
+        </p:txBody>
+      </p:sp>
+      <p:sp>
+        <p:nvSpPr>
+          <p:cNvPr id="13" name="Rectangle 12"/>
+          <p:cNvSpPr/>
+          <p:nvPr/>
+        </p:nvSpPr>
+        <p:spPr>
+          <a:xfrm>
+            <a:off x="457200" y="3370217"/>
+            <a:ext cx="228600" cy="228600"/>
+          </a:xfrm>
+          <a:prstGeom prst="rect">
+            <a:avLst/>
+          </a:prstGeom>
+          <a:solidFill>
+            <a:srgbClr val="D9D9D9"/>
+          </a:solidFill>
+          <a:ln>
+            <a:solidFill>
+              <a:srgbClr val="808080"/>
+            </a:solidFill>
+          </a:ln>
+        </p:spPr>
+        <p:style>
+          <a:lnRef idx="1">
+            <a:schemeClr val="accent1"/>
+          </a:lnRef>
+          <a:fillRef idx="3">
+            <a:schemeClr val="accent1"/>
+          </a:fillRef>
+          <a:effectRef idx="2">
+            <a:schemeClr val="accent1"/>
+          </a:effectRef>
+          <a:fontRef idx="minor">
+            <a:schemeClr val="lt1"/>
+          </a:fontRef>
+        </p:style>
+        <p:txBody>
+          <a:bodyPr rtlCol="0" anchor="ctr" wrap="square" lIns="45720" rIns="45720" tIns="18288" bIns="18288"/>
+          <a:lstStyle/>
+          <a:p>
+            <a:pPr algn="ctr"/>
+            <a:r>
+              <a:rPr sz="1400" b="1"/>
+              <a:t>☐</a:t>
+            </a:r>
+          </a:p>
+        </p:txBody>
+      </p:sp>
+      <p:sp>
+        <p:nvSpPr>
+          <p:cNvPr id="14" name="TextBox 13"/>
+          <p:cNvSpPr txBox="1"/>
+          <p:nvPr/>
+        </p:nvSpPr>
+        <p:spPr>
+          <a:xfrm>
+            <a:off x="777240" y="3370217"/>
+            <a:ext cx="10957560" cy="522514"/>
+          </a:xfrm>
+          <a:prstGeom prst="rect">
+            <a:avLst/>
+          </a:prstGeom>
+          <a:noFill/>
+        </p:spPr>
+        <p:txBody>
+          <a:bodyPr wrap="square" anchor="ctr">
+            <a:spAutoFit/>
+          </a:bodyPr>
+          <a:lstStyle/>
+          <a:p>
+            <a:r>
+              <a:rPr sz="1100">
+                <a:solidFill>
+                  <a:srgbClr val="1F4E79"/>
+                </a:solidFill>
+              </a:rPr>
+              <a:t>報告日期: 2026/07/16</a:t>
+            </a:r>
+          </a:p>
+        </p:txBody>
+      </p:sp>
+      <p:sp>
+        <p:nvSpPr>
+          <p:cNvPr id="15" name="Rectangle 14"/>
+          <p:cNvSpPr/>
+          <p:nvPr/>
+        </p:nvSpPr>
+        <p:spPr>
+          <a:xfrm>
+            <a:off x="457200" y="3892731"/>
+            <a:ext cx="228600" cy="228600"/>
+          </a:xfrm>
+          <a:prstGeom prst="rect">
+            <a:avLst/>
+          </a:prstGeom>
+          <a:solidFill>
+            <a:srgbClr val="D9D9D9"/>
+          </a:solidFill>
+          <a:ln>
+            <a:solidFill>
+              <a:srgbClr val="808080"/>
+            </a:solidFill>
+          </a:ln>
+        </p:spPr>
+        <p:style>
+          <a:lnRef idx="1">
+            <a:schemeClr val="accent1"/>
+          </a:lnRef>
+          <a:fillRef idx="3">
+            <a:schemeClr val="accent1"/>
+          </a:fillRef>
+          <a:effectRef idx="2">
+            <a:schemeClr val="accent1"/>
+          </a:effectRef>
+          <a:fontRef idx="minor">
+            <a:schemeClr val="lt1"/>
+          </a:fontRef>
+        </p:style>
+        <p:txBody>
+          <a:bodyPr rtlCol="0" anchor="ctr" wrap="square" lIns="45720" rIns="45720" tIns="18288" bIns="18288"/>
+          <a:lstStyle/>
+          <a:p>
+            <a:pPr algn="ctr"/>
+            <a:r>
+              <a:rPr sz="1400" b="1"/>
+              <a:t>☐</a:t>
+            </a:r>
+          </a:p>
+        </p:txBody>
+      </p:sp>
+      <p:sp>
+        <p:nvSpPr>
+          <p:cNvPr id="16" name="TextBox 15"/>
+          <p:cNvSpPr txBox="1"/>
+          <p:nvPr/>
+        </p:nvSpPr>
+        <p:spPr>
+          <a:xfrm>
+            <a:off x="777240" y="3892731"/>
+            <a:ext cx="10957560" cy="522514"/>
+          </a:xfrm>
+          <a:prstGeom prst="rect">
+            <a:avLst/>
+          </a:prstGeom>
+          <a:noFill/>
+        </p:spPr>
+        <p:txBody>
+          <a:bodyPr wrap="square" anchor="ctr">
+            <a:spAutoFit/>
+          </a:bodyPr>
+          <a:lstStyle/>
+          <a:p>
+            <a:r>
+              <a:rPr sz="1100">
+                <a:solidFill>
+                  <a:srgbClr val="1F4E79"/>
+                </a:solidFill>
+              </a:rPr>
+              <a:t>失效數量: 依評核建議補充填寫</a:t>
+            </a:r>
+          </a:p>
+        </p:txBody>
+      </p:sp>
+      <p:sp>
+        <p:nvSpPr>
+          <p:cNvPr id="17" name="Rectangle 16"/>
+          <p:cNvSpPr/>
+          <p:nvPr/>
+        </p:nvSpPr>
+        <p:spPr>
+          <a:xfrm>
+            <a:off x="457200" y="4415245"/>
+            <a:ext cx="228600" cy="228600"/>
+          </a:xfrm>
+          <a:prstGeom prst="rect">
+            <a:avLst/>
+          </a:prstGeom>
+          <a:solidFill>
+            <a:srgbClr val="D9D9D9"/>
+          </a:solidFill>
+          <a:ln>
+            <a:solidFill>
+              <a:srgbClr val="808080"/>
+            </a:solidFill>
+          </a:ln>
+        </p:spPr>
+        <p:style>
+          <a:lnRef idx="1">
+            <a:schemeClr val="accent1"/>
+          </a:lnRef>
+          <a:fillRef idx="3">
+            <a:schemeClr val="accent1"/>
+          </a:fillRef>
+          <a:effectRef idx="2">
+            <a:schemeClr val="accent1"/>
+          </a:effectRef>
+          <a:fontRef idx="minor">
+            <a:schemeClr val="lt1"/>
+          </a:fontRef>
+        </p:style>
+        <p:txBody>
+          <a:bodyPr rtlCol="0" anchor="ctr" wrap="square" lIns="45720" rIns="45720" tIns="18288" bIns="18288"/>
+          <a:lstStyle/>
+          <a:p>
+            <a:pPr algn="ctr"/>
+            <a:r>
+              <a:rPr sz="1400" b="1"/>
+              <a:t>☐</a:t>
+            </a:r>
+          </a:p>
+        </p:txBody>
+      </p:sp>
+      <p:sp>
+        <p:nvSpPr>
+          <p:cNvPr id="18" name="TextBox 17"/>
+          <p:cNvSpPr txBox="1"/>
+          <p:nvPr/>
+        </p:nvSpPr>
+        <p:spPr>
+          <a:xfrm>
+            <a:off x="777240" y="4415245"/>
+            <a:ext cx="10957560" cy="522514"/>
+          </a:xfrm>
+          <a:prstGeom prst="rect">
+            <a:avLst/>
+          </a:prstGeom>
+          <a:noFill/>
+        </p:spPr>
+        <p:txBody>
+          <a:bodyPr wrap="square" anchor="ctr">
+            <a:spAutoFit/>
+          </a:bodyPr>
+          <a:lstStyle/>
+          <a:p>
+            <a:r>
+              <a:rPr sz="1100">
+                <a:solidFill>
+                  <a:srgbClr val="1F4E79"/>
+                </a:solidFill>
+              </a:rPr>
+              <a:t>批號 (Lot No.): 依評核建議補充填寫</a:t>
+            </a:r>
+          </a:p>
+        </p:txBody>
+      </p:sp>
+      <p:sp>
+        <p:nvSpPr>
+          <p:cNvPr id="19" name="TextBox 18"/>
+          <p:cNvSpPr txBox="1"/>
+          <p:nvPr/>
+        </p:nvSpPr>
+        <p:spPr>
+          <a:xfrm>
+            <a:off x="457200" y="5029200"/>
+            <a:ext cx="11277600" cy="1371600"/>
+          </a:xfrm>
+          <a:prstGeom prst="rect">
+            <a:avLst/>
+          </a:prstGeom>
+          <a:noFill/>
+        </p:spPr>
+        <p:txBody>
+          <a:bodyPr wrap="square">
+            <a:spAutoFit/>
+          </a:bodyPr>
+          <a:lstStyle/>
+          <a:p>
+            <a:pPr>
+              <a:defRPr b="1" sz="1400">
+                <a:solidFill>
+                  <a:srgbClr val="FF0000"/>
+                </a:solidFill>
+              </a:defRPr>
+            </a:pPr>
+            <a:r>
+              <a:t>[優化建議項目]</a:t>
+            </a:r>
+          </a:p>
+          <a:p>
+            <a:pPr>
+              <a:defRPr sz="1200"/>
+            </a:pPr>
+            <a:r>
+              <a:t>• 僅提供部分編號與日期，缺乏產品型號、客戶資訊、製造日期及負責工程師等核心資訊。</a:t>
             </a:r>
           </a:p>
         </p:txBody>
@@ -15242,104 +19642,11 @@
             <p:ph type="body" idx="10" sz="quarter"/>
           </p:nvPr>
         </p:nvSpPr>
-        <p:spPr>
-          <a:xfrm>
-            <a:off x="0" y="1783080"/>
-          </a:xfrm>
-        </p:spPr>
+        <p:spPr/>
         <p:txBody>
           <a:bodyPr/>
           <a:lstStyle/>
           <a:p/>
-          <a:p>
-            <a:pPr>
-              <a:defRPr b="1" sz="1800">
-                <a:solidFill>
-                  <a:srgbClr val="0070C0"/>
-                </a:solidFill>
-              </a:defRPr>
-            </a:pPr>
-            <a:r>
-              <a:t>針對問題點之深度分析建議：</a:t>
-            </a:r>
-          </a:p>
-          <a:p>
-            <a:pPr>
-              <a:spcAft>
-                <a:spcPts val="1000"/>
-              </a:spcAft>
-              <a:defRPr sz="1400"/>
-            </a:pPr>
-            <a:r>
-              <a:t>針對確定的根因提出短期修復與長期預防措施，並包含驗證計畫。</a:t>
-            </a:r>
-          </a:p>
-          <a:p>
-            <a:pPr>
-              <a:spcAft>
-                <a:spcPts val="1000"/>
-              </a:spcAft>
-              <a:defRPr sz="1400"/>
-            </a:pPr>
-            <a:r>
-              <a:t>增加失效分析的技術手段描述（如：是否檢查了感測器訊號、韌體 Log 或硬體干擾），並附上相關證據圖片。</a:t>
-            </a:r>
-          </a:p>
-          <a:p>
-            <a:pPr>
-              <a:spcAft>
-                <a:spcPts val="1000"/>
-              </a:spcAft>
-              <a:defRPr sz="1400"/>
-            </a:pPr>
-            <a:r>
-              <a:t>報告中完全沒有提及任何根因分析（Root Cause Analysis），亦無 5-Why 或邏輯推導過程。</a:t>
-            </a:r>
-          </a:p>
-          <a:p>
-            <a:pPr>
-              <a:spcAft>
-                <a:spcPts val="1000"/>
-              </a:spcAft>
-              <a:defRPr sz="1400"/>
-            </a:pPr>
-            <a:r>
-              <a:t>必須加入失效原因的深入探討，利用邏輯推導或實驗數據證明為何設備會在 Suspend 期間被 Wake up。</a:t>
-            </a:r>
-          </a:p>
-          <a:p>
-            <a:br/>
-            <a:pPr>
-              <a:defRPr b="1"/>
-            </a:pPr>
-            <a:r>
-              <a:t>[建議執行動作]</a:t>
-            </a:r>
-          </a:p>
-          <a:p>
-            <a:pPr lvl="1">
-              <a:defRPr sz="1200"/>
-            </a:pPr>
-            <a:r>
-              <a:t>• 設定 DVT 正常品 vs PVT 異常品之對照組</a:t>
-            </a:r>
-          </a:p>
-          <a:p>
-            <a:pPr lvl="1">
-              <a:defRPr sz="1200"/>
-            </a:pPr>
-            <a:r>
-              <a:t>• 使用獨立樣本 t 檢定驗證參數顯著性 (p &lt; 0.05)</a:t>
-            </a:r>
-          </a:p>
-          <a:p>
-            <a:pPr lvl="1">
-              <a:defRPr sz="1200"/>
-            </a:pPr>
-            <a:r>
-              <a:t>• 確保統計證據支持最終提到的根本原因</a:t>
-            </a:r>
-          </a:p>
         </p:txBody>
       </p:sp>
       <p:sp>
@@ -15367,8 +19674,8 @@
         </p:nvSpPr>
         <p:spPr>
           <a:xfrm>
-            <a:off x="457200" y="777240"/>
-            <a:ext cx="8229600" cy="914400"/>
+            <a:off x="457200" y="274320"/>
+            <a:ext cx="11277600" cy="914400"/>
           </a:xfrm>
           <a:prstGeom prst="rect">
             <a:avLst/>
@@ -15382,7 +19689,714 @@
           <a:lstStyle/>
           <a:p>
             <a:r>
-              <a:t>根因驗證及統計分析</a:t>
+              <a:t>問題描述與失效定義</a:t>
+            </a:r>
+          </a:p>
+        </p:txBody>
+      </p:sp>
+      <p:graphicFrame>
+        <p:nvGraphicFramePr>
+          <p:cNvPr id="5" name="Table 4"/>
+          <p:cNvGraphicFramePr>
+            <a:graphicFrameLocks noGrp="1"/>
+          </p:cNvGraphicFramePr>
+          <p:nvPr/>
+        </p:nvGraphicFramePr>
+        <p:xfrm>
+          <a:off x="457200" y="1280160"/>
+          <a:ext cx="11277600" cy="1828800"/>
+        </p:xfrm>
+        <a:graphic>
+          <a:graphicData uri="http://schemas.openxmlformats.org/drawingml/2006/table">
+            <a:tbl>
+              <a:tblPr firstRow="1" bandRow="1">
+                <a:tableStyleId>{5C22544A-7EE6-4342-B048-85BDC9FD1C3A}</a:tableStyleId>
+              </a:tblPr>
+              <a:tblGrid>
+                <a:gridCol w="3759200"/>
+                <a:gridCol w="3759200"/>
+                <a:gridCol w="3759200"/>
+              </a:tblGrid>
+              <a:tr h="457200">
+                <a:tc>
+                  <a:txBody>
+                    <a:bodyPr/>
+                    <a:lstStyle/>
+                    <a:p>
+                      <a:r>
+                        <a:rPr b="1" sz="1100">
+                          <a:solidFill>
+                            <a:srgbClr val="FFFFFF"/>
+                          </a:solidFill>
+                        </a:rPr>
+                        <a:t>項目</a:t>
+                      </a:r>
+                    </a:p>
+                  </a:txBody>
+                  <a:tcPr>
+                    <a:solidFill>
+                      <a:srgbClr val="1F4E79"/>
+                    </a:solidFill>
+                  </a:tcPr>
+                </a:tc>
+                <a:tc>
+                  <a:txBody>
+                    <a:bodyPr/>
+                    <a:lstStyle/>
+                    <a:p>
+                      <a:r>
+                        <a:rPr b="1" sz="1100">
+                          <a:solidFill>
+                            <a:srgbClr val="FFFFFF"/>
+                          </a:solidFill>
+                        </a:rPr>
+                        <a:t>目前報告常見缺失</a:t>
+                      </a:r>
+                    </a:p>
+                  </a:txBody>
+                  <a:tcPr>
+                    <a:solidFill>
+                      <a:srgbClr val="1F4E79"/>
+                    </a:solidFill>
+                  </a:tcPr>
+                </a:tc>
+                <a:tc>
+                  <a:txBody>
+                    <a:bodyPr/>
+                    <a:lstStyle/>
+                    <a:p>
+                      <a:r>
+                        <a:rPr b="1" sz="1100">
+                          <a:solidFill>
+                            <a:srgbClr val="FFFFFF"/>
+                          </a:solidFill>
+                        </a:rPr>
+                        <a:t>建議補充內容</a:t>
+                      </a:r>
+                    </a:p>
+                  </a:txBody>
+                  <a:tcPr>
+                    <a:solidFill>
+                      <a:srgbClr val="1F4E79"/>
+                    </a:solidFill>
+                  </a:tcPr>
+                </a:tc>
+              </a:tr>
+              <a:tr h="457200">
+                <a:tc>
+                  <a:txBody>
+                    <a:bodyPr/>
+                    <a:lstStyle/>
+                    <a:p>
+                      <a:r>
+                        <a:rPr sz="1000"/>
+                        <a:t>失效現象 (Phenomenon)</a:t>
+                      </a:r>
+                    </a:p>
+                  </a:txBody>
+                  <a:tcPr/>
+                </a:tc>
+                <a:tc>
+                  <a:txBody>
+                    <a:bodyPr/>
+                    <a:lstStyle/>
+                    <a:p>
+                      <a:r>
+                        <a:rPr sz="1000"/>
+                        <a:t>僅描述「通訊失敗」等表面現象</a:t>
+                      </a:r>
+                    </a:p>
+                  </a:txBody>
+                  <a:tcPr/>
+                </a:tc>
+                <a:tc>
+                  <a:txBody>
+                    <a:bodyPr/>
+                    <a:lstStyle/>
+                    <a:p>
+                      <a:r>
+                        <a:rPr sz="1000"/>
+                        <a:t>完整描述:電壓/電流/波形/時序/外觀</a:t>
+                      </a:r>
+                    </a:p>
+                  </a:txBody>
+                  <a:tcPr/>
+                </a:tc>
+              </a:tr>
+              <a:tr h="457200">
+                <a:tc>
+                  <a:txBody>
+                    <a:bodyPr/>
+                    <a:lstStyle/>
+                    <a:p>
+                      <a:r>
+                        <a:rPr sz="1000"/>
+                        <a:t>失效模式 (Failure Mode)</a:t>
+                      </a:r>
+                    </a:p>
+                  </a:txBody>
+                  <a:tcPr/>
+                </a:tc>
+                <a:tc>
+                  <a:txBody>
+                    <a:bodyPr/>
+                    <a:lstStyle/>
+                    <a:p>
+                      <a:r>
+                        <a:rPr sz="1000"/>
+                        <a:t>未明確定義失效機制</a:t>
+                      </a:r>
+                    </a:p>
+                  </a:txBody>
+                  <a:tcPr/>
+                </a:tc>
+                <a:tc>
+                  <a:txBody>
+                    <a:bodyPr/>
+                    <a:lstStyle/>
+                    <a:p>
+                      <a:r>
+                        <a:rPr sz="1000"/>
+                        <a:t>對應失效機制:開路/短路/漏電/漂移/功能失效</a:t>
+                      </a:r>
+                    </a:p>
+                  </a:txBody>
+                  <a:tcPr/>
+                </a:tc>
+              </a:tr>
+              <a:tr h="457200">
+                <a:tc>
+                  <a:txBody>
+                    <a:bodyPr/>
+                    <a:lstStyle/>
+                    <a:p>
+                      <a:r>
+                        <a:rPr sz="1000"/>
+                        <a:t>失效位置</a:t>
+                      </a:r>
+                    </a:p>
+                  </a:txBody>
+                  <a:tcPr/>
+                </a:tc>
+                <a:tc>
+                  <a:txBody>
+                    <a:bodyPr/>
+                    <a:lstStyle/>
+                    <a:p>
+                      <a:r>
+                        <a:rPr sz="1000"/>
+                        <a:t>只說「IC 損壞」</a:t>
+                      </a:r>
+                    </a:p>
+                  </a:txBody>
+                  <a:tcPr/>
+                </a:tc>
+                <a:tc>
+                  <a:txBody>
+                    <a:bodyPr/>
+                    <a:lstStyle/>
+                    <a:p>
+                      <a:r>
+                        <a:rPr sz="1000"/>
+                        <a:t>精確位置:腳位/區塊/層次(晶圓/封裝/PCB)</a:t>
+                      </a:r>
+                    </a:p>
+                  </a:txBody>
+                  <a:tcPr/>
+                </a:tc>
+              </a:tr>
+            </a:tbl>
+          </a:graphicData>
+        </a:graphic>
+      </p:graphicFrame>
+      <p:sp>
+        <p:nvSpPr>
+          <p:cNvPr id="6" name="Rectangle 5"/>
+          <p:cNvSpPr/>
+          <p:nvPr/>
+        </p:nvSpPr>
+        <p:spPr>
+          <a:xfrm>
+            <a:off x="457200" y="3383280"/>
+            <a:ext cx="228600" cy="228600"/>
+          </a:xfrm>
+          <a:prstGeom prst="rect">
+            <a:avLst/>
+          </a:prstGeom>
+          <a:solidFill>
+            <a:srgbClr val="D9D9D9"/>
+          </a:solidFill>
+          <a:ln>
+            <a:solidFill>
+              <a:srgbClr val="808080"/>
+            </a:solidFill>
+          </a:ln>
+        </p:spPr>
+        <p:style>
+          <a:lnRef idx="1">
+            <a:schemeClr val="accent1"/>
+          </a:lnRef>
+          <a:fillRef idx="3">
+            <a:schemeClr val="accent1"/>
+          </a:fillRef>
+          <a:effectRef idx="2">
+            <a:schemeClr val="accent1"/>
+          </a:effectRef>
+          <a:fontRef idx="minor">
+            <a:schemeClr val="lt1"/>
+          </a:fontRef>
+        </p:style>
+        <p:txBody>
+          <a:bodyPr rtlCol="0" anchor="ctr" wrap="square" lIns="45720" rIns="45720" tIns="18288" bIns="18288"/>
+          <a:lstStyle/>
+          <a:p>
+            <a:pPr algn="ctr"/>
+            <a:r>
+              <a:rPr sz="1400" b="1"/>
+              <a:t>☐</a:t>
+            </a:r>
+          </a:p>
+        </p:txBody>
+      </p:sp>
+      <p:sp>
+        <p:nvSpPr>
+          <p:cNvPr id="7" name="TextBox 6"/>
+          <p:cNvSpPr txBox="1"/>
+          <p:nvPr/>
+        </p:nvSpPr>
+        <p:spPr>
+          <a:xfrm>
+            <a:off x="777240" y="3383280"/>
+            <a:ext cx="10957560" cy="457200"/>
+          </a:xfrm>
+          <a:prstGeom prst="rect">
+            <a:avLst/>
+          </a:prstGeom>
+          <a:noFill/>
+        </p:spPr>
+        <p:txBody>
+          <a:bodyPr wrap="square" anchor="ctr">
+            <a:spAutoFit/>
+          </a:bodyPr>
+          <a:lstStyle/>
+          <a:p>
+            <a:r>
+              <a:rPr sz="1100">
+                <a:solidFill>
+                  <a:srgbClr val="C00000"/>
+                </a:solidFill>
+              </a:rPr>
+              <a:t>失效率(PPM 或 %):本次失效佔總出貨量的比例</a:t>
+            </a:r>
+          </a:p>
+        </p:txBody>
+      </p:sp>
+      <p:sp>
+        <p:nvSpPr>
+          <p:cNvPr id="8" name="Rectangle 7"/>
+          <p:cNvSpPr/>
+          <p:nvPr/>
+        </p:nvSpPr>
+        <p:spPr>
+          <a:xfrm>
+            <a:off x="457200" y="3840480"/>
+            <a:ext cx="228600" cy="228600"/>
+          </a:xfrm>
+          <a:prstGeom prst="rect">
+            <a:avLst/>
+          </a:prstGeom>
+          <a:solidFill>
+            <a:srgbClr val="D9D9D9"/>
+          </a:solidFill>
+          <a:ln>
+            <a:solidFill>
+              <a:srgbClr val="808080"/>
+            </a:solidFill>
+          </a:ln>
+        </p:spPr>
+        <p:style>
+          <a:lnRef idx="1">
+            <a:schemeClr val="accent1"/>
+          </a:lnRef>
+          <a:fillRef idx="3">
+            <a:schemeClr val="accent1"/>
+          </a:fillRef>
+          <a:effectRef idx="2">
+            <a:schemeClr val="accent1"/>
+          </a:effectRef>
+          <a:fontRef idx="minor">
+            <a:schemeClr val="lt1"/>
+          </a:fontRef>
+        </p:style>
+        <p:txBody>
+          <a:bodyPr rtlCol="0" anchor="ctr" wrap="square" lIns="45720" rIns="45720" tIns="18288" bIns="18288"/>
+          <a:lstStyle/>
+          <a:p>
+            <a:pPr algn="ctr"/>
+            <a:r>
+              <a:rPr sz="1400" b="1"/>
+              <a:t>☐</a:t>
+            </a:r>
+          </a:p>
+        </p:txBody>
+      </p:sp>
+      <p:sp>
+        <p:nvSpPr>
+          <p:cNvPr id="9" name="TextBox 8"/>
+          <p:cNvSpPr txBox="1"/>
+          <p:nvPr/>
+        </p:nvSpPr>
+        <p:spPr>
+          <a:xfrm>
+            <a:off x="777240" y="3840480"/>
+            <a:ext cx="10957560" cy="457200"/>
+          </a:xfrm>
+          <a:prstGeom prst="rect">
+            <a:avLst/>
+          </a:prstGeom>
+          <a:noFill/>
+        </p:spPr>
+        <p:txBody>
+          <a:bodyPr wrap="square" anchor="ctr">
+            <a:spAutoFit/>
+          </a:bodyPr>
+          <a:lstStyle/>
+          <a:p>
+            <a:r>
+              <a:rPr sz="1100">
+                <a:solidFill>
+                  <a:srgbClr val="ED7D31"/>
+                </a:solidFill>
+              </a:rPr>
+              <a:t>影響產品數量:目前庫存/在製品/已出貨的受影響數量</a:t>
+            </a:r>
+          </a:p>
+        </p:txBody>
+      </p:sp>
+      <p:sp>
+        <p:nvSpPr>
+          <p:cNvPr id="10" name="Rectangle 9"/>
+          <p:cNvSpPr/>
+          <p:nvPr/>
+        </p:nvSpPr>
+        <p:spPr>
+          <a:xfrm>
+            <a:off x="457200" y="4297680"/>
+            <a:ext cx="228600" cy="228600"/>
+          </a:xfrm>
+          <a:prstGeom prst="rect">
+            <a:avLst/>
+          </a:prstGeom>
+          <a:solidFill>
+            <a:srgbClr val="D9D9D9"/>
+          </a:solidFill>
+          <a:ln>
+            <a:solidFill>
+              <a:srgbClr val="808080"/>
+            </a:solidFill>
+          </a:ln>
+        </p:spPr>
+        <p:style>
+          <a:lnRef idx="1">
+            <a:schemeClr val="accent1"/>
+          </a:lnRef>
+          <a:fillRef idx="3">
+            <a:schemeClr val="accent1"/>
+          </a:fillRef>
+          <a:effectRef idx="2">
+            <a:schemeClr val="accent1"/>
+          </a:effectRef>
+          <a:fontRef idx="minor">
+            <a:schemeClr val="lt1"/>
+          </a:fontRef>
+        </p:style>
+        <p:txBody>
+          <a:bodyPr rtlCol="0" anchor="ctr" wrap="square" lIns="45720" rIns="45720" tIns="18288" bIns="18288"/>
+          <a:lstStyle/>
+          <a:p>
+            <a:pPr algn="ctr"/>
+            <a:r>
+              <a:rPr sz="1400" b="1"/>
+              <a:t>☐</a:t>
+            </a:r>
+          </a:p>
+        </p:txBody>
+      </p:sp>
+      <p:sp>
+        <p:nvSpPr>
+          <p:cNvPr id="11" name="TextBox 10"/>
+          <p:cNvSpPr txBox="1"/>
+          <p:nvPr/>
+        </p:nvSpPr>
+        <p:spPr>
+          <a:xfrm>
+            <a:off x="777240" y="4297680"/>
+            <a:ext cx="10957560" cy="457200"/>
+          </a:xfrm>
+          <a:prstGeom prst="rect">
+            <a:avLst/>
+          </a:prstGeom>
+          <a:noFill/>
+        </p:spPr>
+        <p:txBody>
+          <a:bodyPr wrap="square" anchor="ctr">
+            <a:spAutoFit/>
+          </a:bodyPr>
+          <a:lstStyle/>
+          <a:p>
+            <a:r>
+              <a:rPr sz="1100">
+                <a:solidFill>
+                  <a:srgbClr val="ED7D31"/>
+                </a:solidFill>
+              </a:rPr>
+              <a:t>影響時間範圍:失效首次發生日期 → 目前(持續中/已結案)</a:t>
+            </a:r>
+          </a:p>
+        </p:txBody>
+      </p:sp>
+      <p:sp>
+        <p:nvSpPr>
+          <p:cNvPr id="12" name="Rectangle 11"/>
+          <p:cNvSpPr/>
+          <p:nvPr/>
+        </p:nvSpPr>
+        <p:spPr>
+          <a:xfrm>
+            <a:off x="457200" y="4754880"/>
+            <a:ext cx="228600" cy="228600"/>
+          </a:xfrm>
+          <a:prstGeom prst="rect">
+            <a:avLst/>
+          </a:prstGeom>
+          <a:solidFill>
+            <a:srgbClr val="D9D9D9"/>
+          </a:solidFill>
+          <a:ln>
+            <a:solidFill>
+              <a:srgbClr val="808080"/>
+            </a:solidFill>
+          </a:ln>
+        </p:spPr>
+        <p:style>
+          <a:lnRef idx="1">
+            <a:schemeClr val="accent1"/>
+          </a:lnRef>
+          <a:fillRef idx="3">
+            <a:schemeClr val="accent1"/>
+          </a:fillRef>
+          <a:effectRef idx="2">
+            <a:schemeClr val="accent1"/>
+          </a:effectRef>
+          <a:fontRef idx="minor">
+            <a:schemeClr val="lt1"/>
+          </a:fontRef>
+        </p:style>
+        <p:txBody>
+          <a:bodyPr rtlCol="0" anchor="ctr" wrap="square" lIns="45720" rIns="45720" tIns="18288" bIns="18288"/>
+          <a:lstStyle/>
+          <a:p>
+            <a:pPr algn="ctr"/>
+            <a:r>
+              <a:rPr sz="1400" b="1"/>
+              <a:t>☐</a:t>
+            </a:r>
+          </a:p>
+        </p:txBody>
+      </p:sp>
+      <p:sp>
+        <p:nvSpPr>
+          <p:cNvPr id="13" name="TextBox 12"/>
+          <p:cNvSpPr txBox="1"/>
+          <p:nvPr/>
+        </p:nvSpPr>
+        <p:spPr>
+          <a:xfrm>
+            <a:off x="777240" y="4754880"/>
+            <a:ext cx="10957560" cy="457200"/>
+          </a:xfrm>
+          <a:prstGeom prst="rect">
+            <a:avLst/>
+          </a:prstGeom>
+          <a:noFill/>
+        </p:spPr>
+        <p:txBody>
+          <a:bodyPr wrap="square" anchor="ctr">
+            <a:spAutoFit/>
+          </a:bodyPr>
+          <a:lstStyle/>
+          <a:p>
+            <a:r>
+              <a:rPr sz="1100">
+                <a:solidFill>
+                  <a:srgbClr val="C00000"/>
+                </a:solidFill>
+              </a:rPr>
+              <a:t>客戶影響評估:客戶端失效比例、生產線停線時間、退貨/召回成本</a:t>
+            </a:r>
+          </a:p>
+        </p:txBody>
+      </p:sp>
+      <p:sp>
+        <p:nvSpPr>
+          <p:cNvPr id="14" name="Rectangle 13"/>
+          <p:cNvSpPr/>
+          <p:nvPr/>
+        </p:nvSpPr>
+        <p:spPr>
+          <a:xfrm>
+            <a:off x="457200" y="5212080"/>
+            <a:ext cx="228600" cy="228600"/>
+          </a:xfrm>
+          <a:prstGeom prst="rect">
+            <a:avLst/>
+          </a:prstGeom>
+          <a:solidFill>
+            <a:srgbClr val="D9D9D9"/>
+          </a:solidFill>
+          <a:ln>
+            <a:solidFill>
+              <a:srgbClr val="808080"/>
+            </a:solidFill>
+          </a:ln>
+        </p:spPr>
+        <p:style>
+          <a:lnRef idx="1">
+            <a:schemeClr val="accent1"/>
+          </a:lnRef>
+          <a:fillRef idx="3">
+            <a:schemeClr val="accent1"/>
+          </a:fillRef>
+          <a:effectRef idx="2">
+            <a:schemeClr val="accent1"/>
+          </a:effectRef>
+          <a:fontRef idx="minor">
+            <a:schemeClr val="lt1"/>
+          </a:fontRef>
+        </p:style>
+        <p:txBody>
+          <a:bodyPr rtlCol="0" anchor="ctr" wrap="square" lIns="45720" rIns="45720" tIns="18288" bIns="18288"/>
+          <a:lstStyle/>
+          <a:p>
+            <a:pPr algn="ctr"/>
+            <a:r>
+              <a:rPr sz="1400" b="1"/>
+              <a:t>☐</a:t>
+            </a:r>
+          </a:p>
+        </p:txBody>
+      </p:sp>
+      <p:sp>
+        <p:nvSpPr>
+          <p:cNvPr id="15" name="TextBox 14"/>
+          <p:cNvSpPr txBox="1"/>
+          <p:nvPr/>
+        </p:nvSpPr>
+        <p:spPr>
+          <a:xfrm>
+            <a:off x="777240" y="5212080"/>
+            <a:ext cx="10957560" cy="457200"/>
+          </a:xfrm>
+          <a:prstGeom prst="rect">
+            <a:avLst/>
+          </a:prstGeom>
+          <a:noFill/>
+        </p:spPr>
+        <p:txBody>
+          <a:bodyPr wrap="square" anchor="ctr">
+            <a:spAutoFit/>
+          </a:bodyPr>
+          <a:lstStyle/>
+          <a:p>
+            <a:r>
+              <a:rPr sz="1100">
+                <a:solidFill>
+                  <a:srgbClr val="C00000"/>
+                </a:solidFill>
+              </a:rPr>
+              <a:t>失效嚴重性分級:Critical(安全)/Major(功能)/Minor(性能降級)</a:t>
+            </a:r>
+          </a:p>
+        </p:txBody>
+      </p:sp>
+      <p:sp>
+        <p:nvSpPr>
+          <p:cNvPr id="16" name="Rectangle 15"/>
+          <p:cNvSpPr/>
+          <p:nvPr/>
+        </p:nvSpPr>
+        <p:spPr>
+          <a:xfrm>
+            <a:off x="457200" y="5669280"/>
+            <a:ext cx="228600" cy="228600"/>
+          </a:xfrm>
+          <a:prstGeom prst="rect">
+            <a:avLst/>
+          </a:prstGeom>
+          <a:solidFill>
+            <a:srgbClr val="D9D9D9"/>
+          </a:solidFill>
+          <a:ln>
+            <a:solidFill>
+              <a:srgbClr val="808080"/>
+            </a:solidFill>
+          </a:ln>
+        </p:spPr>
+        <p:style>
+          <a:lnRef idx="1">
+            <a:schemeClr val="accent1"/>
+          </a:lnRef>
+          <a:fillRef idx="3">
+            <a:schemeClr val="accent1"/>
+          </a:fillRef>
+          <a:effectRef idx="2">
+            <a:schemeClr val="accent1"/>
+          </a:effectRef>
+          <a:fontRef idx="minor">
+            <a:schemeClr val="lt1"/>
+          </a:fontRef>
+        </p:style>
+        <p:txBody>
+          <a:bodyPr rtlCol="0" anchor="ctr" wrap="square" lIns="45720" rIns="45720" tIns="18288" bIns="18288"/>
+          <a:lstStyle/>
+          <a:p>
+            <a:pPr algn="ctr"/>
+            <a:r>
+              <a:rPr sz="1400" b="1"/>
+              <a:t>☐</a:t>
+            </a:r>
+          </a:p>
+        </p:txBody>
+      </p:sp>
+      <p:sp>
+        <p:nvSpPr>
+          <p:cNvPr id="17" name="TextBox 16"/>
+          <p:cNvSpPr txBox="1"/>
+          <p:nvPr/>
+        </p:nvSpPr>
+        <p:spPr>
+          <a:xfrm>
+            <a:off x="777240" y="5669280"/>
+            <a:ext cx="10957560" cy="457200"/>
+          </a:xfrm>
+          <a:prstGeom prst="rect">
+            <a:avLst/>
+          </a:prstGeom>
+          <a:noFill/>
+        </p:spPr>
+        <p:txBody>
+          <a:bodyPr wrap="square" anchor="ctr">
+            <a:spAutoFit/>
+          </a:bodyPr>
+          <a:lstStyle/>
+          <a:p>
+            <a:r>
+              <a:rPr sz="1100">
+                <a:solidFill>
+                  <a:srgbClr val="1F4E79"/>
+                </a:solidFill>
+              </a:rPr>
+              <a:t>批量 vs 個案:是否為批次性失效(同批多顆)或個案(單顆)</a:t>
             </a:r>
           </a:p>
         </p:txBody>
@@ -15415,71 +20429,11 @@
             <p:ph type="body" idx="10" sz="quarter"/>
           </p:nvPr>
         </p:nvSpPr>
-        <p:spPr>
-          <a:xfrm>
-            <a:off x="0" y="1783080"/>
-          </a:xfrm>
-        </p:spPr>
+        <p:spPr/>
         <p:txBody>
           <a:bodyPr/>
           <a:lstStyle/>
           <a:p/>
-          <a:p>
-            <a:pPr>
-              <a:defRPr b="1" sz="1800">
-                <a:solidFill>
-                  <a:srgbClr val="0070C0"/>
-                </a:solidFill>
-              </a:defRPr>
-            </a:pPr>
-            <a:r>
-              <a:t>擬議改善對策項目：</a:t>
-            </a:r>
-          </a:p>
-          <a:p>
-            <a:pPr>
-              <a:spcAft>
-                <a:spcPts val="1000"/>
-              </a:spcAft>
-              <a:defRPr sz="1400"/>
-            </a:pPr>
-            <a:r>
-              <a:t>報告中完全沒有提及任何改善對策或預防措施。</a:t>
-            </a:r>
-          </a:p>
-          <a:p>
-            <a:br/>
-            <a:pPr>
-              <a:defRPr b="1"/>
-            </a:pPr>
-            <a:r>
-              <a:t>[標準化與監測計畫]</a:t>
-            </a:r>
-          </a:p>
-          <a:p>
-            <a:pPr lvl="1">
-              <a:defRPr sz="1200"/>
-            </a:pPr>
-            <a:r>
-              <a:t>• 建立入料檢驗 (IQC) SOP 與測試閾值</a:t>
-            </a:r>
-          </a:p>
-          <a:p>
-            <a:pPr lvl="1">
-              <a:defRPr sz="1200"/>
-            </a:pPr>
-            <a:r>
-              <a:t>• 導入自動化監測設備於生產線</a:t>
-            </a:r>
-          </a:p>
-          <a:p>
-            <a:pPr lvl="1">
-              <a:defRPr sz="1200"/>
-            </a:pPr>
-            <a:r>
-              <a:t>• 將此案例納入知識管理資料庫以利後續追蹤</a:t>
-            </a:r>
-          </a:p>
         </p:txBody>
       </p:sp>
       <p:sp>
@@ -15507,8 +20461,8 @@
         </p:nvSpPr>
         <p:spPr>
           <a:xfrm>
-            <a:off x="457200" y="777240"/>
-            <a:ext cx="8229600" cy="914400"/>
+            <a:off x="457200" y="274320"/>
+            <a:ext cx="11277600" cy="914400"/>
           </a:xfrm>
           <a:prstGeom prst="rect">
             <a:avLst/>
@@ -15522,7 +20476,2275 @@
           <a:lstStyle/>
           <a:p>
             <a:r>
-              <a:t>長期預防措施與改善對策</a:t>
+              <a:t>分析方法與流程</a:t>
+            </a:r>
+          </a:p>
+        </p:txBody>
+      </p:sp>
+      <p:sp>
+        <p:nvSpPr>
+          <p:cNvPr id="5" name="Rectangle 4"/>
+          <p:cNvSpPr/>
+          <p:nvPr/>
+        </p:nvSpPr>
+        <p:spPr>
+          <a:xfrm>
+            <a:off x="457200" y="1280160"/>
+            <a:ext cx="228600" cy="228600"/>
+          </a:xfrm>
+          <a:prstGeom prst="rect">
+            <a:avLst/>
+          </a:prstGeom>
+          <a:solidFill>
+            <a:srgbClr val="D9D9D9"/>
+          </a:solidFill>
+          <a:ln>
+            <a:solidFill>
+              <a:srgbClr val="808080"/>
+            </a:solidFill>
+          </a:ln>
+        </p:spPr>
+        <p:style>
+          <a:lnRef idx="1">
+            <a:schemeClr val="accent1"/>
+          </a:lnRef>
+          <a:fillRef idx="3">
+            <a:schemeClr val="accent1"/>
+          </a:fillRef>
+          <a:effectRef idx="2">
+            <a:schemeClr val="accent1"/>
+          </a:effectRef>
+          <a:fontRef idx="minor">
+            <a:schemeClr val="lt1"/>
+          </a:fontRef>
+        </p:style>
+        <p:txBody>
+          <a:bodyPr rtlCol="0" anchor="ctr" wrap="square" lIns="45720" rIns="45720" tIns="18288" bIns="18288"/>
+          <a:lstStyle/>
+          <a:p>
+            <a:pPr algn="ctr"/>
+            <a:r>
+              <a:rPr sz="1400" b="1"/>
+              <a:t>☐</a:t>
+            </a:r>
+          </a:p>
+        </p:txBody>
+      </p:sp>
+      <p:sp>
+        <p:nvSpPr>
+          <p:cNvPr id="6" name="TextBox 5"/>
+          <p:cNvSpPr txBox="1"/>
+          <p:nvPr/>
+        </p:nvSpPr>
+        <p:spPr>
+          <a:xfrm>
+            <a:off x="777240" y="1280160"/>
+            <a:ext cx="3337560" cy="514350"/>
+          </a:xfrm>
+          <a:prstGeom prst="rect">
+            <a:avLst/>
+          </a:prstGeom>
+          <a:noFill/>
+        </p:spPr>
+        <p:txBody>
+          <a:bodyPr wrap="square" anchor="ctr">
+            <a:spAutoFit/>
+          </a:bodyPr>
+          <a:lstStyle/>
+          <a:p>
+            <a:r>
+              <a:rPr sz="1100">
+                <a:solidFill>
+                  <a:srgbClr val="1F4E79"/>
+                </a:solidFill>
+              </a:rPr>
+              <a:t>D1: 建立團隊(FAE/QRA/PM)</a:t>
+            </a:r>
+          </a:p>
+        </p:txBody>
+      </p:sp>
+      <p:sp>
+        <p:nvSpPr>
+          <p:cNvPr id="7" name="Rectangle 6"/>
+          <p:cNvSpPr/>
+          <p:nvPr/>
+        </p:nvSpPr>
+        <p:spPr>
+          <a:xfrm>
+            <a:off x="457200" y="1794510"/>
+            <a:ext cx="228600" cy="228600"/>
+          </a:xfrm>
+          <a:prstGeom prst="rect">
+            <a:avLst/>
+          </a:prstGeom>
+          <a:solidFill>
+            <a:srgbClr val="D9D9D9"/>
+          </a:solidFill>
+          <a:ln>
+            <a:solidFill>
+              <a:srgbClr val="808080"/>
+            </a:solidFill>
+          </a:ln>
+        </p:spPr>
+        <p:style>
+          <a:lnRef idx="1">
+            <a:schemeClr val="accent1"/>
+          </a:lnRef>
+          <a:fillRef idx="3">
+            <a:schemeClr val="accent1"/>
+          </a:fillRef>
+          <a:effectRef idx="2">
+            <a:schemeClr val="accent1"/>
+          </a:effectRef>
+          <a:fontRef idx="minor">
+            <a:schemeClr val="lt1"/>
+          </a:fontRef>
+        </p:style>
+        <p:txBody>
+          <a:bodyPr rtlCol="0" anchor="ctr" wrap="square" lIns="45720" rIns="45720" tIns="18288" bIns="18288"/>
+          <a:lstStyle/>
+          <a:p>
+            <a:pPr algn="ctr"/>
+            <a:r>
+              <a:rPr sz="1400" b="1"/>
+              <a:t>☐</a:t>
+            </a:r>
+          </a:p>
+        </p:txBody>
+      </p:sp>
+      <p:sp>
+        <p:nvSpPr>
+          <p:cNvPr id="8" name="TextBox 7"/>
+          <p:cNvSpPr txBox="1"/>
+          <p:nvPr/>
+        </p:nvSpPr>
+        <p:spPr>
+          <a:xfrm>
+            <a:off x="777240" y="1794510"/>
+            <a:ext cx="3337560" cy="514350"/>
+          </a:xfrm>
+          <a:prstGeom prst="rect">
+            <a:avLst/>
+          </a:prstGeom>
+          <a:noFill/>
+        </p:spPr>
+        <p:txBody>
+          <a:bodyPr wrap="square" anchor="ctr">
+            <a:spAutoFit/>
+          </a:bodyPr>
+          <a:lstStyle/>
+          <a:p>
+            <a:r>
+              <a:rPr sz="1100">
+                <a:solidFill>
+                  <a:srgbClr val="1F4E79"/>
+                </a:solidFill>
+              </a:rPr>
+              <a:t>D2: 描述問題(5W2H)</a:t>
+            </a:r>
+          </a:p>
+        </p:txBody>
+      </p:sp>
+      <p:sp>
+        <p:nvSpPr>
+          <p:cNvPr id="9" name="Rectangle 8"/>
+          <p:cNvSpPr/>
+          <p:nvPr/>
+        </p:nvSpPr>
+        <p:spPr>
+          <a:xfrm>
+            <a:off x="457200" y="2308860"/>
+            <a:ext cx="228600" cy="228600"/>
+          </a:xfrm>
+          <a:prstGeom prst="rect">
+            <a:avLst/>
+          </a:prstGeom>
+          <a:solidFill>
+            <a:srgbClr val="D9D9D9"/>
+          </a:solidFill>
+          <a:ln>
+            <a:solidFill>
+              <a:srgbClr val="808080"/>
+            </a:solidFill>
+          </a:ln>
+        </p:spPr>
+        <p:style>
+          <a:lnRef idx="1">
+            <a:schemeClr val="accent1"/>
+          </a:lnRef>
+          <a:fillRef idx="3">
+            <a:schemeClr val="accent1"/>
+          </a:fillRef>
+          <a:effectRef idx="2">
+            <a:schemeClr val="accent1"/>
+          </a:effectRef>
+          <a:fontRef idx="minor">
+            <a:schemeClr val="lt1"/>
+          </a:fontRef>
+        </p:style>
+        <p:txBody>
+          <a:bodyPr rtlCol="0" anchor="ctr" wrap="square" lIns="45720" rIns="45720" tIns="18288" bIns="18288"/>
+          <a:lstStyle/>
+          <a:p>
+            <a:pPr algn="ctr"/>
+            <a:r>
+              <a:rPr sz="1400" b="1"/>
+              <a:t>☐</a:t>
+            </a:r>
+          </a:p>
+        </p:txBody>
+      </p:sp>
+      <p:sp>
+        <p:nvSpPr>
+          <p:cNvPr id="10" name="TextBox 9"/>
+          <p:cNvSpPr txBox="1"/>
+          <p:nvPr/>
+        </p:nvSpPr>
+        <p:spPr>
+          <a:xfrm>
+            <a:off x="777240" y="2308860"/>
+            <a:ext cx="3337560" cy="514350"/>
+          </a:xfrm>
+          <a:prstGeom prst="rect">
+            <a:avLst/>
+          </a:prstGeom>
+          <a:noFill/>
+        </p:spPr>
+        <p:txBody>
+          <a:bodyPr wrap="square" anchor="ctr">
+            <a:spAutoFit/>
+          </a:bodyPr>
+          <a:lstStyle/>
+          <a:p>
+            <a:r>
+              <a:rPr sz="1100">
+                <a:solidFill>
+                  <a:srgbClr val="ED7D31"/>
+                </a:solidFill>
+              </a:rPr>
+              <a:t>D3: 圍堵行動(Containment)</a:t>
+            </a:r>
+          </a:p>
+        </p:txBody>
+      </p:sp>
+      <p:sp>
+        <p:nvSpPr>
+          <p:cNvPr id="11" name="Rectangle 10"/>
+          <p:cNvSpPr/>
+          <p:nvPr/>
+        </p:nvSpPr>
+        <p:spPr>
+          <a:xfrm>
+            <a:off x="457200" y="2823210"/>
+            <a:ext cx="228600" cy="228600"/>
+          </a:xfrm>
+          <a:prstGeom prst="rect">
+            <a:avLst/>
+          </a:prstGeom>
+          <a:solidFill>
+            <a:srgbClr val="D9D9D9"/>
+          </a:solidFill>
+          <a:ln>
+            <a:solidFill>
+              <a:srgbClr val="808080"/>
+            </a:solidFill>
+          </a:ln>
+        </p:spPr>
+        <p:style>
+          <a:lnRef idx="1">
+            <a:schemeClr val="accent1"/>
+          </a:lnRef>
+          <a:fillRef idx="3">
+            <a:schemeClr val="accent1"/>
+          </a:fillRef>
+          <a:effectRef idx="2">
+            <a:schemeClr val="accent1"/>
+          </a:effectRef>
+          <a:fontRef idx="minor">
+            <a:schemeClr val="lt1"/>
+          </a:fontRef>
+        </p:style>
+        <p:txBody>
+          <a:bodyPr rtlCol="0" anchor="ctr" wrap="square" lIns="45720" rIns="45720" tIns="18288" bIns="18288"/>
+          <a:lstStyle/>
+          <a:p>
+            <a:pPr algn="ctr"/>
+            <a:r>
+              <a:rPr sz="1400" b="1"/>
+              <a:t>☐</a:t>
+            </a:r>
+          </a:p>
+        </p:txBody>
+      </p:sp>
+      <p:sp>
+        <p:nvSpPr>
+          <p:cNvPr id="12" name="TextBox 11"/>
+          <p:cNvSpPr txBox="1"/>
+          <p:nvPr/>
+        </p:nvSpPr>
+        <p:spPr>
+          <a:xfrm>
+            <a:off x="777240" y="2823210"/>
+            <a:ext cx="3337560" cy="514350"/>
+          </a:xfrm>
+          <a:prstGeom prst="rect">
+            <a:avLst/>
+          </a:prstGeom>
+          <a:noFill/>
+        </p:spPr>
+        <p:txBody>
+          <a:bodyPr wrap="square" anchor="ctr">
+            <a:spAutoFit/>
+          </a:bodyPr>
+          <a:lstStyle/>
+          <a:p>
+            <a:r>
+              <a:rPr sz="1100">
+                <a:solidFill>
+                  <a:srgbClr val="C00000"/>
+                </a:solidFill>
+              </a:rPr>
+              <a:t>D4: 根因分析(5-Why/Fishbone)</a:t>
+            </a:r>
+          </a:p>
+        </p:txBody>
+      </p:sp>
+      <p:sp>
+        <p:nvSpPr>
+          <p:cNvPr id="13" name="Rectangle 12"/>
+          <p:cNvSpPr/>
+          <p:nvPr/>
+        </p:nvSpPr>
+        <p:spPr>
+          <a:xfrm>
+            <a:off x="457200" y="3337560"/>
+            <a:ext cx="228600" cy="228600"/>
+          </a:xfrm>
+          <a:prstGeom prst="rect">
+            <a:avLst/>
+          </a:prstGeom>
+          <a:solidFill>
+            <a:srgbClr val="D9D9D9"/>
+          </a:solidFill>
+          <a:ln>
+            <a:solidFill>
+              <a:srgbClr val="808080"/>
+            </a:solidFill>
+          </a:ln>
+        </p:spPr>
+        <p:style>
+          <a:lnRef idx="1">
+            <a:schemeClr val="accent1"/>
+          </a:lnRef>
+          <a:fillRef idx="3">
+            <a:schemeClr val="accent1"/>
+          </a:fillRef>
+          <a:effectRef idx="2">
+            <a:schemeClr val="accent1"/>
+          </a:effectRef>
+          <a:fontRef idx="minor">
+            <a:schemeClr val="lt1"/>
+          </a:fontRef>
+        </p:style>
+        <p:txBody>
+          <a:bodyPr rtlCol="0" anchor="ctr" wrap="square" lIns="45720" rIns="45720" tIns="18288" bIns="18288"/>
+          <a:lstStyle/>
+          <a:p>
+            <a:pPr algn="ctr"/>
+            <a:r>
+              <a:rPr sz="1400" b="1"/>
+              <a:t>☐</a:t>
+            </a:r>
+          </a:p>
+        </p:txBody>
+      </p:sp>
+      <p:sp>
+        <p:nvSpPr>
+          <p:cNvPr id="14" name="TextBox 13"/>
+          <p:cNvSpPr txBox="1"/>
+          <p:nvPr/>
+        </p:nvSpPr>
+        <p:spPr>
+          <a:xfrm>
+            <a:off x="777240" y="3337560"/>
+            <a:ext cx="3337560" cy="514350"/>
+          </a:xfrm>
+          <a:prstGeom prst="rect">
+            <a:avLst/>
+          </a:prstGeom>
+          <a:noFill/>
+        </p:spPr>
+        <p:txBody>
+          <a:bodyPr wrap="square" anchor="ctr">
+            <a:spAutoFit/>
+          </a:bodyPr>
+          <a:lstStyle/>
+          <a:p>
+            <a:r>
+              <a:rPr sz="1100">
+                <a:solidFill>
+                  <a:srgbClr val="C00000"/>
+                </a:solidFill>
+              </a:rPr>
+              <a:t>D5: 永久對策(PCA)</a:t>
+            </a:r>
+          </a:p>
+        </p:txBody>
+      </p:sp>
+      <p:sp>
+        <p:nvSpPr>
+          <p:cNvPr id="15" name="Rectangle 14"/>
+          <p:cNvSpPr/>
+          <p:nvPr/>
+        </p:nvSpPr>
+        <p:spPr>
+          <a:xfrm>
+            <a:off x="457200" y="3851910"/>
+            <a:ext cx="228600" cy="228600"/>
+          </a:xfrm>
+          <a:prstGeom prst="rect">
+            <a:avLst/>
+          </a:prstGeom>
+          <a:solidFill>
+            <a:srgbClr val="D9D9D9"/>
+          </a:solidFill>
+          <a:ln>
+            <a:solidFill>
+              <a:srgbClr val="808080"/>
+            </a:solidFill>
+          </a:ln>
+        </p:spPr>
+        <p:style>
+          <a:lnRef idx="1">
+            <a:schemeClr val="accent1"/>
+          </a:lnRef>
+          <a:fillRef idx="3">
+            <a:schemeClr val="accent1"/>
+          </a:fillRef>
+          <a:effectRef idx="2">
+            <a:schemeClr val="accent1"/>
+          </a:effectRef>
+          <a:fontRef idx="minor">
+            <a:schemeClr val="lt1"/>
+          </a:fontRef>
+        </p:style>
+        <p:txBody>
+          <a:bodyPr rtlCol="0" anchor="ctr" wrap="square" lIns="45720" rIns="45720" tIns="18288" bIns="18288"/>
+          <a:lstStyle/>
+          <a:p>
+            <a:pPr algn="ctr"/>
+            <a:r>
+              <a:rPr sz="1400" b="1"/>
+              <a:t>☐</a:t>
+            </a:r>
+          </a:p>
+        </p:txBody>
+      </p:sp>
+      <p:sp>
+        <p:nvSpPr>
+          <p:cNvPr id="16" name="TextBox 15"/>
+          <p:cNvSpPr txBox="1"/>
+          <p:nvPr/>
+        </p:nvSpPr>
+        <p:spPr>
+          <a:xfrm>
+            <a:off x="777240" y="3851910"/>
+            <a:ext cx="3337560" cy="514350"/>
+          </a:xfrm>
+          <a:prstGeom prst="rect">
+            <a:avLst/>
+          </a:prstGeom>
+          <a:noFill/>
+        </p:spPr>
+        <p:txBody>
+          <a:bodyPr wrap="square" anchor="ctr">
+            <a:spAutoFit/>
+          </a:bodyPr>
+          <a:lstStyle/>
+          <a:p>
+            <a:r>
+              <a:rPr sz="1100">
+                <a:solidFill>
+                  <a:srgbClr val="ED7D31"/>
+                </a:solidFill>
+              </a:rPr>
+              <a:t>D6: 實施與驗證</a:t>
+            </a:r>
+          </a:p>
+        </p:txBody>
+      </p:sp>
+      <p:sp>
+        <p:nvSpPr>
+          <p:cNvPr id="17" name="Rectangle 16"/>
+          <p:cNvSpPr/>
+          <p:nvPr/>
+        </p:nvSpPr>
+        <p:spPr>
+          <a:xfrm>
+            <a:off x="457200" y="4366260"/>
+            <a:ext cx="228600" cy="228600"/>
+          </a:xfrm>
+          <a:prstGeom prst="rect">
+            <a:avLst/>
+          </a:prstGeom>
+          <a:solidFill>
+            <a:srgbClr val="D9D9D9"/>
+          </a:solidFill>
+          <a:ln>
+            <a:solidFill>
+              <a:srgbClr val="808080"/>
+            </a:solidFill>
+          </a:ln>
+        </p:spPr>
+        <p:style>
+          <a:lnRef idx="1">
+            <a:schemeClr val="accent1"/>
+          </a:lnRef>
+          <a:fillRef idx="3">
+            <a:schemeClr val="accent1"/>
+          </a:fillRef>
+          <a:effectRef idx="2">
+            <a:schemeClr val="accent1"/>
+          </a:effectRef>
+          <a:fontRef idx="minor">
+            <a:schemeClr val="lt1"/>
+          </a:fontRef>
+        </p:style>
+        <p:txBody>
+          <a:bodyPr rtlCol="0" anchor="ctr" wrap="square" lIns="45720" rIns="45720" tIns="18288" bIns="18288"/>
+          <a:lstStyle/>
+          <a:p>
+            <a:pPr algn="ctr"/>
+            <a:r>
+              <a:rPr sz="1400" b="1"/>
+              <a:t>☐</a:t>
+            </a:r>
+          </a:p>
+        </p:txBody>
+      </p:sp>
+      <p:sp>
+        <p:nvSpPr>
+          <p:cNvPr id="18" name="TextBox 17"/>
+          <p:cNvSpPr txBox="1"/>
+          <p:nvPr/>
+        </p:nvSpPr>
+        <p:spPr>
+          <a:xfrm>
+            <a:off x="777240" y="4366260"/>
+            <a:ext cx="3337560" cy="514350"/>
+          </a:xfrm>
+          <a:prstGeom prst="rect">
+            <a:avLst/>
+          </a:prstGeom>
+          <a:noFill/>
+        </p:spPr>
+        <p:txBody>
+          <a:bodyPr wrap="square" anchor="ctr">
+            <a:spAutoFit/>
+          </a:bodyPr>
+          <a:lstStyle/>
+          <a:p>
+            <a:r>
+              <a:rPr sz="1100">
+                <a:solidFill>
+                  <a:srgbClr val="1F4E79"/>
+                </a:solidFill>
+              </a:rPr>
+              <a:t>D7: 再發防止(SOP/防呆)</a:t>
+            </a:r>
+          </a:p>
+        </p:txBody>
+      </p:sp>
+      <p:sp>
+        <p:nvSpPr>
+          <p:cNvPr id="19" name="Rectangle 18"/>
+          <p:cNvSpPr/>
+          <p:nvPr/>
+        </p:nvSpPr>
+        <p:spPr>
+          <a:xfrm>
+            <a:off x="457200" y="4880610"/>
+            <a:ext cx="228600" cy="228600"/>
+          </a:xfrm>
+          <a:prstGeom prst="rect">
+            <a:avLst/>
+          </a:prstGeom>
+          <a:solidFill>
+            <a:srgbClr val="D9D9D9"/>
+          </a:solidFill>
+          <a:ln>
+            <a:solidFill>
+              <a:srgbClr val="808080"/>
+            </a:solidFill>
+          </a:ln>
+        </p:spPr>
+        <p:style>
+          <a:lnRef idx="1">
+            <a:schemeClr val="accent1"/>
+          </a:lnRef>
+          <a:fillRef idx="3">
+            <a:schemeClr val="accent1"/>
+          </a:fillRef>
+          <a:effectRef idx="2">
+            <a:schemeClr val="accent1"/>
+          </a:effectRef>
+          <a:fontRef idx="minor">
+            <a:schemeClr val="lt1"/>
+          </a:fontRef>
+        </p:style>
+        <p:txBody>
+          <a:bodyPr rtlCol="0" anchor="ctr" wrap="square" lIns="45720" rIns="45720" tIns="18288" bIns="18288"/>
+          <a:lstStyle/>
+          <a:p>
+            <a:pPr algn="ctr"/>
+            <a:r>
+              <a:rPr sz="1400" b="1"/>
+              <a:t>☐</a:t>
+            </a:r>
+          </a:p>
+        </p:txBody>
+      </p:sp>
+      <p:sp>
+        <p:nvSpPr>
+          <p:cNvPr id="20" name="TextBox 19"/>
+          <p:cNvSpPr txBox="1"/>
+          <p:nvPr/>
+        </p:nvSpPr>
+        <p:spPr>
+          <a:xfrm>
+            <a:off x="777240" y="4880610"/>
+            <a:ext cx="3337560" cy="514350"/>
+          </a:xfrm>
+          <a:prstGeom prst="rect">
+            <a:avLst/>
+          </a:prstGeom>
+          <a:noFill/>
+        </p:spPr>
+        <p:txBody>
+          <a:bodyPr wrap="square" anchor="ctr">
+            <a:spAutoFit/>
+          </a:bodyPr>
+          <a:lstStyle/>
+          <a:p>
+            <a:r>
+              <a:rPr sz="1100">
+                <a:solidFill>
+                  <a:srgbClr val="70AD47"/>
+                </a:solidFill>
+              </a:rPr>
+              <a:t>D8: 團隊表揚與經驗傳承</a:t>
+            </a:r>
+          </a:p>
+        </p:txBody>
+      </p:sp>
+      <p:graphicFrame>
+        <p:nvGraphicFramePr>
+          <p:cNvPr id="21" name="Table 20"/>
+          <p:cNvGraphicFramePr>
+            <a:graphicFrameLocks noGrp="1"/>
+          </p:cNvGraphicFramePr>
+          <p:nvPr/>
+        </p:nvGraphicFramePr>
+        <p:xfrm>
+          <a:off x="4389120" y="1280160"/>
+          <a:ext cx="7345680" cy="4114800"/>
+        </p:xfrm>
+        <a:graphic>
+          <a:graphicData uri="http://schemas.openxmlformats.org/drawingml/2006/table">
+            <a:tbl>
+              <a:tblPr firstRow="1" bandRow="1">
+                <a:tableStyleId>{5C22544A-7EE6-4342-B048-85BDC9FD1C3A}</a:tableStyleId>
+              </a:tblPr>
+              <a:tblGrid>
+                <a:gridCol w="2448560"/>
+                <a:gridCol w="2448560"/>
+                <a:gridCol w="2448560"/>
+              </a:tblGrid>
+              <a:tr h="457200">
+                <a:tc>
+                  <a:txBody>
+                    <a:bodyPr/>
+                    <a:lstStyle/>
+                    <a:p>
+                      <a:r>
+                        <a:rPr b="1" sz="1100">
+                          <a:solidFill>
+                            <a:srgbClr val="FFFFFF"/>
+                          </a:solidFill>
+                        </a:rPr>
+                        <a:t>方法</a:t>
+                      </a:r>
+                    </a:p>
+                  </a:txBody>
+                  <a:tcPr>
+                    <a:solidFill>
+                      <a:srgbClr val="1F4E79"/>
+                    </a:solidFill>
+                  </a:tcPr>
+                </a:tc>
+                <a:tc>
+                  <a:txBody>
+                    <a:bodyPr/>
+                    <a:lstStyle/>
+                    <a:p>
+                      <a:r>
+                        <a:rPr b="1" sz="1100">
+                          <a:solidFill>
+                            <a:srgbClr val="FFFFFF"/>
+                          </a:solidFill>
+                        </a:rPr>
+                        <a:t>適用場景</a:t>
+                      </a:r>
+                    </a:p>
+                  </a:txBody>
+                  <a:tcPr>
+                    <a:solidFill>
+                      <a:srgbClr val="1F4E79"/>
+                    </a:solidFill>
+                  </a:tcPr>
+                </a:tc>
+                <a:tc>
+                  <a:txBody>
+                    <a:bodyPr/>
+                    <a:lstStyle/>
+                    <a:p>
+                      <a:r>
+                        <a:rPr b="1" sz="1100">
+                          <a:solidFill>
+                            <a:srgbClr val="FFFFFF"/>
+                          </a:solidFill>
+                        </a:rPr>
+                        <a:t>備註</a:t>
+                      </a:r>
+                    </a:p>
+                  </a:txBody>
+                  <a:tcPr>
+                    <a:solidFill>
+                      <a:srgbClr val="1F4E79"/>
+                    </a:solidFill>
+                  </a:tcPr>
+                </a:tc>
+              </a:tr>
+              <a:tr h="457200">
+                <a:tc>
+                  <a:txBody>
+                    <a:bodyPr/>
+                    <a:lstStyle/>
+                    <a:p>
+                      <a:r>
+                        <a:rPr sz="1000"/>
+                        <a:t>光學檢查</a:t>
+                      </a:r>
+                    </a:p>
+                  </a:txBody>
+                  <a:tcPr/>
+                </a:tc>
+                <a:tc>
+                  <a:txBody>
+                    <a:bodyPr/>
+                    <a:lstStyle/>
+                    <a:p>
+                      <a:r>
+                        <a:rPr sz="1000"/>
+                        <a:t>外部損傷、燒毀痕跡</a:t>
+                      </a:r>
+                    </a:p>
+                  </a:txBody>
+                  <a:tcPr/>
+                </a:tc>
+                <a:tc>
+                  <a:txBody>
+                    <a:bodyPr/>
+                    <a:lstStyle/>
+                    <a:p>
+                      <a:r>
+                        <a:rPr sz="1000"/>
+                        <a:t>快速、低成本</a:t>
+                      </a:r>
+                    </a:p>
+                  </a:txBody>
+                  <a:tcPr/>
+                </a:tc>
+              </a:tr>
+              <a:tr h="457200">
+                <a:tc>
+                  <a:txBody>
+                    <a:bodyPr/>
+                    <a:lstStyle/>
+                    <a:p>
+                      <a:r>
+                        <a:rPr sz="1000"/>
+                        <a:t>SEM</a:t>
+                      </a:r>
+                    </a:p>
+                  </a:txBody>
+                  <a:tcPr/>
+                </a:tc>
+                <a:tc>
+                  <a:txBody>
+                    <a:bodyPr/>
+                    <a:lstStyle/>
+                    <a:p>
+                      <a:r>
+                        <a:rPr sz="1000"/>
+                        <a:t>晶片內部結構</a:t>
+                      </a:r>
+                    </a:p>
+                  </a:txBody>
+                  <a:tcPr/>
+                </a:tc>
+                <a:tc>
+                  <a:txBody>
+                    <a:bodyPr/>
+                    <a:lstStyle/>
+                    <a:p>
+                      <a:r>
+                        <a:rPr sz="1000"/>
+                        <a:t>需真空環境</a:t>
+                      </a:r>
+                    </a:p>
+                  </a:txBody>
+                  <a:tcPr/>
+                </a:tc>
+              </a:tr>
+              <a:tr h="457200">
+                <a:tc>
+                  <a:txBody>
+                    <a:bodyPr/>
+                    <a:lstStyle/>
+                    <a:p>
+                      <a:r>
+                        <a:rPr sz="1000"/>
+                        <a:t>FIB</a:t>
+                      </a:r>
+                    </a:p>
+                  </a:txBody>
+                  <a:tcPr/>
+                </a:tc>
+                <a:tc>
+                  <a:txBody>
+                    <a:bodyPr/>
+                    <a:lstStyle/>
+                    <a:p>
+                      <a:r>
+                        <a:rPr sz="1000"/>
+                        <a:t>橫截面分析</a:t>
+                      </a:r>
+                    </a:p>
+                  </a:txBody>
+                  <a:tcPr/>
+                </a:tc>
+                <a:tc>
+                  <a:txBody>
+                    <a:bodyPr/>
+                    <a:lstStyle/>
+                    <a:p>
+                      <a:r>
+                        <a:rPr sz="1000"/>
+                        <a:t>破壞性測試</a:t>
+                      </a:r>
+                    </a:p>
+                  </a:txBody>
+                  <a:tcPr/>
+                </a:tc>
+              </a:tr>
+              <a:tr h="457200">
+                <a:tc>
+                  <a:txBody>
+                    <a:bodyPr/>
+                    <a:lstStyle/>
+                    <a:p>
+                      <a:r>
+                        <a:rPr sz="1000"/>
+                        <a:t>X-ray</a:t>
+                      </a:r>
+                    </a:p>
+                  </a:txBody>
+                  <a:tcPr/>
+                </a:tc>
+                <a:tc>
+                  <a:txBody>
+                    <a:bodyPr/>
+                    <a:lstStyle/>
+                    <a:p>
+                      <a:r>
+                        <a:rPr sz="1000"/>
+                        <a:t>封裝裂縫、空洞</a:t>
+                      </a:r>
+                    </a:p>
+                  </a:txBody>
+                  <a:tcPr/>
+                </a:tc>
+                <a:tc>
+                  <a:txBody>
+                    <a:bodyPr/>
+                    <a:lstStyle/>
+                    <a:p>
+                      <a:r>
+                        <a:rPr sz="1000"/>
+                        <a:t>非破壞性</a:t>
+                      </a:r>
+                    </a:p>
+                  </a:txBody>
+                  <a:tcPr/>
+                </a:tc>
+              </a:tr>
+              <a:tr h="457200">
+                <a:tc>
+                  <a:txBody>
+                    <a:bodyPr/>
+                    <a:lstStyle/>
+                    <a:p>
+                      <a:r>
+                        <a:rPr sz="1000"/>
+                        <a:t>Decap</a:t>
+                      </a:r>
+                    </a:p>
+                  </a:txBody>
+                  <a:tcPr/>
+                </a:tc>
+                <a:tc>
+                  <a:txBody>
+                    <a:bodyPr/>
+                    <a:lstStyle/>
+                    <a:p>
+                      <a:r>
+                        <a:rPr sz="1000"/>
+                        <a:t>開蓋檢查</a:t>
+                      </a:r>
+                    </a:p>
+                  </a:txBody>
+                  <a:tcPr/>
+                </a:tc>
+                <a:tc>
+                  <a:txBody>
+                    <a:bodyPr/>
+                    <a:lstStyle/>
+                    <a:p>
+                      <a:r>
+                        <a:rPr sz="1000"/>
+                        <a:t>化學蝕刻</a:t>
+                      </a:r>
+                    </a:p>
+                  </a:txBody>
+                  <a:tcPr/>
+                </a:tc>
+              </a:tr>
+              <a:tr h="457200">
+                <a:tc>
+                  <a:txBody>
+                    <a:bodyPr/>
+                    <a:lstStyle/>
+                    <a:p>
+                      <a:r>
+                        <a:rPr sz="1000"/>
+                        <a:t>TDR/示波器</a:t>
+                      </a:r>
+                    </a:p>
+                  </a:txBody>
+                  <a:tcPr/>
+                </a:tc>
+                <a:tc>
+                  <a:txBody>
+                    <a:bodyPr/>
+                    <a:lstStyle/>
+                    <a:p>
+                      <a:r>
+                        <a:rPr sz="1000"/>
+                        <a:t>訊號完整性</a:t>
+                      </a:r>
+                    </a:p>
+                  </a:txBody>
+                  <a:tcPr/>
+                </a:tc>
+                <a:tc>
+                  <a:txBody>
+                    <a:bodyPr/>
+                    <a:lstStyle/>
+                    <a:p>
+                      <a:r>
+                        <a:rPr sz="1000"/>
+                        <a:t>時域反射</a:t>
+                      </a:r>
+                    </a:p>
+                  </a:txBody>
+                  <a:tcPr/>
+                </a:tc>
+              </a:tr>
+              <a:tr h="457200">
+                <a:tc>
+                  <a:txBody>
+                    <a:bodyPr/>
+                    <a:lstStyle/>
+                    <a:p>
+                      <a:r>
+                        <a:rPr sz="1000"/>
+                        <a:t>XRD/EDX</a:t>
+                      </a:r>
+                    </a:p>
+                  </a:txBody>
+                  <a:tcPr/>
+                </a:tc>
+                <a:tc>
+                  <a:txBody>
+                    <a:bodyPr/>
+                    <a:lstStyle/>
+                    <a:p>
+                      <a:r>
+                        <a:rPr sz="1000"/>
+                        <a:t>材料分析</a:t>
+                      </a:r>
+                    </a:p>
+                  </a:txBody>
+                  <a:tcPr/>
+                </a:tc>
+                <a:tc>
+                  <a:txBody>
+                    <a:bodyPr/>
+                    <a:lstStyle/>
+                    <a:p>
+                      <a:r>
+                        <a:rPr sz="1000"/>
+                        <a:t>成分鑑定</a:t>
+                      </a:r>
+                    </a:p>
+                  </a:txBody>
+                  <a:tcPr/>
+                </a:tc>
+              </a:tr>
+              <a:tr h="457200">
+                <a:tc>
+                  <a:txBody>
+                    <a:bodyPr/>
+                    <a:lstStyle/>
+                    <a:p>
+                      <a:r>
+                        <a:rPr sz="1000"/>
+                        <a:t>ESD 測試</a:t>
+                      </a:r>
+                    </a:p>
+                  </a:txBody>
+                  <a:tcPr/>
+                </a:tc>
+                <a:tc>
+                  <a:txBody>
+                    <a:bodyPr/>
+                    <a:lstStyle/>
+                    <a:p>
+                      <a:r>
+                        <a:rPr sz="1000"/>
+                        <a:t>靜電耐受</a:t>
+                      </a:r>
+                    </a:p>
+                  </a:txBody>
+                  <a:tcPr/>
+                </a:tc>
+                <a:tc>
+                  <a:txBody>
+                    <a:bodyPr/>
+                    <a:lstStyle/>
+                    <a:p>
+                      <a:r>
+                        <a:rPr sz="1000"/>
+                        <a:t>HBM/CDM 模型</a:t>
+                      </a:r>
+                    </a:p>
+                  </a:txBody>
+                  <a:tcPr/>
+                </a:tc>
+              </a:tr>
+            </a:tbl>
+          </a:graphicData>
+        </a:graphic>
+      </p:graphicFrame>
+    </p:spTree>
+  </p:cSld>
+  <p:clrMapOvr>
+    <a:masterClrMapping/>
+  </p:clrMapOvr>
+</p:sld>
+</file>
+
+<file path=ppt/slides/slide9.xml><?xml version="1.0" encoding="utf-8"?>
+<p:sld xmlns:a="http://schemas.openxmlformats.org/drawingml/2006/main" xmlns:p="http://schemas.openxmlformats.org/presentationml/2006/main" xmlns:r="http://schemas.openxmlformats.org/officeDocument/2006/relationships">
+  <p:cSld>
+    <p:spTree>
+      <p:nvGrpSpPr>
+        <p:cNvPr id="1" name=""/>
+        <p:cNvGrpSpPr/>
+        <p:nvPr/>
+      </p:nvGrpSpPr>
+      <p:grpSpPr/>
+      <p:sp>
+        <p:nvSpPr>
+          <p:cNvPr id="2" name="Text Placeholder 1"/>
+          <p:cNvSpPr>
+            <a:spLocks noGrp="1"/>
+          </p:cNvSpPr>
+          <p:nvPr>
+            <p:ph type="body" idx="10" sz="quarter"/>
+          </p:nvPr>
+        </p:nvSpPr>
+        <p:spPr/>
+        <p:txBody>
+          <a:bodyPr/>
+          <a:lstStyle/>
+          <a:p/>
+        </p:txBody>
+      </p:sp>
+      <p:sp>
+        <p:nvSpPr>
+          <p:cNvPr id="3" name="Text Placeholder 2"/>
+          <p:cNvSpPr>
+            <a:spLocks noGrp="1"/>
+          </p:cNvSpPr>
+          <p:nvPr>
+            <p:ph type="body" idx="12" sz="quarter"/>
+          </p:nvPr>
+        </p:nvSpPr>
+        <p:spPr/>
+        <p:txBody>
+          <a:bodyPr/>
+          <a:lstStyle/>
+          <a:p/>
+        </p:txBody>
+      </p:sp>
+      <p:sp>
+        <p:nvSpPr>
+          <p:cNvPr id="4" name="TextBox 3"/>
+          <p:cNvSpPr txBox="1"/>
+          <p:nvPr/>
+        </p:nvSpPr>
+        <p:spPr>
+          <a:xfrm>
+            <a:off x="457200" y="274320"/>
+            <a:ext cx="11277600" cy="914400"/>
+          </a:xfrm>
+          <a:prstGeom prst="rect">
+            <a:avLst/>
+          </a:prstGeom>
+          <a:noFill/>
+        </p:spPr>
+        <p:txBody>
+          <a:bodyPr wrap="none">
+            <a:spAutoFit/>
+          </a:bodyPr>
+          <a:lstStyle/>
+          <a:p>
+            <a:r>
+              <a:t>數據與證據支持</a:t>
+            </a:r>
+          </a:p>
+        </p:txBody>
+      </p:sp>
+      <p:graphicFrame>
+        <p:nvGraphicFramePr>
+          <p:cNvPr id="5" name="Table 4"/>
+          <p:cNvGraphicFramePr>
+            <a:graphicFrameLocks noGrp="1"/>
+          </p:cNvGraphicFramePr>
+          <p:nvPr/>
+        </p:nvGraphicFramePr>
+        <p:xfrm>
+          <a:off x="457200" y="1280160"/>
+          <a:ext cx="11277600" cy="2011680"/>
+        </p:xfrm>
+        <a:graphic>
+          <a:graphicData uri="http://schemas.openxmlformats.org/drawingml/2006/table">
+            <a:tbl>
+              <a:tblPr firstRow="1" bandRow="1">
+                <a:tableStyleId>{5C22544A-7EE6-4342-B048-85BDC9FD1C3A}</a:tableStyleId>
+              </a:tblPr>
+              <a:tblGrid>
+                <a:gridCol w="2255520"/>
+                <a:gridCol w="2255520"/>
+                <a:gridCol w="2255520"/>
+                <a:gridCol w="2255520"/>
+                <a:gridCol w="2255520"/>
+              </a:tblGrid>
+              <a:tr h="287382">
+                <a:tc>
+                  <a:txBody>
+                    <a:bodyPr/>
+                    <a:lstStyle/>
+                    <a:p>
+                      <a:r>
+                        <a:rPr b="1" sz="1100">
+                          <a:solidFill>
+                            <a:srgbClr val="FFFFFF"/>
+                          </a:solidFill>
+                        </a:rPr>
+                        <a:t>測試項目</a:t>
+                      </a:r>
+                    </a:p>
+                  </a:txBody>
+                  <a:tcPr>
+                    <a:solidFill>
+                      <a:srgbClr val="1F4E79"/>
+                    </a:solidFill>
+                  </a:tcPr>
+                </a:tc>
+                <a:tc>
+                  <a:txBody>
+                    <a:bodyPr/>
+                    <a:lstStyle/>
+                    <a:p>
+                      <a:r>
+                        <a:rPr b="1" sz="1100">
+                          <a:solidFill>
+                            <a:srgbClr val="FFFFFF"/>
+                          </a:solidFill>
+                        </a:rPr>
+                        <a:t>DVT 正常品</a:t>
+                      </a:r>
+                    </a:p>
+                  </a:txBody>
+                  <a:tcPr>
+                    <a:solidFill>
+                      <a:srgbClr val="1F4E79"/>
+                    </a:solidFill>
+                  </a:tcPr>
+                </a:tc>
+                <a:tc>
+                  <a:txBody>
+                    <a:bodyPr/>
+                    <a:lstStyle/>
+                    <a:p>
+                      <a:r>
+                        <a:rPr b="1" sz="1100">
+                          <a:solidFill>
+                            <a:srgbClr val="FFFFFF"/>
+                          </a:solidFill>
+                        </a:rPr>
+                        <a:t>PVT 異常品</a:t>
+                      </a:r>
+                    </a:p>
+                  </a:txBody>
+                  <a:tcPr>
+                    <a:solidFill>
+                      <a:srgbClr val="1F4E79"/>
+                    </a:solidFill>
+                  </a:tcPr>
+                </a:tc>
+                <a:tc>
+                  <a:txBody>
+                    <a:bodyPr/>
+                    <a:lstStyle/>
+                    <a:p>
+                      <a:r>
+                        <a:rPr b="1" sz="1100">
+                          <a:solidFill>
+                            <a:srgbClr val="FFFFFF"/>
+                          </a:solidFill>
+                        </a:rPr>
+                        <a:t>Spec 範圍</a:t>
+                      </a:r>
+                    </a:p>
+                  </a:txBody>
+                  <a:tcPr>
+                    <a:solidFill>
+                      <a:srgbClr val="1F4E79"/>
+                    </a:solidFill>
+                  </a:tcPr>
+                </a:tc>
+                <a:tc>
+                  <a:txBody>
+                    <a:bodyPr/>
+                    <a:lstStyle/>
+                    <a:p>
+                      <a:r>
+                        <a:rPr b="1" sz="1100">
+                          <a:solidFill>
+                            <a:srgbClr val="FFFFFF"/>
+                          </a:solidFill>
+                        </a:rPr>
+                        <a:t>判定</a:t>
+                      </a:r>
+                    </a:p>
+                  </a:txBody>
+                  <a:tcPr>
+                    <a:solidFill>
+                      <a:srgbClr val="1F4E79"/>
+                    </a:solidFill>
+                  </a:tcPr>
+                </a:tc>
+              </a:tr>
+              <a:tr h="287382">
+                <a:tc>
+                  <a:txBody>
+                    <a:bodyPr/>
+                    <a:lstStyle/>
+                    <a:p>
+                      <a:r>
+                        <a:rPr sz="1000"/>
+                        <a:t>ESD HBM (±2kV)</a:t>
+                      </a:r>
+                    </a:p>
+                  </a:txBody>
+                  <a:tcPr/>
+                </a:tc>
+                <a:tc>
+                  <a:txBody>
+                    <a:bodyPr/>
+                    <a:lstStyle/>
+                    <a:p>
+                      <a:r>
+                        <a:rPr sz="1000"/>
+                        <a:t>通過</a:t>
+                      </a:r>
+                    </a:p>
+                  </a:txBody>
+                  <a:tcPr/>
+                </a:tc>
+                <a:tc>
+                  <a:txBody>
+                    <a:bodyPr/>
+                    <a:lstStyle/>
+                    <a:p>
+                      <a:r>
+                        <a:rPr sz="1000"/>
+                        <a:t>?</a:t>
+                      </a:r>
+                    </a:p>
+                  </a:txBody>
+                  <a:tcPr/>
+                </a:tc>
+                <a:tc>
+                  <a:txBody>
+                    <a:bodyPr/>
+                    <a:lstStyle/>
+                    <a:p>
+                      <a:r>
+                        <a:rPr sz="1000"/>
+                        <a:t>±2kV</a:t>
+                      </a:r>
+                    </a:p>
+                  </a:txBody>
+                  <a:tcPr/>
+                </a:tc>
+                <a:tc>
+                  <a:txBody>
+                    <a:bodyPr/>
+                    <a:lstStyle/>
+                    <a:p>
+                      <a:r>
+                        <a:rPr sz="1000"/>
+                        <a:t>需補測</a:t>
+                      </a:r>
+                    </a:p>
+                  </a:txBody>
+                  <a:tcPr/>
+                </a:tc>
+              </a:tr>
+              <a:tr h="287382">
+                <a:tc>
+                  <a:txBody>
+                    <a:bodyPr/>
+                    <a:lstStyle/>
+                    <a:p>
+                      <a:r>
+                        <a:rPr sz="1000"/>
+                        <a:t>I/O 對地阻抗</a:t>
+                      </a:r>
+                    </a:p>
+                  </a:txBody>
+                  <a:tcPr/>
+                </a:tc>
+                <a:tc>
+                  <a:txBody>
+                    <a:bodyPr/>
+                    <a:lstStyle/>
+                    <a:p>
+                      <a:r>
+                        <a:rPr sz="1000"/>
+                        <a:t>16MΩ</a:t>
+                      </a:r>
+                    </a:p>
+                  </a:txBody>
+                  <a:tcPr/>
+                </a:tc>
+                <a:tc>
+                  <a:txBody>
+                    <a:bodyPr/>
+                    <a:lstStyle/>
+                    <a:p>
+                      <a:r>
+                        <a:rPr sz="1000"/>
+                        <a:t>5.7KΩ</a:t>
+                      </a:r>
+                    </a:p>
+                  </a:txBody>
+                  <a:tcPr/>
+                </a:tc>
+                <a:tc>
+                  <a:txBody>
+                    <a:bodyPr/>
+                    <a:lstStyle/>
+                    <a:p>
+                      <a:r>
+                        <a:rPr sz="1000"/>
+                        <a:t>&gt;1MΩ</a:t>
+                      </a:r>
+                    </a:p>
+                  </a:txBody>
+                  <a:tcPr/>
+                </a:tc>
+                <a:tc>
+                  <a:txBody>
+                    <a:bodyPr/>
+                    <a:lstStyle/>
+                    <a:p>
+                      <a:r>
+                        <a:rPr sz="1000"/>
+                        <a:t>FAIL</a:t>
+                      </a:r>
+                    </a:p>
+                  </a:txBody>
+                  <a:tcPr/>
+                </a:tc>
+              </a:tr>
+              <a:tr h="287382">
+                <a:tc>
+                  <a:txBody>
+                    <a:bodyPr/>
+                    <a:lstStyle/>
+                    <a:p>
+                      <a:r>
+                        <a:rPr sz="1000"/>
+                        <a:t>VH/VOUT 電壓</a:t>
+                      </a:r>
+                    </a:p>
+                  </a:txBody>
+                  <a:tcPr/>
+                </a:tc>
+                <a:tc>
+                  <a:txBody>
+                    <a:bodyPr/>
+                    <a:lstStyle/>
+                    <a:p>
+                      <a:r>
+                        <a:rPr sz="1000"/>
+                        <a:t>正常</a:t>
+                      </a:r>
+                    </a:p>
+                  </a:txBody>
+                  <a:tcPr/>
+                </a:tc>
+                <a:tc>
+                  <a:txBody>
+                    <a:bodyPr/>
+                    <a:lstStyle/>
+                    <a:p>
+                      <a:r>
+                        <a:rPr sz="1000"/>
+                        <a:t>0V</a:t>
+                      </a:r>
+                    </a:p>
+                  </a:txBody>
+                  <a:tcPr/>
+                </a:tc>
+                <a:tc>
+                  <a:txBody>
+                    <a:bodyPr/>
+                    <a:lstStyle/>
+                    <a:p>
+                      <a:r>
+                        <a:rPr sz="1000"/>
+                        <a:t>0.4-0.6V</a:t>
+                      </a:r>
+                    </a:p>
+                  </a:txBody>
+                  <a:tcPr/>
+                </a:tc>
+                <a:tc>
+                  <a:txBody>
+                    <a:bodyPr/>
+                    <a:lstStyle/>
+                    <a:p>
+                      <a:r>
+                        <a:rPr sz="1000"/>
+                        <a:t>FAIL</a:t>
+                      </a:r>
+                    </a:p>
+                  </a:txBody>
+                  <a:tcPr/>
+                </a:tc>
+              </a:tr>
+              <a:tr h="287382">
+                <a:tc>
+                  <a:txBody>
+                    <a:bodyPr/>
+                    <a:lstStyle/>
+                    <a:p>
+                      <a:r>
+                        <a:rPr sz="1000"/>
+                        <a:t>二極體特性</a:t>
+                      </a:r>
+                    </a:p>
+                  </a:txBody>
+                  <a:tcPr/>
+                </a:tc>
+                <a:tc>
+                  <a:txBody>
+                    <a:bodyPr/>
+                    <a:lstStyle/>
+                    <a:p>
+                      <a:r>
+                        <a:rPr sz="1000"/>
+                        <a:t>0.43V</a:t>
+                      </a:r>
+                    </a:p>
+                  </a:txBody>
+                  <a:tcPr/>
+                </a:tc>
+                <a:tc>
+                  <a:txBody>
+                    <a:bodyPr/>
+                    <a:lstStyle/>
+                    <a:p>
+                      <a:r>
+                        <a:rPr sz="1000"/>
+                        <a:t>0V</a:t>
+                      </a:r>
+                    </a:p>
+                  </a:txBody>
+                  <a:tcPr/>
+                </a:tc>
+                <a:tc>
+                  <a:txBody>
+                    <a:bodyPr/>
+                    <a:lstStyle/>
+                    <a:p>
+                      <a:r>
+                        <a:rPr sz="1000"/>
+                        <a:t>0.4-0.6V</a:t>
+                      </a:r>
+                    </a:p>
+                  </a:txBody>
+                  <a:tcPr/>
+                </a:tc>
+                <a:tc>
+                  <a:txBody>
+                    <a:bodyPr/>
+                    <a:lstStyle/>
+                    <a:p>
+                      <a:r>
+                        <a:rPr sz="1000"/>
+                        <a:t>FAIL</a:t>
+                      </a:r>
+                    </a:p>
+                  </a:txBody>
+                  <a:tcPr/>
+                </a:tc>
+              </a:tr>
+              <a:tr h="287382">
+                <a:tc>
+                  <a:txBody>
+                    <a:bodyPr/>
+                    <a:lstStyle/>
+                    <a:p>
+                      <a:r>
+                        <a:rPr sz="1000"/>
+                        <a:t>FW 讀取</a:t>
+                      </a:r>
+                    </a:p>
+                  </a:txBody>
+                  <a:tcPr/>
+                </a:tc>
+                <a:tc>
+                  <a:txBody>
+                    <a:bodyPr/>
+                    <a:lstStyle/>
+                    <a:p>
+                      <a:r>
+                        <a:rPr sz="1000"/>
+                        <a:t>正確</a:t>
+                      </a:r>
+                    </a:p>
+                  </a:txBody>
+                  <a:tcPr/>
+                </a:tc>
+                <a:tc>
+                  <a:txBody>
+                    <a:bodyPr/>
+                    <a:lstStyle/>
+                    <a:p>
+                      <a:r>
+                        <a:rPr sz="1000"/>
+                        <a:t>正確</a:t>
+                      </a:r>
+                    </a:p>
+                  </a:txBody>
+                  <a:tcPr/>
+                </a:tc>
+                <a:tc>
+                  <a:txBody>
+                    <a:bodyPr/>
+                    <a:lstStyle/>
+                    <a:p>
+                      <a:r>
+                        <a:rPr sz="1000"/>
+                        <a:t>100%</a:t>
+                      </a:r>
+                    </a:p>
+                  </a:txBody>
+                  <a:tcPr/>
+                </a:tc>
+                <a:tc>
+                  <a:txBody>
+                    <a:bodyPr/>
+                    <a:lstStyle/>
+                    <a:p>
+                      <a:r>
+                        <a:rPr sz="1000"/>
+                        <a:t>PASS</a:t>
+                      </a:r>
+                    </a:p>
+                  </a:txBody>
+                  <a:tcPr/>
+                </a:tc>
+              </a:tr>
+              <a:tr h="287388">
+                <a:tc>
+                  <a:txBody>
+                    <a:bodyPr/>
+                    <a:lstStyle/>
+                    <a:p>
+                      <a:r>
+                        <a:rPr sz="1000"/>
+                        <a:t>外觀檢查</a:t>
+                      </a:r>
+                    </a:p>
+                  </a:txBody>
+                  <a:tcPr/>
+                </a:tc>
+                <a:tc>
+                  <a:txBody>
+                    <a:bodyPr/>
+                    <a:lstStyle/>
+                    <a:p>
+                      <a:r>
+                        <a:rPr sz="1000"/>
+                        <a:t>正常</a:t>
+                      </a:r>
+                    </a:p>
+                  </a:txBody>
+                  <a:tcPr/>
+                </a:tc>
+                <a:tc>
+                  <a:txBody>
+                    <a:bodyPr/>
+                    <a:lstStyle/>
+                    <a:p>
+                      <a:r>
+                        <a:rPr sz="1000"/>
+                        <a:t>正常</a:t>
+                      </a:r>
+                    </a:p>
+                  </a:txBody>
+                  <a:tcPr/>
+                </a:tc>
+                <a:tc>
+                  <a:txBody>
+                    <a:bodyPr/>
+                    <a:lstStyle/>
+                    <a:p>
+                      <a:r>
+                        <a:rPr sz="1000"/>
+                        <a:t>無損傷</a:t>
+                      </a:r>
+                    </a:p>
+                  </a:txBody>
+                  <a:tcPr/>
+                </a:tc>
+                <a:tc>
+                  <a:txBody>
+                    <a:bodyPr/>
+                    <a:lstStyle/>
+                    <a:p>
+                      <a:r>
+                        <a:rPr sz="1000"/>
+                        <a:t>PASS</a:t>
+                      </a:r>
+                    </a:p>
+                  </a:txBody>
+                  <a:tcPr/>
+                </a:tc>
+              </a:tr>
+            </a:tbl>
+          </a:graphicData>
+        </a:graphic>
+      </p:graphicFrame>
+      <p:sp>
+        <p:nvSpPr>
+          <p:cNvPr id="6" name="Rectangle 5"/>
+          <p:cNvSpPr/>
+          <p:nvPr/>
+        </p:nvSpPr>
+        <p:spPr>
+          <a:xfrm>
+            <a:off x="457200" y="3566160"/>
+            <a:ext cx="228600" cy="228600"/>
+          </a:xfrm>
+          <a:prstGeom prst="rect">
+            <a:avLst/>
+          </a:prstGeom>
+          <a:solidFill>
+            <a:srgbClr val="D9D9D9"/>
+          </a:solidFill>
+          <a:ln>
+            <a:solidFill>
+              <a:srgbClr val="808080"/>
+            </a:solidFill>
+          </a:ln>
+        </p:spPr>
+        <p:style>
+          <a:lnRef idx="1">
+            <a:schemeClr val="accent1"/>
+          </a:lnRef>
+          <a:fillRef idx="3">
+            <a:schemeClr val="accent1"/>
+          </a:fillRef>
+          <a:effectRef idx="2">
+            <a:schemeClr val="accent1"/>
+          </a:effectRef>
+          <a:fontRef idx="minor">
+            <a:schemeClr val="lt1"/>
+          </a:fontRef>
+        </p:style>
+        <p:txBody>
+          <a:bodyPr rtlCol="0" anchor="ctr" wrap="square" lIns="45720" rIns="45720" tIns="18288" bIns="18288"/>
+          <a:lstStyle/>
+          <a:p>
+            <a:pPr algn="ctr"/>
+            <a:r>
+              <a:rPr sz="1400" b="1"/>
+              <a:t>☐</a:t>
+            </a:r>
+          </a:p>
+        </p:txBody>
+      </p:sp>
+      <p:sp>
+        <p:nvSpPr>
+          <p:cNvPr id="7" name="TextBox 6"/>
+          <p:cNvSpPr txBox="1"/>
+          <p:nvPr/>
+        </p:nvSpPr>
+        <p:spPr>
+          <a:xfrm>
+            <a:off x="777240" y="3566160"/>
+            <a:ext cx="10957560" cy="365760"/>
+          </a:xfrm>
+          <a:prstGeom prst="rect">
+            <a:avLst/>
+          </a:prstGeom>
+          <a:noFill/>
+        </p:spPr>
+        <p:txBody>
+          <a:bodyPr wrap="square" anchor="ctr">
+            <a:spAutoFit/>
+          </a:bodyPr>
+          <a:lstStyle/>
+          <a:p>
+            <a:r>
+              <a:rPr sz="1100">
+                <a:solidFill>
+                  <a:srgbClr val="C00000"/>
+                </a:solidFill>
+              </a:rPr>
+              <a:t>圖片解析度 ≥ 1000x(建議 ≥ 2000x 以利 IC Marking 辨識)</a:t>
+            </a:r>
+          </a:p>
+        </p:txBody>
+      </p:sp>
+      <p:sp>
+        <p:nvSpPr>
+          <p:cNvPr id="8" name="Rectangle 7"/>
+          <p:cNvSpPr/>
+          <p:nvPr/>
+        </p:nvSpPr>
+        <p:spPr>
+          <a:xfrm>
+            <a:off x="457200" y="3931920"/>
+            <a:ext cx="228600" cy="228600"/>
+          </a:xfrm>
+          <a:prstGeom prst="rect">
+            <a:avLst/>
+          </a:prstGeom>
+          <a:solidFill>
+            <a:srgbClr val="D9D9D9"/>
+          </a:solidFill>
+          <a:ln>
+            <a:solidFill>
+              <a:srgbClr val="808080"/>
+            </a:solidFill>
+          </a:ln>
+        </p:spPr>
+        <p:style>
+          <a:lnRef idx="1">
+            <a:schemeClr val="accent1"/>
+          </a:lnRef>
+          <a:fillRef idx="3">
+            <a:schemeClr val="accent1"/>
+          </a:fillRef>
+          <a:effectRef idx="2">
+            <a:schemeClr val="accent1"/>
+          </a:effectRef>
+          <a:fontRef idx="minor">
+            <a:schemeClr val="lt1"/>
+          </a:fontRef>
+        </p:style>
+        <p:txBody>
+          <a:bodyPr rtlCol="0" anchor="ctr" wrap="square" lIns="45720" rIns="45720" tIns="18288" bIns="18288"/>
+          <a:lstStyle/>
+          <a:p>
+            <a:pPr algn="ctr"/>
+            <a:r>
+              <a:rPr sz="1400" b="1"/>
+              <a:t>☐</a:t>
+            </a:r>
+          </a:p>
+        </p:txBody>
+      </p:sp>
+      <p:sp>
+        <p:nvSpPr>
+          <p:cNvPr id="9" name="TextBox 8"/>
+          <p:cNvSpPr txBox="1"/>
+          <p:nvPr/>
+        </p:nvSpPr>
+        <p:spPr>
+          <a:xfrm>
+            <a:off x="777240" y="3931920"/>
+            <a:ext cx="10957560" cy="365760"/>
+          </a:xfrm>
+          <a:prstGeom prst="rect">
+            <a:avLst/>
+          </a:prstGeom>
+          <a:noFill/>
+        </p:spPr>
+        <p:txBody>
+          <a:bodyPr wrap="square" anchor="ctr">
+            <a:spAutoFit/>
+          </a:bodyPr>
+          <a:lstStyle/>
+          <a:p>
+            <a:r>
+              <a:rPr sz="1100">
+                <a:solidFill>
+                  <a:srgbClr val="C00000"/>
+                </a:solidFill>
+              </a:rPr>
+              <a:t>對焦清晰,IC 標籤、Marking 可清楚辨識</a:t>
+            </a:r>
+          </a:p>
+        </p:txBody>
+      </p:sp>
+      <p:sp>
+        <p:nvSpPr>
+          <p:cNvPr id="10" name="Rectangle 9"/>
+          <p:cNvSpPr/>
+          <p:nvPr/>
+        </p:nvSpPr>
+        <p:spPr>
+          <a:xfrm>
+            <a:off x="457200" y="4297680"/>
+            <a:ext cx="228600" cy="228600"/>
+          </a:xfrm>
+          <a:prstGeom prst="rect">
+            <a:avLst/>
+          </a:prstGeom>
+          <a:solidFill>
+            <a:srgbClr val="D9D9D9"/>
+          </a:solidFill>
+          <a:ln>
+            <a:solidFill>
+              <a:srgbClr val="808080"/>
+            </a:solidFill>
+          </a:ln>
+        </p:spPr>
+        <p:style>
+          <a:lnRef idx="1">
+            <a:schemeClr val="accent1"/>
+          </a:lnRef>
+          <a:fillRef idx="3">
+            <a:schemeClr val="accent1"/>
+          </a:fillRef>
+          <a:effectRef idx="2">
+            <a:schemeClr val="accent1"/>
+          </a:effectRef>
+          <a:fontRef idx="minor">
+            <a:schemeClr val="lt1"/>
+          </a:fontRef>
+        </p:style>
+        <p:txBody>
+          <a:bodyPr rtlCol="0" anchor="ctr" wrap="square" lIns="45720" rIns="45720" tIns="18288" bIns="18288"/>
+          <a:lstStyle/>
+          <a:p>
+            <a:pPr algn="ctr"/>
+            <a:r>
+              <a:rPr sz="1400" b="1"/>
+              <a:t>☐</a:t>
+            </a:r>
+          </a:p>
+        </p:txBody>
+      </p:sp>
+      <p:sp>
+        <p:nvSpPr>
+          <p:cNvPr id="11" name="TextBox 10"/>
+          <p:cNvSpPr txBox="1"/>
+          <p:nvPr/>
+        </p:nvSpPr>
+        <p:spPr>
+          <a:xfrm>
+            <a:off x="777240" y="4297680"/>
+            <a:ext cx="10957560" cy="365760"/>
+          </a:xfrm>
+          <a:prstGeom prst="rect">
+            <a:avLst/>
+          </a:prstGeom>
+          <a:noFill/>
+        </p:spPr>
+        <p:txBody>
+          <a:bodyPr wrap="square" anchor="ctr">
+            <a:spAutoFit/>
+          </a:bodyPr>
+          <a:lstStyle/>
+          <a:p>
+            <a:r>
+              <a:rPr sz="1100">
+                <a:solidFill>
+                  <a:srgbClr val="ED7D31"/>
+                </a:solidFill>
+              </a:rPr>
+              <a:t>含比例尺(scale bar),方便評估損傷範圍</a:t>
+            </a:r>
+          </a:p>
+        </p:txBody>
+      </p:sp>
+      <p:sp>
+        <p:nvSpPr>
+          <p:cNvPr id="12" name="Rectangle 11"/>
+          <p:cNvSpPr/>
+          <p:nvPr/>
+        </p:nvSpPr>
+        <p:spPr>
+          <a:xfrm>
+            <a:off x="457200" y="4663440"/>
+            <a:ext cx="228600" cy="228600"/>
+          </a:xfrm>
+          <a:prstGeom prst="rect">
+            <a:avLst/>
+          </a:prstGeom>
+          <a:solidFill>
+            <a:srgbClr val="D9D9D9"/>
+          </a:solidFill>
+          <a:ln>
+            <a:solidFill>
+              <a:srgbClr val="808080"/>
+            </a:solidFill>
+          </a:ln>
+        </p:spPr>
+        <p:style>
+          <a:lnRef idx="1">
+            <a:schemeClr val="accent1"/>
+          </a:lnRef>
+          <a:fillRef idx="3">
+            <a:schemeClr val="accent1"/>
+          </a:fillRef>
+          <a:effectRef idx="2">
+            <a:schemeClr val="accent1"/>
+          </a:effectRef>
+          <a:fontRef idx="minor">
+            <a:schemeClr val="lt1"/>
+          </a:fontRef>
+        </p:style>
+        <p:txBody>
+          <a:bodyPr rtlCol="0" anchor="ctr" wrap="square" lIns="45720" rIns="45720" tIns="18288" bIns="18288"/>
+          <a:lstStyle/>
+          <a:p>
+            <a:pPr algn="ctr"/>
+            <a:r>
+              <a:rPr sz="1400" b="1"/>
+              <a:t>☐</a:t>
+            </a:r>
+          </a:p>
+        </p:txBody>
+      </p:sp>
+      <p:sp>
+        <p:nvSpPr>
+          <p:cNvPr id="13" name="TextBox 12"/>
+          <p:cNvSpPr txBox="1"/>
+          <p:nvPr/>
+        </p:nvSpPr>
+        <p:spPr>
+          <a:xfrm>
+            <a:off x="777240" y="4663440"/>
+            <a:ext cx="10957560" cy="365760"/>
+          </a:xfrm>
+          <a:prstGeom prst="rect">
+            <a:avLst/>
+          </a:prstGeom>
+          <a:noFill/>
+        </p:spPr>
+        <p:txBody>
+          <a:bodyPr wrap="square" anchor="ctr">
+            <a:spAutoFit/>
+          </a:bodyPr>
+          <a:lstStyle/>
+          <a:p>
+            <a:r>
+              <a:rPr sz="1100">
+                <a:solidFill>
+                  <a:srgbClr val="ED7D31"/>
+                </a:solidFill>
+              </a:rPr>
+              <a:t>異常點明確標註(箭頭、方框、文字說明)</a:t>
+            </a:r>
+          </a:p>
+        </p:txBody>
+      </p:sp>
+      <p:sp>
+        <p:nvSpPr>
+          <p:cNvPr id="14" name="Rectangle 13"/>
+          <p:cNvSpPr/>
+          <p:nvPr/>
+        </p:nvSpPr>
+        <p:spPr>
+          <a:xfrm>
+            <a:off x="457200" y="5029200"/>
+            <a:ext cx="228600" cy="228600"/>
+          </a:xfrm>
+          <a:prstGeom prst="rect">
+            <a:avLst/>
+          </a:prstGeom>
+          <a:solidFill>
+            <a:srgbClr val="D9D9D9"/>
+          </a:solidFill>
+          <a:ln>
+            <a:solidFill>
+              <a:srgbClr val="808080"/>
+            </a:solidFill>
+          </a:ln>
+        </p:spPr>
+        <p:style>
+          <a:lnRef idx="1">
+            <a:schemeClr val="accent1"/>
+          </a:lnRef>
+          <a:fillRef idx="3">
+            <a:schemeClr val="accent1"/>
+          </a:fillRef>
+          <a:effectRef idx="2">
+            <a:schemeClr val="accent1"/>
+          </a:effectRef>
+          <a:fontRef idx="minor">
+            <a:schemeClr val="lt1"/>
+          </a:fontRef>
+        </p:style>
+        <p:txBody>
+          <a:bodyPr rtlCol="0" anchor="ctr" wrap="square" lIns="45720" rIns="45720" tIns="18288" bIns="18288"/>
+          <a:lstStyle/>
+          <a:p>
+            <a:pPr algn="ctr"/>
+            <a:r>
+              <a:rPr sz="1400" b="1"/>
+              <a:t>☐</a:t>
+            </a:r>
+          </a:p>
+        </p:txBody>
+      </p:sp>
+      <p:sp>
+        <p:nvSpPr>
+          <p:cNvPr id="15" name="TextBox 14"/>
+          <p:cNvSpPr txBox="1"/>
+          <p:nvPr/>
+        </p:nvSpPr>
+        <p:spPr>
+          <a:xfrm>
+            <a:off x="777240" y="5029200"/>
+            <a:ext cx="10957560" cy="365760"/>
+          </a:xfrm>
+          <a:prstGeom prst="rect">
+            <a:avLst/>
+          </a:prstGeom>
+          <a:noFill/>
+        </p:spPr>
+        <p:txBody>
+          <a:bodyPr wrap="square" anchor="ctr">
+            <a:spAutoFit/>
+          </a:bodyPr>
+          <a:lstStyle/>
+          <a:p>
+            <a:r>
+              <a:rPr sz="1100">
+                <a:solidFill>
+                  <a:srgbClr val="1F4E79"/>
+                </a:solidFill>
+              </a:rPr>
+              <a:t>對照組(Golden Sample)與異常品並列比較</a:t>
+            </a:r>
+          </a:p>
+        </p:txBody>
+      </p:sp>
+      <p:sp>
+        <p:nvSpPr>
+          <p:cNvPr id="16" name="Rectangle 15"/>
+          <p:cNvSpPr/>
+          <p:nvPr/>
+        </p:nvSpPr>
+        <p:spPr>
+          <a:xfrm>
+            <a:off x="457200" y="5394960"/>
+            <a:ext cx="228600" cy="228600"/>
+          </a:xfrm>
+          <a:prstGeom prst="rect">
+            <a:avLst/>
+          </a:prstGeom>
+          <a:solidFill>
+            <a:srgbClr val="D9D9D9"/>
+          </a:solidFill>
+          <a:ln>
+            <a:solidFill>
+              <a:srgbClr val="808080"/>
+            </a:solidFill>
+          </a:ln>
+        </p:spPr>
+        <p:style>
+          <a:lnRef idx="1">
+            <a:schemeClr val="accent1"/>
+          </a:lnRef>
+          <a:fillRef idx="3">
+            <a:schemeClr val="accent1"/>
+          </a:fillRef>
+          <a:effectRef idx="2">
+            <a:schemeClr val="accent1"/>
+          </a:effectRef>
+          <a:fontRef idx="minor">
+            <a:schemeClr val="lt1"/>
+          </a:fontRef>
+        </p:style>
+        <p:txBody>
+          <a:bodyPr rtlCol="0" anchor="ctr" wrap="square" lIns="45720" rIns="45720" tIns="18288" bIns="18288"/>
+          <a:lstStyle/>
+          <a:p>
+            <a:pPr algn="ctr"/>
+            <a:r>
+              <a:rPr sz="1400" b="1"/>
+              <a:t>☐</a:t>
+            </a:r>
+          </a:p>
+        </p:txBody>
+      </p:sp>
+      <p:sp>
+        <p:nvSpPr>
+          <p:cNvPr id="17" name="TextBox 16"/>
+          <p:cNvSpPr txBox="1"/>
+          <p:nvPr/>
+        </p:nvSpPr>
+        <p:spPr>
+          <a:xfrm>
+            <a:off x="777240" y="5394960"/>
+            <a:ext cx="10957560" cy="365760"/>
+          </a:xfrm>
+          <a:prstGeom prst="rect">
+            <a:avLst/>
+          </a:prstGeom>
+          <a:noFill/>
+        </p:spPr>
+        <p:txBody>
+          <a:bodyPr wrap="square" anchor="ctr">
+            <a:spAutoFit/>
+          </a:bodyPr>
+          <a:lstStyle/>
+          <a:p>
+            <a:r>
+              <a:rPr sz="1100">
+                <a:solidFill>
+                  <a:srgbClr val="1F4E79"/>
+                </a:solidFill>
+              </a:rPr>
+              <a:t>每個量化數據有來源追溯(儀器型號、測試條件、日期)</a:t>
+            </a:r>
+          </a:p>
+        </p:txBody>
+      </p:sp>
+      <p:sp>
+        <p:nvSpPr>
+          <p:cNvPr id="18" name="Rectangle 17"/>
+          <p:cNvSpPr/>
+          <p:nvPr/>
+        </p:nvSpPr>
+        <p:spPr>
+          <a:xfrm>
+            <a:off x="457200" y="5760720"/>
+            <a:ext cx="228600" cy="228600"/>
+          </a:xfrm>
+          <a:prstGeom prst="rect">
+            <a:avLst/>
+          </a:prstGeom>
+          <a:solidFill>
+            <a:srgbClr val="D9D9D9"/>
+          </a:solidFill>
+          <a:ln>
+            <a:solidFill>
+              <a:srgbClr val="808080"/>
+            </a:solidFill>
+          </a:ln>
+        </p:spPr>
+        <p:style>
+          <a:lnRef idx="1">
+            <a:schemeClr val="accent1"/>
+          </a:lnRef>
+          <a:fillRef idx="3">
+            <a:schemeClr val="accent1"/>
+          </a:fillRef>
+          <a:effectRef idx="2">
+            <a:schemeClr val="accent1"/>
+          </a:effectRef>
+          <a:fontRef idx="minor">
+            <a:schemeClr val="lt1"/>
+          </a:fontRef>
+        </p:style>
+        <p:txBody>
+          <a:bodyPr rtlCol="0" anchor="ctr" wrap="square" lIns="45720" rIns="45720" tIns="18288" bIns="18288"/>
+          <a:lstStyle/>
+          <a:p>
+            <a:pPr algn="ctr"/>
+            <a:r>
+              <a:rPr sz="1400" b="1"/>
+              <a:t>☐</a:t>
+            </a:r>
+          </a:p>
+        </p:txBody>
+      </p:sp>
+      <p:sp>
+        <p:nvSpPr>
+          <p:cNvPr id="19" name="TextBox 18"/>
+          <p:cNvSpPr txBox="1"/>
+          <p:nvPr/>
+        </p:nvSpPr>
+        <p:spPr>
+          <a:xfrm>
+            <a:off x="777240" y="5760720"/>
+            <a:ext cx="10957560" cy="365760"/>
+          </a:xfrm>
+          <a:prstGeom prst="rect">
+            <a:avLst/>
+          </a:prstGeom>
+          <a:noFill/>
+        </p:spPr>
+        <p:txBody>
+          <a:bodyPr wrap="square" anchor="ctr">
+            <a:spAutoFit/>
+          </a:bodyPr>
+          <a:lstStyle/>
+          <a:p>
+            <a:r>
+              <a:rPr sz="1100">
+                <a:solidFill>
+                  <a:srgbClr val="70AD47"/>
+                </a:solidFill>
+              </a:rPr>
+              <a:t>統計顯著性(p-value、CI)支援結論(非僅描述)</a:t>
             </a:r>
           </a:p>
         </p:txBody>

--- a/report/MS_Meishan_ADO_445239_260716_improved.pptx
+++ b/report/MS_Meishan_ADO_445239_260716_improved.pptx
@@ -27,6 +27,9 @@
     <p:sldId id="299" r:id="rId28"/>
     <p:sldId id="300" r:id="rId29"/>
     <p:sldId id="301" r:id="rId30"/>
+    <p:sldId id="302" r:id="rId31"/>
+    <p:sldId id="303" r:id="rId32"/>
+    <p:sldId id="304" r:id="rId33"/>
   </p:sldIdLst>
   <p:sldSz cx="12192000" cy="6858000"/>
   <p:notesSz cx="6858000" cy="9144000"/>
@@ -10922,10 +10925,12 @@
             <a:spLocks noGrp="1"/>
           </p:cNvSpPr>
           <p:nvPr>
-            <p:ph type="body" idx="10" sz="quarter"/>
+            <p:ph type="body" idx="10" sz="quarter" orient="horiz"/>
           </p:nvPr>
         </p:nvSpPr>
-        <p:spPr/>
+        <p:spPr>
+          <a:xfrm/>
+        </p:spPr>
         <p:txBody>
           <a:bodyPr/>
           <a:lstStyle/>
@@ -10994,23 +10999,6 @@
       </p:sp>
       <p:sp>
         <p:nvSpPr>
-          <p:cNvPr id="3" name="Text Placeholder 2"/>
-          <p:cNvSpPr>
-            <a:spLocks noGrp="1"/>
-          </p:cNvSpPr>
-          <p:nvPr>
-            <p:ph type="body" idx="12" sz="quarter"/>
-          </p:nvPr>
-        </p:nvSpPr>
-        <p:spPr/>
-        <p:txBody>
-          <a:bodyPr/>
-          <a:lstStyle/>
-          <a:p/>
-        </p:txBody>
-      </p:sp>
-      <p:sp>
-        <p:nvSpPr>
           <p:cNvPr id="4" name="TextBox 3"/>
           <p:cNvSpPr txBox="1"/>
           <p:nvPr/>
@@ -11026,9 +11014,7 @@
           <a:noFill/>
         </p:spPr>
         <p:txBody>
-          <a:bodyPr wrap="none">
-            <a:spAutoFit/>
-          </a:bodyPr>
+          <a:bodyPr wrap="square" lIns="45720" rIns="45720" tIns="18288" bIns="18288"/>
           <a:lstStyle/>
           <a:p>
             <a:r>
@@ -11494,40 +11480,6 @@
       <p:grpSpPr/>
       <p:sp>
         <p:nvSpPr>
-          <p:cNvPr id="2" name="Text Placeholder 1"/>
-          <p:cNvSpPr>
-            <a:spLocks noGrp="1"/>
-          </p:cNvSpPr>
-          <p:nvPr>
-            <p:ph type="body" idx="10" sz="quarter"/>
-          </p:nvPr>
-        </p:nvSpPr>
-        <p:spPr/>
-        <p:txBody>
-          <a:bodyPr/>
-          <a:lstStyle/>
-          <a:p/>
-        </p:txBody>
-      </p:sp>
-      <p:sp>
-        <p:nvSpPr>
-          <p:cNvPr id="3" name="Text Placeholder 2"/>
-          <p:cNvSpPr>
-            <a:spLocks noGrp="1"/>
-          </p:cNvSpPr>
-          <p:nvPr>
-            <p:ph type="body" idx="12" sz="quarter"/>
-          </p:nvPr>
-        </p:nvSpPr>
-        <p:spPr/>
-        <p:txBody>
-          <a:bodyPr/>
-          <a:lstStyle/>
-          <a:p/>
-        </p:txBody>
-      </p:sp>
-      <p:sp>
-        <p:nvSpPr>
           <p:cNvPr id="4" name="TextBox 3"/>
           <p:cNvSpPr txBox="1"/>
           <p:nvPr/>
@@ -11543,9 +11495,7 @@
           <a:noFill/>
         </p:spPr>
         <p:txBody>
-          <a:bodyPr wrap="none">
-            <a:spAutoFit/>
-          </a:bodyPr>
+          <a:bodyPr wrap="square" lIns="45720" rIns="45720" tIns="18288" bIns="18288"/>
           <a:lstStyle/>
           <a:p>
             <a:r>
@@ -11865,40 +11815,6 @@
       <p:grpSpPr/>
       <p:sp>
         <p:nvSpPr>
-          <p:cNvPr id="2" name="Text Placeholder 1"/>
-          <p:cNvSpPr>
-            <a:spLocks noGrp="1"/>
-          </p:cNvSpPr>
-          <p:nvPr>
-            <p:ph type="body" idx="10" sz="quarter"/>
-          </p:nvPr>
-        </p:nvSpPr>
-        <p:spPr/>
-        <p:txBody>
-          <a:bodyPr/>
-          <a:lstStyle/>
-          <a:p/>
-        </p:txBody>
-      </p:sp>
-      <p:sp>
-        <p:nvSpPr>
-          <p:cNvPr id="3" name="Text Placeholder 2"/>
-          <p:cNvSpPr>
-            <a:spLocks noGrp="1"/>
-          </p:cNvSpPr>
-          <p:nvPr>
-            <p:ph type="body" idx="12" sz="quarter"/>
-          </p:nvPr>
-        </p:nvSpPr>
-        <p:spPr/>
-        <p:txBody>
-          <a:bodyPr/>
-          <a:lstStyle/>
-          <a:p/>
-        </p:txBody>
-      </p:sp>
-      <p:sp>
-        <p:nvSpPr>
           <p:cNvPr id="4" name="TextBox 3"/>
           <p:cNvSpPr txBox="1"/>
           <p:nvPr/>
@@ -11914,9 +11830,7 @@
           <a:noFill/>
         </p:spPr>
         <p:txBody>
-          <a:bodyPr wrap="none">
-            <a:spAutoFit/>
-          </a:bodyPr>
+          <a:bodyPr wrap="square" lIns="45720" rIns="45720" tIns="18288" bIns="18288"/>
           <a:lstStyle/>
           <a:p>
             <a:r>
@@ -12282,10 +12196,12 @@
             <a:spLocks noGrp="1"/>
           </p:cNvSpPr>
           <p:nvPr>
-            <p:ph type="body" idx="10" sz="quarter"/>
+            <p:ph type="body" idx="10" sz="quarter" orient="horiz"/>
           </p:nvPr>
         </p:nvSpPr>
-        <p:spPr/>
+        <p:spPr>
+          <a:xfrm/>
+        </p:spPr>
         <p:txBody>
           <a:bodyPr/>
           <a:lstStyle/>
@@ -12354,23 +12270,6 @@
       </p:sp>
       <p:sp>
         <p:nvSpPr>
-          <p:cNvPr id="3" name="Text Placeholder 2"/>
-          <p:cNvSpPr>
-            <a:spLocks noGrp="1"/>
-          </p:cNvSpPr>
-          <p:nvPr>
-            <p:ph type="body" idx="12" sz="quarter"/>
-          </p:nvPr>
-        </p:nvSpPr>
-        <p:spPr/>
-        <p:txBody>
-          <a:bodyPr/>
-          <a:lstStyle/>
-          <a:p/>
-        </p:txBody>
-      </p:sp>
-      <p:sp>
-        <p:nvSpPr>
           <p:cNvPr id="4" name="TextBox 3"/>
           <p:cNvSpPr txBox="1"/>
           <p:nvPr/>
@@ -12386,9 +12285,7 @@
           <a:noFill/>
         </p:spPr>
         <p:txBody>
-          <a:bodyPr wrap="none">
-            <a:spAutoFit/>
-          </a:bodyPr>
+          <a:bodyPr wrap="square" lIns="45720" rIns="45720" tIns="18288" bIns="18288"/>
           <a:lstStyle/>
           <a:p>
             <a:r>
@@ -12422,10 +12319,12 @@
             <a:spLocks noGrp="1"/>
           </p:cNvSpPr>
           <p:nvPr>
-            <p:ph type="body" idx="10" sz="quarter"/>
+            <p:ph type="body" idx="10" sz="quarter" orient="horiz"/>
           </p:nvPr>
         </p:nvSpPr>
-        <p:spPr/>
+        <p:spPr>
+          <a:xfrm/>
+        </p:spPr>
         <p:txBody>
           <a:bodyPr/>
           <a:lstStyle/>
@@ -12502,23 +12401,6 @@
       </p:sp>
       <p:sp>
         <p:nvSpPr>
-          <p:cNvPr id="3" name="Text Placeholder 2"/>
-          <p:cNvSpPr>
-            <a:spLocks noGrp="1"/>
-          </p:cNvSpPr>
-          <p:nvPr>
-            <p:ph type="body" idx="12" sz="quarter"/>
-          </p:nvPr>
-        </p:nvSpPr>
-        <p:spPr/>
-        <p:txBody>
-          <a:bodyPr/>
-          <a:lstStyle/>
-          <a:p/>
-        </p:txBody>
-      </p:sp>
-      <p:sp>
-        <p:nvSpPr>
           <p:cNvPr id="4" name="TextBox 3"/>
           <p:cNvSpPr txBox="1"/>
           <p:nvPr/>
@@ -12534,9 +12416,7 @@
           <a:noFill/>
         </p:spPr>
         <p:txBody>
-          <a:bodyPr wrap="none">
-            <a:spAutoFit/>
-          </a:bodyPr>
+          <a:bodyPr wrap="square" lIns="45720" rIns="45720" tIns="18288" bIns="18288"/>
           <a:lstStyle/>
           <a:p>
             <a:r>
@@ -12971,40 +12851,6 @@
       <p:grpSpPr/>
       <p:sp>
         <p:nvSpPr>
-          <p:cNvPr id="2" name="Text Placeholder 1"/>
-          <p:cNvSpPr>
-            <a:spLocks noGrp="1"/>
-          </p:cNvSpPr>
-          <p:nvPr>
-            <p:ph type="body" idx="10" sz="quarter"/>
-          </p:nvPr>
-        </p:nvSpPr>
-        <p:spPr/>
-        <p:txBody>
-          <a:bodyPr/>
-          <a:lstStyle/>
-          <a:p/>
-        </p:txBody>
-      </p:sp>
-      <p:sp>
-        <p:nvSpPr>
-          <p:cNvPr id="3" name="Text Placeholder 2"/>
-          <p:cNvSpPr>
-            <a:spLocks noGrp="1"/>
-          </p:cNvSpPr>
-          <p:nvPr>
-            <p:ph type="body" idx="12" sz="quarter"/>
-          </p:nvPr>
-        </p:nvSpPr>
-        <p:spPr/>
-        <p:txBody>
-          <a:bodyPr/>
-          <a:lstStyle/>
-          <a:p/>
-        </p:txBody>
-      </p:sp>
-      <p:sp>
-        <p:nvSpPr>
           <p:cNvPr id="4" name="TextBox 3"/>
           <p:cNvSpPr txBox="1"/>
           <p:nvPr/>
@@ -13020,9 +12866,7 @@
           <a:noFill/>
         </p:spPr>
         <p:txBody>
-          <a:bodyPr wrap="none">
-            <a:spAutoFit/>
-          </a:bodyPr>
+          <a:bodyPr wrap="square" lIns="45720" rIns="45720" tIns="18288" bIns="18288"/>
           <a:lstStyle/>
           <a:p>
             <a:r>
@@ -13470,40 +13314,6 @@
       <p:grpSpPr/>
       <p:sp>
         <p:nvSpPr>
-          <p:cNvPr id="2" name="Text Placeholder 1"/>
-          <p:cNvSpPr>
-            <a:spLocks noGrp="1"/>
-          </p:cNvSpPr>
-          <p:nvPr>
-            <p:ph type="body" idx="10" sz="quarter"/>
-          </p:nvPr>
-        </p:nvSpPr>
-        <p:spPr/>
-        <p:txBody>
-          <a:bodyPr/>
-          <a:lstStyle/>
-          <a:p/>
-        </p:txBody>
-      </p:sp>
-      <p:sp>
-        <p:nvSpPr>
-          <p:cNvPr id="3" name="Text Placeholder 2"/>
-          <p:cNvSpPr>
-            <a:spLocks noGrp="1"/>
-          </p:cNvSpPr>
-          <p:nvPr>
-            <p:ph type="body" idx="12" sz="quarter"/>
-          </p:nvPr>
-        </p:nvSpPr>
-        <p:spPr/>
-        <p:txBody>
-          <a:bodyPr/>
-          <a:lstStyle/>
-          <a:p/>
-        </p:txBody>
-      </p:sp>
-      <p:sp>
-        <p:nvSpPr>
           <p:cNvPr id="4" name="TextBox 3"/>
           <p:cNvSpPr txBox="1"/>
           <p:nvPr/>
@@ -13519,9 +13329,7 @@
           <a:noFill/>
         </p:spPr>
         <p:txBody>
-          <a:bodyPr wrap="none">
-            <a:spAutoFit/>
-          </a:bodyPr>
+          <a:bodyPr wrap="square" lIns="45720" rIns="45720" tIns="18288" bIns="18288"/>
           <a:lstStyle/>
           <a:p>
             <a:r>
@@ -13957,6 +13765,1066 @@
 </p:sld>
 </file>
 
+<file path=ppt/slides/slide17.xml><?xml version="1.0" encoding="utf-8"?>
+<p:sld xmlns:a="http://schemas.openxmlformats.org/drawingml/2006/main" xmlns:p="http://schemas.openxmlformats.org/presentationml/2006/main" xmlns:r="http://schemas.openxmlformats.org/officeDocument/2006/relationships">
+  <p:cSld>
+    <p:spTree>
+      <p:nvGrpSpPr>
+        <p:cNvPr id="1" name=""/>
+        <p:cNvGrpSpPr/>
+        <p:nvPr/>
+      </p:nvGrpSpPr>
+      <p:grpSpPr/>
+      <p:sp>
+        <p:nvSpPr>
+          <p:cNvPr id="4" name="TextBox 3"/>
+          <p:cNvSpPr txBox="1"/>
+          <p:nvPr/>
+        </p:nvSpPr>
+        <p:spPr>
+          <a:xfrm>
+            <a:off x="457200" y="274320"/>
+            <a:ext cx="11277600" cy="914400"/>
+          </a:xfrm>
+          <a:prstGeom prst="rect">
+            <a:avLst/>
+          </a:prstGeom>
+          <a:noFill/>
+        </p:spPr>
+        <p:txBody>
+          <a:bodyPr wrap="square" lIns="45720" rIns="45720" tIns="18288" bIns="18288"/>
+          <a:lstStyle/>
+          <a:p>
+            <a:r>
+              <a:t>Executive Summary</a:t>
+            </a:r>
+          </a:p>
+        </p:txBody>
+      </p:sp>
+      <p:sp>
+        <p:nvSpPr>
+          <p:cNvPr id="5" name="TextBox 4"/>
+          <p:cNvSpPr txBox="1"/>
+          <p:nvPr/>
+        </p:nvSpPr>
+        <p:spPr>
+          <a:xfrm>
+            <a:off x="457200" y="1371600"/>
+            <a:ext cx="11277600" cy="5029200"/>
+          </a:xfrm>
+          <a:prstGeom prst="rect">
+            <a:avLst/>
+          </a:prstGeom>
+          <a:noFill/>
+        </p:spPr>
+        <p:txBody>
+          <a:bodyPr wrap="square" lIns="45720" rIns="45720" tIns="18288" bIns="18288"/>
+          <a:lstStyle/>
+          <a:p>
+            <a:pPr>
+              <a:defRPr sz="1400">
+                <a:solidFill>
+                  <a:srgbClr val="333333"/>
+                </a:solidFill>
+              </a:defRPr>
+            </a:pPr>
+            <a:r>
+              <a:t>此報告目前僅能被視為一份「測試紀錄 (Test Log)」，而非「失效分析報告 (Failure Analysis Report)」。報告僅記錄了測試失敗的結果，完全缺失了「為什麼會失敗」的分析過程與「如何解決」的對策。報告內容與失效分析的邏輯鏈嚴重斷裂，建議必須補齊根因分析與改善對策後方可作為正式文件。</a:t>
+            </a:r>
+          </a:p>
+        </p:txBody>
+      </p:sp>
+    </p:spTree>
+  </p:cSld>
+  <p:clrMapOvr>
+    <a:masterClrMapping/>
+  </p:clrMapOvr>
+</p:sld>
+</file>
+
+<file path=ppt/slides/slide18.xml><?xml version="1.0" encoding="utf-8"?>
+<p:sld xmlns:a="http://schemas.openxmlformats.org/drawingml/2006/main" xmlns:p="http://schemas.openxmlformats.org/presentationml/2006/main" xmlns:r="http://schemas.openxmlformats.org/officeDocument/2006/relationships">
+  <p:cSld>
+    <p:spTree>
+      <p:nvGrpSpPr>
+        <p:cNvPr id="1" name=""/>
+        <p:cNvGrpSpPr/>
+        <p:nvPr/>
+      </p:nvGrpSpPr>
+      <p:grpSpPr/>
+      <p:sp>
+        <p:nvSpPr>
+          <p:cNvPr id="4" name="TextBox 3"/>
+          <p:cNvSpPr txBox="1"/>
+          <p:nvPr/>
+        </p:nvSpPr>
+        <p:spPr>
+          <a:xfrm>
+            <a:off x="457200" y="274320"/>
+            <a:ext cx="11277600" cy="914400"/>
+          </a:xfrm>
+          <a:prstGeom prst="rect">
+            <a:avLst/>
+          </a:prstGeom>
+          <a:noFill/>
+        </p:spPr>
+        <p:txBody>
+          <a:bodyPr wrap="square" lIns="45720" rIns="45720" tIns="18288" bIns="18288"/>
+          <a:lstStyle/>
+          <a:p>
+            <a:r>
+              <a:t>Key Improvements Required</a:t>
+            </a:r>
+          </a:p>
+        </p:txBody>
+      </p:sp>
+      <p:sp>
+        <p:nvSpPr>
+          <p:cNvPr id="5" name="TextBox 4"/>
+          <p:cNvSpPr txBox="1"/>
+          <p:nvPr/>
+        </p:nvSpPr>
+        <p:spPr>
+          <a:xfrm>
+            <a:off x="457200" y="1371600"/>
+            <a:ext cx="11277600" cy="5029200"/>
+          </a:xfrm>
+          <a:prstGeom prst="rect">
+            <a:avLst/>
+          </a:prstGeom>
+          <a:noFill/>
+        </p:spPr>
+        <p:txBody>
+          <a:bodyPr wrap="square" lIns="45720" rIns="45720" tIns="18288" bIns="18288"/>
+          <a:lstStyle/>
+          <a:p>
+            <a:pPr>
+              <a:defRPr sz="1300">
+                <a:solidFill>
+                  <a:srgbClr val="FF0000"/>
+                </a:solidFill>
+              </a:defRPr>
+            </a:pPr>
+            <a:r>
+              <a:t>• 僅提供部分編號與日期，缺乏產品型號、客戶資訊、製造日期及負責工程師等核心資訊。</a:t>
+            </a:r>
+          </a:p>
+          <a:p>
+            <a:pPr>
+              <a:defRPr sz="1300">
+                <a:solidFill>
+                  <a:srgbClr val="FF0000"/>
+                </a:solidFill>
+              </a:defRPr>
+            </a:pPr>
+            <a:r>
+              <a:t>• 有定義測試方法與失效狀態（Fail），但缺乏失效現象的具體描述、失效影響範圍及失效率統計。</a:t>
+            </a:r>
+          </a:p>
+          <a:p>
+            <a:pPr>
+              <a:defRPr sz="1300">
+                <a:solidFill>
+                  <a:srgbClr val="FF0000"/>
+                </a:solidFill>
+              </a:defRPr>
+            </a:pPr>
+            <a:r>
+              <a:t>• 僅呈現 Robot Log 與測試參數，完全沒有展示任何實質的失效分析手段（如 SEM, X-ray 或軟體 Debug 過程），流程極度不完整。</a:t>
+            </a:r>
+          </a:p>
+          <a:p>
+            <a:pPr>
+              <a:defRPr sz="1300">
+                <a:solidFill>
+                  <a:srgbClr val="FF0000"/>
+                </a:solidFill>
+              </a:defRPr>
+            </a:pPr>
+            <a:r>
+              <a:t>• 提供了測試 log 與參數表，但僅能證明「測試失敗了」，無法證明「為什麼失敗」。缺乏支持根因的物理或數據證據。</a:t>
+            </a:r>
+          </a:p>
+          <a:p>
+            <a:pPr>
+              <a:defRPr sz="1300">
+                <a:solidFill>
+                  <a:srgbClr val="FF0000"/>
+                </a:solidFill>
+              </a:defRPr>
+            </a:pPr>
+            <a:r>
+              <a:t>• 報告中完全沒有提及任何根因分析（Root Cause Analysis），亦無 5-Why 或邏輯推導過程。</a:t>
+            </a:r>
+          </a:p>
+          <a:p>
+            <a:pPr>
+              <a:defRPr sz="1300">
+                <a:solidFill>
+                  <a:srgbClr val="FF0000"/>
+                </a:solidFill>
+              </a:defRPr>
+            </a:pPr>
+            <a:r>
+              <a:t>• 報告中完全沒有提及任何改善對策或預防措施。</a:t>
+            </a:r>
+          </a:p>
+        </p:txBody>
+      </p:sp>
+    </p:spTree>
+  </p:cSld>
+  <p:clrMapOvr>
+    <a:masterClrMapping/>
+  </p:clrMapOvr>
+</p:sld>
+</file>
+
+<file path=ppt/slides/slide19.xml><?xml version="1.0" encoding="utf-8"?>
+<p:sld xmlns:a="http://schemas.openxmlformats.org/drawingml/2006/main" xmlns:p="http://schemas.openxmlformats.org/presentationml/2006/main" xmlns:r="http://schemas.openxmlformats.org/officeDocument/2006/relationships">
+  <p:cSld>
+    <p:spTree>
+      <p:nvGrpSpPr>
+        <p:cNvPr id="1" name=""/>
+        <p:cNvGrpSpPr/>
+        <p:nvPr/>
+      </p:nvGrpSpPr>
+      <p:grpSpPr/>
+      <p:sp>
+        <p:nvSpPr>
+          <p:cNvPr id="4" name="TextBox 3"/>
+          <p:cNvSpPr txBox="1"/>
+          <p:nvPr/>
+        </p:nvSpPr>
+        <p:spPr>
+          <a:xfrm>
+            <a:off x="457200" y="274320"/>
+            <a:ext cx="11277600" cy="914400"/>
+          </a:xfrm>
+          <a:prstGeom prst="rect">
+            <a:avLst/>
+          </a:prstGeom>
+          <a:noFill/>
+        </p:spPr>
+        <p:txBody>
+          <a:bodyPr wrap="square" lIns="45720" rIns="45720" tIns="18288" bIns="18288"/>
+          <a:lstStyle/>
+          <a:p>
+            <a:r>
+              <a:t>6 維度評分分析</a:t>
+            </a:r>
+          </a:p>
+        </p:txBody>
+      </p:sp>
+      <p:sp>
+        <p:nvSpPr>
+          <p:cNvPr id="5" name="TextBox 4"/>
+          <p:cNvSpPr txBox="1"/>
+          <p:nvPr/>
+        </p:nvSpPr>
+        <p:spPr>
+          <a:xfrm>
+            <a:off x="914400" y="1645920"/>
+            <a:ext cx="1371600" cy="640080"/>
+          </a:xfrm>
+          <a:prstGeom prst="rect">
+            <a:avLst/>
+          </a:prstGeom>
+          <a:noFill/>
+        </p:spPr>
+        <p:txBody>
+          <a:bodyPr wrap="square" anchor="ctr">
+            <a:spAutoFit/>
+          </a:bodyPr>
+          <a:lstStyle/>
+          <a:p>
+            <a:r>
+              <a:rPr sz="1000" b="1"/>
+              <a:t>基本資訊完整性</a:t>
+            </a:r>
+          </a:p>
+        </p:txBody>
+      </p:sp>
+      <p:sp>
+        <p:nvSpPr>
+          <p:cNvPr id="6" name="Rectangle 5"/>
+          <p:cNvSpPr/>
+          <p:nvPr/>
+        </p:nvSpPr>
+        <p:spPr>
+          <a:xfrm>
+            <a:off x="2286000" y="1691640"/>
+            <a:ext cx="9448800" cy="548640"/>
+          </a:xfrm>
+          <a:prstGeom prst="rect">
+            <a:avLst/>
+          </a:prstGeom>
+          <a:solidFill>
+            <a:srgbClr val="D9D9D9"/>
+          </a:solidFill>
+          <a:ln>
+            <a:noFill/>
+          </a:ln>
+        </p:spPr>
+        <p:style>
+          <a:lnRef idx="1">
+            <a:schemeClr val="accent1"/>
+          </a:lnRef>
+          <a:fillRef idx="3">
+            <a:schemeClr val="accent1"/>
+          </a:fillRef>
+          <a:effectRef idx="2">
+            <a:schemeClr val="accent1"/>
+          </a:effectRef>
+          <a:fontRef idx="minor">
+            <a:schemeClr val="lt1"/>
+          </a:fontRef>
+        </p:style>
+        <p:txBody>
+          <a:bodyPr rtlCol="0" anchor="ctr"/>
+          <a:lstStyle/>
+          <a:p>
+            <a:pPr algn="ctr"/>
+          </a:p>
+        </p:txBody>
+      </p:sp>
+      <p:sp>
+        <p:nvSpPr>
+          <p:cNvPr id="7" name="Rectangle 6"/>
+          <p:cNvSpPr/>
+          <p:nvPr/>
+        </p:nvSpPr>
+        <p:spPr>
+          <a:xfrm>
+            <a:off x="2286000" y="1691640"/>
+            <a:ext cx="3779520" cy="548640"/>
+          </a:xfrm>
+          <a:prstGeom prst="rect">
+            <a:avLst/>
+          </a:prstGeom>
+          <a:solidFill>
+            <a:srgbClr val="C00000"/>
+          </a:solidFill>
+          <a:ln>
+            <a:noFill/>
+          </a:ln>
+        </p:spPr>
+        <p:style>
+          <a:lnRef idx="1">
+            <a:schemeClr val="accent1"/>
+          </a:lnRef>
+          <a:fillRef idx="3">
+            <a:schemeClr val="accent1"/>
+          </a:fillRef>
+          <a:effectRef idx="2">
+            <a:schemeClr val="accent1"/>
+          </a:effectRef>
+          <a:fontRef idx="minor">
+            <a:schemeClr val="lt1"/>
+          </a:fontRef>
+        </p:style>
+        <p:txBody>
+          <a:bodyPr rtlCol="0" anchor="ctr"/>
+          <a:lstStyle/>
+          <a:p>
+            <a:pPr algn="ctr"/>
+          </a:p>
+        </p:txBody>
+      </p:sp>
+      <p:sp>
+        <p:nvSpPr>
+          <p:cNvPr id="8" name="TextBox 7"/>
+          <p:cNvSpPr txBox="1"/>
+          <p:nvPr/>
+        </p:nvSpPr>
+        <p:spPr>
+          <a:xfrm>
+            <a:off x="11780520" y="1645920"/>
+            <a:ext cx="411480" cy="640080"/>
+          </a:xfrm>
+          <a:prstGeom prst="rect">
+            <a:avLst/>
+          </a:prstGeom>
+          <a:noFill/>
+        </p:spPr>
+        <p:txBody>
+          <a:bodyPr wrap="none" anchor="ctr">
+            <a:spAutoFit/>
+          </a:bodyPr>
+          <a:lstStyle/>
+          <a:p>
+            <a:r>
+              <a:rPr sz="900" b="1">
+                <a:solidFill>
+                  <a:srgbClr val="C00000"/>
+                </a:solidFill>
+              </a:rPr>
+              <a:t>40/100</a:t>
+            </a:r>
+          </a:p>
+        </p:txBody>
+      </p:sp>
+      <p:sp>
+        <p:nvSpPr>
+          <p:cNvPr id="9" name="TextBox 8"/>
+          <p:cNvSpPr txBox="1"/>
+          <p:nvPr/>
+        </p:nvSpPr>
+        <p:spPr>
+          <a:xfrm>
+            <a:off x="914400" y="2286000"/>
+            <a:ext cx="1371600" cy="640080"/>
+          </a:xfrm>
+          <a:prstGeom prst="rect">
+            <a:avLst/>
+          </a:prstGeom>
+          <a:noFill/>
+        </p:spPr>
+        <p:txBody>
+          <a:bodyPr wrap="square" anchor="ctr">
+            <a:spAutoFit/>
+          </a:bodyPr>
+          <a:lstStyle/>
+          <a:p>
+            <a:r>
+              <a:rPr sz="1000" b="1"/>
+              <a:t>問題描述與定義</a:t>
+            </a:r>
+          </a:p>
+        </p:txBody>
+      </p:sp>
+      <p:sp>
+        <p:nvSpPr>
+          <p:cNvPr id="10" name="Rectangle 9"/>
+          <p:cNvSpPr/>
+          <p:nvPr/>
+        </p:nvSpPr>
+        <p:spPr>
+          <a:xfrm>
+            <a:off x="2286000" y="2331720"/>
+            <a:ext cx="9448800" cy="548640"/>
+          </a:xfrm>
+          <a:prstGeom prst="rect">
+            <a:avLst/>
+          </a:prstGeom>
+          <a:solidFill>
+            <a:srgbClr val="D9D9D9"/>
+          </a:solidFill>
+          <a:ln>
+            <a:noFill/>
+          </a:ln>
+        </p:spPr>
+        <p:style>
+          <a:lnRef idx="1">
+            <a:schemeClr val="accent1"/>
+          </a:lnRef>
+          <a:fillRef idx="3">
+            <a:schemeClr val="accent1"/>
+          </a:fillRef>
+          <a:effectRef idx="2">
+            <a:schemeClr val="accent1"/>
+          </a:effectRef>
+          <a:fontRef idx="minor">
+            <a:schemeClr val="lt1"/>
+          </a:fontRef>
+        </p:style>
+        <p:txBody>
+          <a:bodyPr rtlCol="0" anchor="ctr"/>
+          <a:lstStyle/>
+          <a:p>
+            <a:pPr algn="ctr"/>
+          </a:p>
+        </p:txBody>
+      </p:sp>
+      <p:sp>
+        <p:nvSpPr>
+          <p:cNvPr id="11" name="Rectangle 10"/>
+          <p:cNvSpPr/>
+          <p:nvPr/>
+        </p:nvSpPr>
+        <p:spPr>
+          <a:xfrm>
+            <a:off x="2286000" y="2331720"/>
+            <a:ext cx="4251960" cy="548640"/>
+          </a:xfrm>
+          <a:prstGeom prst="rect">
+            <a:avLst/>
+          </a:prstGeom>
+          <a:solidFill>
+            <a:srgbClr val="C00000"/>
+          </a:solidFill>
+          <a:ln>
+            <a:noFill/>
+          </a:ln>
+        </p:spPr>
+        <p:style>
+          <a:lnRef idx="1">
+            <a:schemeClr val="accent1"/>
+          </a:lnRef>
+          <a:fillRef idx="3">
+            <a:schemeClr val="accent1"/>
+          </a:fillRef>
+          <a:effectRef idx="2">
+            <a:schemeClr val="accent1"/>
+          </a:effectRef>
+          <a:fontRef idx="minor">
+            <a:schemeClr val="lt1"/>
+          </a:fontRef>
+        </p:style>
+        <p:txBody>
+          <a:bodyPr rtlCol="0" anchor="ctr"/>
+          <a:lstStyle/>
+          <a:p>
+            <a:pPr algn="ctr"/>
+          </a:p>
+        </p:txBody>
+      </p:sp>
+      <p:sp>
+        <p:nvSpPr>
+          <p:cNvPr id="12" name="TextBox 11"/>
+          <p:cNvSpPr txBox="1"/>
+          <p:nvPr/>
+        </p:nvSpPr>
+        <p:spPr>
+          <a:xfrm>
+            <a:off x="11780520" y="2286000"/>
+            <a:ext cx="411480" cy="640080"/>
+          </a:xfrm>
+          <a:prstGeom prst="rect">
+            <a:avLst/>
+          </a:prstGeom>
+          <a:noFill/>
+        </p:spPr>
+        <p:txBody>
+          <a:bodyPr wrap="none" anchor="ctr">
+            <a:spAutoFit/>
+          </a:bodyPr>
+          <a:lstStyle/>
+          <a:p>
+            <a:r>
+              <a:rPr sz="900" b="1">
+                <a:solidFill>
+                  <a:srgbClr val="C00000"/>
+                </a:solidFill>
+              </a:rPr>
+              <a:t>45/100</a:t>
+            </a:r>
+          </a:p>
+        </p:txBody>
+      </p:sp>
+      <p:sp>
+        <p:nvSpPr>
+          <p:cNvPr id="13" name="TextBox 12"/>
+          <p:cNvSpPr txBox="1"/>
+          <p:nvPr/>
+        </p:nvSpPr>
+        <p:spPr>
+          <a:xfrm>
+            <a:off x="914400" y="2926080"/>
+            <a:ext cx="1371600" cy="640080"/>
+          </a:xfrm>
+          <a:prstGeom prst="rect">
+            <a:avLst/>
+          </a:prstGeom>
+          <a:noFill/>
+        </p:spPr>
+        <p:txBody>
+          <a:bodyPr wrap="square" anchor="ctr">
+            <a:spAutoFit/>
+          </a:bodyPr>
+          <a:lstStyle/>
+          <a:p>
+            <a:r>
+              <a:rPr sz="1000" b="1"/>
+              <a:t>分析方法與流程</a:t>
+            </a:r>
+          </a:p>
+        </p:txBody>
+      </p:sp>
+      <p:sp>
+        <p:nvSpPr>
+          <p:cNvPr id="14" name="Rectangle 13"/>
+          <p:cNvSpPr/>
+          <p:nvPr/>
+        </p:nvSpPr>
+        <p:spPr>
+          <a:xfrm>
+            <a:off x="2286000" y="2971800"/>
+            <a:ext cx="9448800" cy="548640"/>
+          </a:xfrm>
+          <a:prstGeom prst="rect">
+            <a:avLst/>
+          </a:prstGeom>
+          <a:solidFill>
+            <a:srgbClr val="D9D9D9"/>
+          </a:solidFill>
+          <a:ln>
+            <a:noFill/>
+          </a:ln>
+        </p:spPr>
+        <p:style>
+          <a:lnRef idx="1">
+            <a:schemeClr val="accent1"/>
+          </a:lnRef>
+          <a:fillRef idx="3">
+            <a:schemeClr val="accent1"/>
+          </a:fillRef>
+          <a:effectRef idx="2">
+            <a:schemeClr val="accent1"/>
+          </a:effectRef>
+          <a:fontRef idx="minor">
+            <a:schemeClr val="lt1"/>
+          </a:fontRef>
+        </p:style>
+        <p:txBody>
+          <a:bodyPr rtlCol="0" anchor="ctr"/>
+          <a:lstStyle/>
+          <a:p>
+            <a:pPr algn="ctr"/>
+          </a:p>
+        </p:txBody>
+      </p:sp>
+      <p:sp>
+        <p:nvSpPr>
+          <p:cNvPr id="15" name="Rectangle 14"/>
+          <p:cNvSpPr/>
+          <p:nvPr/>
+        </p:nvSpPr>
+        <p:spPr>
+          <a:xfrm>
+            <a:off x="2286000" y="2971800"/>
+            <a:ext cx="2834640" cy="548640"/>
+          </a:xfrm>
+          <a:prstGeom prst="rect">
+            <a:avLst/>
+          </a:prstGeom>
+          <a:solidFill>
+            <a:srgbClr val="C00000"/>
+          </a:solidFill>
+          <a:ln>
+            <a:noFill/>
+          </a:ln>
+        </p:spPr>
+        <p:style>
+          <a:lnRef idx="1">
+            <a:schemeClr val="accent1"/>
+          </a:lnRef>
+          <a:fillRef idx="3">
+            <a:schemeClr val="accent1"/>
+          </a:fillRef>
+          <a:effectRef idx="2">
+            <a:schemeClr val="accent1"/>
+          </a:effectRef>
+          <a:fontRef idx="minor">
+            <a:schemeClr val="lt1"/>
+          </a:fontRef>
+        </p:style>
+        <p:txBody>
+          <a:bodyPr rtlCol="0" anchor="ctr"/>
+          <a:lstStyle/>
+          <a:p>
+            <a:pPr algn="ctr"/>
+          </a:p>
+        </p:txBody>
+      </p:sp>
+      <p:sp>
+        <p:nvSpPr>
+          <p:cNvPr id="16" name="TextBox 15"/>
+          <p:cNvSpPr txBox="1"/>
+          <p:nvPr/>
+        </p:nvSpPr>
+        <p:spPr>
+          <a:xfrm>
+            <a:off x="11780520" y="2926080"/>
+            <a:ext cx="411480" cy="640080"/>
+          </a:xfrm>
+          <a:prstGeom prst="rect">
+            <a:avLst/>
+          </a:prstGeom>
+          <a:noFill/>
+        </p:spPr>
+        <p:txBody>
+          <a:bodyPr wrap="none" anchor="ctr">
+            <a:spAutoFit/>
+          </a:bodyPr>
+          <a:lstStyle/>
+          <a:p>
+            <a:r>
+              <a:rPr sz="900" b="1">
+                <a:solidFill>
+                  <a:srgbClr val="C00000"/>
+                </a:solidFill>
+              </a:rPr>
+              <a:t>30/100</a:t>
+            </a:r>
+          </a:p>
+        </p:txBody>
+      </p:sp>
+      <p:sp>
+        <p:nvSpPr>
+          <p:cNvPr id="17" name="TextBox 16"/>
+          <p:cNvSpPr txBox="1"/>
+          <p:nvPr/>
+        </p:nvSpPr>
+        <p:spPr>
+          <a:xfrm>
+            <a:off x="914400" y="3566160"/>
+            <a:ext cx="1371600" cy="640080"/>
+          </a:xfrm>
+          <a:prstGeom prst="rect">
+            <a:avLst/>
+          </a:prstGeom>
+          <a:noFill/>
+        </p:spPr>
+        <p:txBody>
+          <a:bodyPr wrap="square" anchor="ctr">
+            <a:spAutoFit/>
+          </a:bodyPr>
+          <a:lstStyle/>
+          <a:p>
+            <a:r>
+              <a:rPr sz="1000" b="1"/>
+              <a:t>數據與證據支持</a:t>
+            </a:r>
+          </a:p>
+        </p:txBody>
+      </p:sp>
+      <p:sp>
+        <p:nvSpPr>
+          <p:cNvPr id="18" name="Rectangle 17"/>
+          <p:cNvSpPr/>
+          <p:nvPr/>
+        </p:nvSpPr>
+        <p:spPr>
+          <a:xfrm>
+            <a:off x="2286000" y="3611880"/>
+            <a:ext cx="9448800" cy="548640"/>
+          </a:xfrm>
+          <a:prstGeom prst="rect">
+            <a:avLst/>
+          </a:prstGeom>
+          <a:solidFill>
+            <a:srgbClr val="D9D9D9"/>
+          </a:solidFill>
+          <a:ln>
+            <a:noFill/>
+          </a:ln>
+        </p:spPr>
+        <p:style>
+          <a:lnRef idx="1">
+            <a:schemeClr val="accent1"/>
+          </a:lnRef>
+          <a:fillRef idx="3">
+            <a:schemeClr val="accent1"/>
+          </a:fillRef>
+          <a:effectRef idx="2">
+            <a:schemeClr val="accent1"/>
+          </a:effectRef>
+          <a:fontRef idx="minor">
+            <a:schemeClr val="lt1"/>
+          </a:fontRef>
+        </p:style>
+        <p:txBody>
+          <a:bodyPr rtlCol="0" anchor="ctr"/>
+          <a:lstStyle/>
+          <a:p>
+            <a:pPr algn="ctr"/>
+          </a:p>
+        </p:txBody>
+      </p:sp>
+      <p:sp>
+        <p:nvSpPr>
+          <p:cNvPr id="19" name="Rectangle 18"/>
+          <p:cNvSpPr/>
+          <p:nvPr/>
+        </p:nvSpPr>
+        <p:spPr>
+          <a:xfrm>
+            <a:off x="2286000" y="3611880"/>
+            <a:ext cx="4724400" cy="548640"/>
+          </a:xfrm>
+          <a:prstGeom prst="rect">
+            <a:avLst/>
+          </a:prstGeom>
+          <a:solidFill>
+            <a:srgbClr val="ED7D31"/>
+          </a:solidFill>
+          <a:ln>
+            <a:noFill/>
+          </a:ln>
+        </p:spPr>
+        <p:style>
+          <a:lnRef idx="1">
+            <a:schemeClr val="accent1"/>
+          </a:lnRef>
+          <a:fillRef idx="3">
+            <a:schemeClr val="accent1"/>
+          </a:fillRef>
+          <a:effectRef idx="2">
+            <a:schemeClr val="accent1"/>
+          </a:effectRef>
+          <a:fontRef idx="minor">
+            <a:schemeClr val="lt1"/>
+          </a:fontRef>
+        </p:style>
+        <p:txBody>
+          <a:bodyPr rtlCol="0" anchor="ctr"/>
+          <a:lstStyle/>
+          <a:p>
+            <a:pPr algn="ctr"/>
+          </a:p>
+        </p:txBody>
+      </p:sp>
+      <p:sp>
+        <p:nvSpPr>
+          <p:cNvPr id="20" name="TextBox 19"/>
+          <p:cNvSpPr txBox="1"/>
+          <p:nvPr/>
+        </p:nvSpPr>
+        <p:spPr>
+          <a:xfrm>
+            <a:off x="11780520" y="3566160"/>
+            <a:ext cx="411480" cy="640080"/>
+          </a:xfrm>
+          <a:prstGeom prst="rect">
+            <a:avLst/>
+          </a:prstGeom>
+          <a:noFill/>
+        </p:spPr>
+        <p:txBody>
+          <a:bodyPr wrap="none" anchor="ctr">
+            <a:spAutoFit/>
+          </a:bodyPr>
+          <a:lstStyle/>
+          <a:p>
+            <a:r>
+              <a:rPr sz="900" b="1">
+                <a:solidFill>
+                  <a:srgbClr val="ED7D31"/>
+                </a:solidFill>
+              </a:rPr>
+              <a:t>50/100</a:t>
+            </a:r>
+          </a:p>
+        </p:txBody>
+      </p:sp>
+      <p:sp>
+        <p:nvSpPr>
+          <p:cNvPr id="21" name="TextBox 20"/>
+          <p:cNvSpPr txBox="1"/>
+          <p:nvPr/>
+        </p:nvSpPr>
+        <p:spPr>
+          <a:xfrm>
+            <a:off x="914400" y="4206240"/>
+            <a:ext cx="1371600" cy="640080"/>
+          </a:xfrm>
+          <a:prstGeom prst="rect">
+            <a:avLst/>
+          </a:prstGeom>
+          <a:noFill/>
+        </p:spPr>
+        <p:txBody>
+          <a:bodyPr wrap="square" anchor="ctr">
+            <a:spAutoFit/>
+          </a:bodyPr>
+          <a:lstStyle/>
+          <a:p>
+            <a:r>
+              <a:rPr sz="1000" b="1"/>
+              <a:t>根因分析</a:t>
+            </a:r>
+          </a:p>
+        </p:txBody>
+      </p:sp>
+      <p:sp>
+        <p:nvSpPr>
+          <p:cNvPr id="22" name="Rectangle 21"/>
+          <p:cNvSpPr/>
+          <p:nvPr/>
+        </p:nvSpPr>
+        <p:spPr>
+          <a:xfrm>
+            <a:off x="2286000" y="4251960"/>
+            <a:ext cx="9448800" cy="548640"/>
+          </a:xfrm>
+          <a:prstGeom prst="rect">
+            <a:avLst/>
+          </a:prstGeom>
+          <a:solidFill>
+            <a:srgbClr val="D9D9D9"/>
+          </a:solidFill>
+          <a:ln>
+            <a:noFill/>
+          </a:ln>
+        </p:spPr>
+        <p:style>
+          <a:lnRef idx="1">
+            <a:schemeClr val="accent1"/>
+          </a:lnRef>
+          <a:fillRef idx="3">
+            <a:schemeClr val="accent1"/>
+          </a:fillRef>
+          <a:effectRef idx="2">
+            <a:schemeClr val="accent1"/>
+          </a:effectRef>
+          <a:fontRef idx="minor">
+            <a:schemeClr val="lt1"/>
+          </a:fontRef>
+        </p:style>
+        <p:txBody>
+          <a:bodyPr rtlCol="0" anchor="ctr"/>
+          <a:lstStyle/>
+          <a:p>
+            <a:pPr algn="ctr"/>
+          </a:p>
+        </p:txBody>
+      </p:sp>
+      <p:sp>
+        <p:nvSpPr>
+          <p:cNvPr id="23" name="TextBox 22"/>
+          <p:cNvSpPr txBox="1"/>
+          <p:nvPr/>
+        </p:nvSpPr>
+        <p:spPr>
+          <a:xfrm>
+            <a:off x="11780520" y="4206240"/>
+            <a:ext cx="411480" cy="640080"/>
+          </a:xfrm>
+          <a:prstGeom prst="rect">
+            <a:avLst/>
+          </a:prstGeom>
+          <a:noFill/>
+        </p:spPr>
+        <p:txBody>
+          <a:bodyPr wrap="none" anchor="ctr">
+            <a:spAutoFit/>
+          </a:bodyPr>
+          <a:lstStyle/>
+          <a:p>
+            <a:r>
+              <a:rPr sz="900" b="1">
+                <a:solidFill>
+                  <a:srgbClr val="C00000"/>
+                </a:solidFill>
+              </a:rPr>
+              <a:t>0/100</a:t>
+            </a:r>
+          </a:p>
+        </p:txBody>
+      </p:sp>
+      <p:sp>
+        <p:nvSpPr>
+          <p:cNvPr id="24" name="TextBox 23"/>
+          <p:cNvSpPr txBox="1"/>
+          <p:nvPr/>
+        </p:nvSpPr>
+        <p:spPr>
+          <a:xfrm>
+            <a:off x="914400" y="4846320"/>
+            <a:ext cx="1371600" cy="640080"/>
+          </a:xfrm>
+          <a:prstGeom prst="rect">
+            <a:avLst/>
+          </a:prstGeom>
+          <a:noFill/>
+        </p:spPr>
+        <p:txBody>
+          <a:bodyPr wrap="square" anchor="ctr">
+            <a:spAutoFit/>
+          </a:bodyPr>
+          <a:lstStyle/>
+          <a:p>
+            <a:r>
+              <a:rPr sz="1000" b="1"/>
+              <a:t>改善對策</a:t>
+            </a:r>
+          </a:p>
+        </p:txBody>
+      </p:sp>
+      <p:sp>
+        <p:nvSpPr>
+          <p:cNvPr id="25" name="Rectangle 24"/>
+          <p:cNvSpPr/>
+          <p:nvPr/>
+        </p:nvSpPr>
+        <p:spPr>
+          <a:xfrm>
+            <a:off x="2286000" y="4892040"/>
+            <a:ext cx="9448800" cy="548640"/>
+          </a:xfrm>
+          <a:prstGeom prst="rect">
+            <a:avLst/>
+          </a:prstGeom>
+          <a:solidFill>
+            <a:srgbClr val="D9D9D9"/>
+          </a:solidFill>
+          <a:ln>
+            <a:noFill/>
+          </a:ln>
+        </p:spPr>
+        <p:style>
+          <a:lnRef idx="1">
+            <a:schemeClr val="accent1"/>
+          </a:lnRef>
+          <a:fillRef idx="3">
+            <a:schemeClr val="accent1"/>
+          </a:fillRef>
+          <a:effectRef idx="2">
+            <a:schemeClr val="accent1"/>
+          </a:effectRef>
+          <a:fontRef idx="minor">
+            <a:schemeClr val="lt1"/>
+          </a:fontRef>
+        </p:style>
+        <p:txBody>
+          <a:bodyPr rtlCol="0" anchor="ctr"/>
+          <a:lstStyle/>
+          <a:p>
+            <a:pPr algn="ctr"/>
+          </a:p>
+        </p:txBody>
+      </p:sp>
+      <p:sp>
+        <p:nvSpPr>
+          <p:cNvPr id="26" name="TextBox 25"/>
+          <p:cNvSpPr txBox="1"/>
+          <p:nvPr/>
+        </p:nvSpPr>
+        <p:spPr>
+          <a:xfrm>
+            <a:off x="11780520" y="4846320"/>
+            <a:ext cx="411480" cy="640080"/>
+          </a:xfrm>
+          <a:prstGeom prst="rect">
+            <a:avLst/>
+          </a:prstGeom>
+          <a:noFill/>
+        </p:spPr>
+        <p:txBody>
+          <a:bodyPr wrap="none" anchor="ctr">
+            <a:spAutoFit/>
+          </a:bodyPr>
+          <a:lstStyle/>
+          <a:p>
+            <a:r>
+              <a:rPr sz="900" b="1">
+                <a:solidFill>
+                  <a:srgbClr val="C00000"/>
+                </a:solidFill>
+              </a:rPr>
+              <a:t>0/100</a:t>
+            </a:r>
+          </a:p>
+        </p:txBody>
+      </p:sp>
+    </p:spTree>
+  </p:cSld>
+  <p:clrMapOvr>
+    <a:masterClrMapping/>
+  </p:clrMapOvr>
+</p:sld>
+</file>
+
 <file path=ppt/slides/slide2.xml><?xml version="1.0" encoding="utf-8"?>
 <p:sld xmlns:a="http://schemas.openxmlformats.org/drawingml/2006/main" xmlns:r="http://schemas.openxmlformats.org/officeDocument/2006/relationships" xmlns:p="http://schemas.openxmlformats.org/presentationml/2006/main">
   <p:cSld>
@@ -14117,961 +14985,6 @@
           <a:p>
             <a:pPr algn="ctr"/>
             <a:endParaRPr lang="zh-TW" altLang="en-US"/>
-          </a:p>
-        </p:txBody>
-      </p:sp>
-      <p:sp>
-        <p:nvSpPr>
-          <p:cNvPr id="10" name="TextBox 9"/>
-          <p:cNvSpPr txBox="1"/>
-          <p:nvPr/>
-        </p:nvSpPr>
-        <p:spPr>
-          <a:xfrm>
-            <a:off x="914400" y="4754880"/>
-            <a:ext cx="1371600" cy="259080"/>
-          </a:xfrm>
-          <a:prstGeom prst="rect">
-            <a:avLst/>
-          </a:prstGeom>
-          <a:noFill/>
-        </p:spPr>
-        <p:txBody>
-          <a:bodyPr wrap="square" anchor="ctr">
-            <a:spAutoFit/>
-          </a:bodyPr>
-          <a:lstStyle/>
-          <a:p>
-            <a:r>
-              <a:rPr sz="1000" b="1"/>
-              <a:t>基本資訊完整性</a:t>
-            </a:r>
-          </a:p>
-        </p:txBody>
-      </p:sp>
-      <p:sp>
-        <p:nvSpPr>
-          <p:cNvPr id="11" name="Rectangle 10"/>
-          <p:cNvSpPr/>
-          <p:nvPr/>
-        </p:nvSpPr>
-        <p:spPr>
-          <a:xfrm>
-            <a:off x="2286000" y="4800600"/>
-            <a:ext cx="9448800" cy="167640"/>
-          </a:xfrm>
-          <a:prstGeom prst="rect">
-            <a:avLst/>
-          </a:prstGeom>
-          <a:solidFill>
-            <a:srgbClr val="D9D9D9"/>
-          </a:solidFill>
-          <a:ln>
-            <a:noFill/>
-          </a:ln>
-        </p:spPr>
-        <p:style>
-          <a:lnRef idx="1">
-            <a:schemeClr val="accent1"/>
-          </a:lnRef>
-          <a:fillRef idx="3">
-            <a:schemeClr val="accent1"/>
-          </a:fillRef>
-          <a:effectRef idx="2">
-            <a:schemeClr val="accent1"/>
-          </a:effectRef>
-          <a:fontRef idx="minor">
-            <a:schemeClr val="lt1"/>
-          </a:fontRef>
-        </p:style>
-        <p:txBody>
-          <a:bodyPr rtlCol="0" anchor="ctr"/>
-          <a:lstStyle/>
-          <a:p>
-            <a:pPr algn="ctr"/>
-          </a:p>
-        </p:txBody>
-      </p:sp>
-      <p:sp>
-        <p:nvSpPr>
-          <p:cNvPr id="12" name="Rectangle 11"/>
-          <p:cNvSpPr/>
-          <p:nvPr/>
-        </p:nvSpPr>
-        <p:spPr>
-          <a:xfrm>
-            <a:off x="2286000" y="4800600"/>
-            <a:ext cx="3779520" cy="167640"/>
-          </a:xfrm>
-          <a:prstGeom prst="rect">
-            <a:avLst/>
-          </a:prstGeom>
-          <a:solidFill>
-            <a:srgbClr val="C00000"/>
-          </a:solidFill>
-          <a:ln>
-            <a:noFill/>
-          </a:ln>
-        </p:spPr>
-        <p:style>
-          <a:lnRef idx="1">
-            <a:schemeClr val="accent1"/>
-          </a:lnRef>
-          <a:fillRef idx="3">
-            <a:schemeClr val="accent1"/>
-          </a:fillRef>
-          <a:effectRef idx="2">
-            <a:schemeClr val="accent1"/>
-          </a:effectRef>
-          <a:fontRef idx="minor">
-            <a:schemeClr val="lt1"/>
-          </a:fontRef>
-        </p:style>
-        <p:txBody>
-          <a:bodyPr rtlCol="0" anchor="ctr"/>
-          <a:lstStyle/>
-          <a:p>
-            <a:pPr algn="ctr"/>
-          </a:p>
-        </p:txBody>
-      </p:sp>
-      <p:sp>
-        <p:nvSpPr>
-          <p:cNvPr id="13" name="TextBox 12"/>
-          <p:cNvSpPr txBox="1"/>
-          <p:nvPr/>
-        </p:nvSpPr>
-        <p:spPr>
-          <a:xfrm>
-            <a:off x="11780520" y="4754880"/>
-            <a:ext cx="411480" cy="259080"/>
-          </a:xfrm>
-          <a:prstGeom prst="rect">
-            <a:avLst/>
-          </a:prstGeom>
-          <a:noFill/>
-        </p:spPr>
-        <p:txBody>
-          <a:bodyPr wrap="none" anchor="ctr">
-            <a:spAutoFit/>
-          </a:bodyPr>
-          <a:lstStyle/>
-          <a:p>
-            <a:r>
-              <a:rPr sz="900" b="1">
-                <a:solidFill>
-                  <a:srgbClr val="C00000"/>
-                </a:solidFill>
-              </a:rPr>
-              <a:t>40/100</a:t>
-            </a:r>
-          </a:p>
-        </p:txBody>
-      </p:sp>
-      <p:sp>
-        <p:nvSpPr>
-          <p:cNvPr id="14" name="TextBox 13"/>
-          <p:cNvSpPr txBox="1"/>
-          <p:nvPr/>
-        </p:nvSpPr>
-        <p:spPr>
-          <a:xfrm>
-            <a:off x="914400" y="5013960"/>
-            <a:ext cx="1371600" cy="259080"/>
-          </a:xfrm>
-          <a:prstGeom prst="rect">
-            <a:avLst/>
-          </a:prstGeom>
-          <a:noFill/>
-        </p:spPr>
-        <p:txBody>
-          <a:bodyPr wrap="square" anchor="ctr">
-            <a:spAutoFit/>
-          </a:bodyPr>
-          <a:lstStyle/>
-          <a:p>
-            <a:r>
-              <a:rPr sz="1000" b="1"/>
-              <a:t>問題描述與定義</a:t>
-            </a:r>
-          </a:p>
-        </p:txBody>
-      </p:sp>
-      <p:sp>
-        <p:nvSpPr>
-          <p:cNvPr id="15" name="Rectangle 14"/>
-          <p:cNvSpPr/>
-          <p:nvPr/>
-        </p:nvSpPr>
-        <p:spPr>
-          <a:xfrm>
-            <a:off x="2286000" y="5059680"/>
-            <a:ext cx="9448800" cy="167640"/>
-          </a:xfrm>
-          <a:prstGeom prst="rect">
-            <a:avLst/>
-          </a:prstGeom>
-          <a:solidFill>
-            <a:srgbClr val="D9D9D9"/>
-          </a:solidFill>
-          <a:ln>
-            <a:noFill/>
-          </a:ln>
-        </p:spPr>
-        <p:style>
-          <a:lnRef idx="1">
-            <a:schemeClr val="accent1"/>
-          </a:lnRef>
-          <a:fillRef idx="3">
-            <a:schemeClr val="accent1"/>
-          </a:fillRef>
-          <a:effectRef idx="2">
-            <a:schemeClr val="accent1"/>
-          </a:effectRef>
-          <a:fontRef idx="minor">
-            <a:schemeClr val="lt1"/>
-          </a:fontRef>
-        </p:style>
-        <p:txBody>
-          <a:bodyPr rtlCol="0" anchor="ctr"/>
-          <a:lstStyle/>
-          <a:p>
-            <a:pPr algn="ctr"/>
-          </a:p>
-        </p:txBody>
-      </p:sp>
-      <p:sp>
-        <p:nvSpPr>
-          <p:cNvPr id="16" name="Rectangle 15"/>
-          <p:cNvSpPr/>
-          <p:nvPr/>
-        </p:nvSpPr>
-        <p:spPr>
-          <a:xfrm>
-            <a:off x="2286000" y="5059680"/>
-            <a:ext cx="4251960" cy="167640"/>
-          </a:xfrm>
-          <a:prstGeom prst="rect">
-            <a:avLst/>
-          </a:prstGeom>
-          <a:solidFill>
-            <a:srgbClr val="C00000"/>
-          </a:solidFill>
-          <a:ln>
-            <a:noFill/>
-          </a:ln>
-        </p:spPr>
-        <p:style>
-          <a:lnRef idx="1">
-            <a:schemeClr val="accent1"/>
-          </a:lnRef>
-          <a:fillRef idx="3">
-            <a:schemeClr val="accent1"/>
-          </a:fillRef>
-          <a:effectRef idx="2">
-            <a:schemeClr val="accent1"/>
-          </a:effectRef>
-          <a:fontRef idx="minor">
-            <a:schemeClr val="lt1"/>
-          </a:fontRef>
-        </p:style>
-        <p:txBody>
-          <a:bodyPr rtlCol="0" anchor="ctr"/>
-          <a:lstStyle/>
-          <a:p>
-            <a:pPr algn="ctr"/>
-          </a:p>
-        </p:txBody>
-      </p:sp>
-      <p:sp>
-        <p:nvSpPr>
-          <p:cNvPr id="17" name="TextBox 16"/>
-          <p:cNvSpPr txBox="1"/>
-          <p:nvPr/>
-        </p:nvSpPr>
-        <p:spPr>
-          <a:xfrm>
-            <a:off x="11780520" y="5013960"/>
-            <a:ext cx="411480" cy="259080"/>
-          </a:xfrm>
-          <a:prstGeom prst="rect">
-            <a:avLst/>
-          </a:prstGeom>
-          <a:noFill/>
-        </p:spPr>
-        <p:txBody>
-          <a:bodyPr wrap="none" anchor="ctr">
-            <a:spAutoFit/>
-          </a:bodyPr>
-          <a:lstStyle/>
-          <a:p>
-            <a:r>
-              <a:rPr sz="900" b="1">
-                <a:solidFill>
-                  <a:srgbClr val="C00000"/>
-                </a:solidFill>
-              </a:rPr>
-              <a:t>45/100</a:t>
-            </a:r>
-          </a:p>
-        </p:txBody>
-      </p:sp>
-      <p:sp>
-        <p:nvSpPr>
-          <p:cNvPr id="18" name="TextBox 17"/>
-          <p:cNvSpPr txBox="1"/>
-          <p:nvPr/>
-        </p:nvSpPr>
-        <p:spPr>
-          <a:xfrm>
-            <a:off x="914400" y="5273040"/>
-            <a:ext cx="1371600" cy="259080"/>
-          </a:xfrm>
-          <a:prstGeom prst="rect">
-            <a:avLst/>
-          </a:prstGeom>
-          <a:noFill/>
-        </p:spPr>
-        <p:txBody>
-          <a:bodyPr wrap="square" anchor="ctr">
-            <a:spAutoFit/>
-          </a:bodyPr>
-          <a:lstStyle/>
-          <a:p>
-            <a:r>
-              <a:rPr sz="1000" b="1"/>
-              <a:t>分析方法與流程</a:t>
-            </a:r>
-          </a:p>
-        </p:txBody>
-      </p:sp>
-      <p:sp>
-        <p:nvSpPr>
-          <p:cNvPr id="19" name="Rectangle 18"/>
-          <p:cNvSpPr/>
-          <p:nvPr/>
-        </p:nvSpPr>
-        <p:spPr>
-          <a:xfrm>
-            <a:off x="2286000" y="5318760"/>
-            <a:ext cx="9448800" cy="167640"/>
-          </a:xfrm>
-          <a:prstGeom prst="rect">
-            <a:avLst/>
-          </a:prstGeom>
-          <a:solidFill>
-            <a:srgbClr val="D9D9D9"/>
-          </a:solidFill>
-          <a:ln>
-            <a:noFill/>
-          </a:ln>
-        </p:spPr>
-        <p:style>
-          <a:lnRef idx="1">
-            <a:schemeClr val="accent1"/>
-          </a:lnRef>
-          <a:fillRef idx="3">
-            <a:schemeClr val="accent1"/>
-          </a:fillRef>
-          <a:effectRef idx="2">
-            <a:schemeClr val="accent1"/>
-          </a:effectRef>
-          <a:fontRef idx="minor">
-            <a:schemeClr val="lt1"/>
-          </a:fontRef>
-        </p:style>
-        <p:txBody>
-          <a:bodyPr rtlCol="0" anchor="ctr"/>
-          <a:lstStyle/>
-          <a:p>
-            <a:pPr algn="ctr"/>
-          </a:p>
-        </p:txBody>
-      </p:sp>
-      <p:sp>
-        <p:nvSpPr>
-          <p:cNvPr id="20" name="Rectangle 19"/>
-          <p:cNvSpPr/>
-          <p:nvPr/>
-        </p:nvSpPr>
-        <p:spPr>
-          <a:xfrm>
-            <a:off x="2286000" y="5318760"/>
-            <a:ext cx="2834640" cy="167640"/>
-          </a:xfrm>
-          <a:prstGeom prst="rect">
-            <a:avLst/>
-          </a:prstGeom>
-          <a:solidFill>
-            <a:srgbClr val="C00000"/>
-          </a:solidFill>
-          <a:ln>
-            <a:noFill/>
-          </a:ln>
-        </p:spPr>
-        <p:style>
-          <a:lnRef idx="1">
-            <a:schemeClr val="accent1"/>
-          </a:lnRef>
-          <a:fillRef idx="3">
-            <a:schemeClr val="accent1"/>
-          </a:fillRef>
-          <a:effectRef idx="2">
-            <a:schemeClr val="accent1"/>
-          </a:effectRef>
-          <a:fontRef idx="minor">
-            <a:schemeClr val="lt1"/>
-          </a:fontRef>
-        </p:style>
-        <p:txBody>
-          <a:bodyPr rtlCol="0" anchor="ctr"/>
-          <a:lstStyle/>
-          <a:p>
-            <a:pPr algn="ctr"/>
-          </a:p>
-        </p:txBody>
-      </p:sp>
-      <p:sp>
-        <p:nvSpPr>
-          <p:cNvPr id="21" name="TextBox 20"/>
-          <p:cNvSpPr txBox="1"/>
-          <p:nvPr/>
-        </p:nvSpPr>
-        <p:spPr>
-          <a:xfrm>
-            <a:off x="11780520" y="5273040"/>
-            <a:ext cx="411480" cy="259080"/>
-          </a:xfrm>
-          <a:prstGeom prst="rect">
-            <a:avLst/>
-          </a:prstGeom>
-          <a:noFill/>
-        </p:spPr>
-        <p:txBody>
-          <a:bodyPr wrap="none" anchor="ctr">
-            <a:spAutoFit/>
-          </a:bodyPr>
-          <a:lstStyle/>
-          <a:p>
-            <a:r>
-              <a:rPr sz="900" b="1">
-                <a:solidFill>
-                  <a:srgbClr val="C00000"/>
-                </a:solidFill>
-              </a:rPr>
-              <a:t>30/100</a:t>
-            </a:r>
-          </a:p>
-        </p:txBody>
-      </p:sp>
-      <p:sp>
-        <p:nvSpPr>
-          <p:cNvPr id="22" name="TextBox 21"/>
-          <p:cNvSpPr txBox="1"/>
-          <p:nvPr/>
-        </p:nvSpPr>
-        <p:spPr>
-          <a:xfrm>
-            <a:off x="914400" y="5532120"/>
-            <a:ext cx="1371600" cy="259080"/>
-          </a:xfrm>
-          <a:prstGeom prst="rect">
-            <a:avLst/>
-          </a:prstGeom>
-          <a:noFill/>
-        </p:spPr>
-        <p:txBody>
-          <a:bodyPr wrap="square" anchor="ctr">
-            <a:spAutoFit/>
-          </a:bodyPr>
-          <a:lstStyle/>
-          <a:p>
-            <a:r>
-              <a:rPr sz="1000" b="1"/>
-              <a:t>數據與證據支持</a:t>
-            </a:r>
-          </a:p>
-        </p:txBody>
-      </p:sp>
-      <p:sp>
-        <p:nvSpPr>
-          <p:cNvPr id="23" name="Rectangle 22"/>
-          <p:cNvSpPr/>
-          <p:nvPr/>
-        </p:nvSpPr>
-        <p:spPr>
-          <a:xfrm>
-            <a:off x="2286000" y="5577840"/>
-            <a:ext cx="9448800" cy="167640"/>
-          </a:xfrm>
-          <a:prstGeom prst="rect">
-            <a:avLst/>
-          </a:prstGeom>
-          <a:solidFill>
-            <a:srgbClr val="D9D9D9"/>
-          </a:solidFill>
-          <a:ln>
-            <a:noFill/>
-          </a:ln>
-        </p:spPr>
-        <p:style>
-          <a:lnRef idx="1">
-            <a:schemeClr val="accent1"/>
-          </a:lnRef>
-          <a:fillRef idx="3">
-            <a:schemeClr val="accent1"/>
-          </a:fillRef>
-          <a:effectRef idx="2">
-            <a:schemeClr val="accent1"/>
-          </a:effectRef>
-          <a:fontRef idx="minor">
-            <a:schemeClr val="lt1"/>
-          </a:fontRef>
-        </p:style>
-        <p:txBody>
-          <a:bodyPr rtlCol="0" anchor="ctr"/>
-          <a:lstStyle/>
-          <a:p>
-            <a:pPr algn="ctr"/>
-          </a:p>
-        </p:txBody>
-      </p:sp>
-      <p:sp>
-        <p:nvSpPr>
-          <p:cNvPr id="24" name="Rectangle 23"/>
-          <p:cNvSpPr/>
-          <p:nvPr/>
-        </p:nvSpPr>
-        <p:spPr>
-          <a:xfrm>
-            <a:off x="2286000" y="5577840"/>
-            <a:ext cx="4724400" cy="167640"/>
-          </a:xfrm>
-          <a:prstGeom prst="rect">
-            <a:avLst/>
-          </a:prstGeom>
-          <a:solidFill>
-            <a:srgbClr val="ED7D31"/>
-          </a:solidFill>
-          <a:ln>
-            <a:noFill/>
-          </a:ln>
-        </p:spPr>
-        <p:style>
-          <a:lnRef idx="1">
-            <a:schemeClr val="accent1"/>
-          </a:lnRef>
-          <a:fillRef idx="3">
-            <a:schemeClr val="accent1"/>
-          </a:fillRef>
-          <a:effectRef idx="2">
-            <a:schemeClr val="accent1"/>
-          </a:effectRef>
-          <a:fontRef idx="minor">
-            <a:schemeClr val="lt1"/>
-          </a:fontRef>
-        </p:style>
-        <p:txBody>
-          <a:bodyPr rtlCol="0" anchor="ctr"/>
-          <a:lstStyle/>
-          <a:p>
-            <a:pPr algn="ctr"/>
-          </a:p>
-        </p:txBody>
-      </p:sp>
-      <p:sp>
-        <p:nvSpPr>
-          <p:cNvPr id="25" name="TextBox 24"/>
-          <p:cNvSpPr txBox="1"/>
-          <p:nvPr/>
-        </p:nvSpPr>
-        <p:spPr>
-          <a:xfrm>
-            <a:off x="11780520" y="5532120"/>
-            <a:ext cx="411480" cy="259080"/>
-          </a:xfrm>
-          <a:prstGeom prst="rect">
-            <a:avLst/>
-          </a:prstGeom>
-          <a:noFill/>
-        </p:spPr>
-        <p:txBody>
-          <a:bodyPr wrap="none" anchor="ctr">
-            <a:spAutoFit/>
-          </a:bodyPr>
-          <a:lstStyle/>
-          <a:p>
-            <a:r>
-              <a:rPr sz="900" b="1">
-                <a:solidFill>
-                  <a:srgbClr val="ED7D31"/>
-                </a:solidFill>
-              </a:rPr>
-              <a:t>50/100</a:t>
-            </a:r>
-          </a:p>
-        </p:txBody>
-      </p:sp>
-      <p:sp>
-        <p:nvSpPr>
-          <p:cNvPr id="26" name="TextBox 25"/>
-          <p:cNvSpPr txBox="1"/>
-          <p:nvPr/>
-        </p:nvSpPr>
-        <p:spPr>
-          <a:xfrm>
-            <a:off x="914400" y="5791200"/>
-            <a:ext cx="1371600" cy="259080"/>
-          </a:xfrm>
-          <a:prstGeom prst="rect">
-            <a:avLst/>
-          </a:prstGeom>
-          <a:noFill/>
-        </p:spPr>
-        <p:txBody>
-          <a:bodyPr wrap="square" anchor="ctr">
-            <a:spAutoFit/>
-          </a:bodyPr>
-          <a:lstStyle/>
-          <a:p>
-            <a:r>
-              <a:rPr sz="1000" b="1"/>
-              <a:t>根因分析</a:t>
-            </a:r>
-          </a:p>
-        </p:txBody>
-      </p:sp>
-      <p:sp>
-        <p:nvSpPr>
-          <p:cNvPr id="27" name="Rectangle 26"/>
-          <p:cNvSpPr/>
-          <p:nvPr/>
-        </p:nvSpPr>
-        <p:spPr>
-          <a:xfrm>
-            <a:off x="2286000" y="5836920"/>
-            <a:ext cx="9448800" cy="167640"/>
-          </a:xfrm>
-          <a:prstGeom prst="rect">
-            <a:avLst/>
-          </a:prstGeom>
-          <a:solidFill>
-            <a:srgbClr val="D9D9D9"/>
-          </a:solidFill>
-          <a:ln>
-            <a:noFill/>
-          </a:ln>
-        </p:spPr>
-        <p:style>
-          <a:lnRef idx="1">
-            <a:schemeClr val="accent1"/>
-          </a:lnRef>
-          <a:fillRef idx="3">
-            <a:schemeClr val="accent1"/>
-          </a:fillRef>
-          <a:effectRef idx="2">
-            <a:schemeClr val="accent1"/>
-          </a:effectRef>
-          <a:fontRef idx="minor">
-            <a:schemeClr val="lt1"/>
-          </a:fontRef>
-        </p:style>
-        <p:txBody>
-          <a:bodyPr rtlCol="0" anchor="ctr"/>
-          <a:lstStyle/>
-          <a:p>
-            <a:pPr algn="ctr"/>
-          </a:p>
-        </p:txBody>
-      </p:sp>
-      <p:sp>
-        <p:nvSpPr>
-          <p:cNvPr id="28" name="TextBox 27"/>
-          <p:cNvSpPr txBox="1"/>
-          <p:nvPr/>
-        </p:nvSpPr>
-        <p:spPr>
-          <a:xfrm>
-            <a:off x="11780520" y="5791200"/>
-            <a:ext cx="411480" cy="259080"/>
-          </a:xfrm>
-          <a:prstGeom prst="rect">
-            <a:avLst/>
-          </a:prstGeom>
-          <a:noFill/>
-        </p:spPr>
-        <p:txBody>
-          <a:bodyPr wrap="none" anchor="ctr">
-            <a:spAutoFit/>
-          </a:bodyPr>
-          <a:lstStyle/>
-          <a:p>
-            <a:r>
-              <a:rPr sz="900" b="1">
-                <a:solidFill>
-                  <a:srgbClr val="C00000"/>
-                </a:solidFill>
-              </a:rPr>
-              <a:t>0/100</a:t>
-            </a:r>
-          </a:p>
-        </p:txBody>
-      </p:sp>
-      <p:sp>
-        <p:nvSpPr>
-          <p:cNvPr id="29" name="TextBox 28"/>
-          <p:cNvSpPr txBox="1"/>
-          <p:nvPr/>
-        </p:nvSpPr>
-        <p:spPr>
-          <a:xfrm>
-            <a:off x="914400" y="6050280"/>
-            <a:ext cx="1371600" cy="259080"/>
-          </a:xfrm>
-          <a:prstGeom prst="rect">
-            <a:avLst/>
-          </a:prstGeom>
-          <a:noFill/>
-        </p:spPr>
-        <p:txBody>
-          <a:bodyPr wrap="square" anchor="ctr">
-            <a:spAutoFit/>
-          </a:bodyPr>
-          <a:lstStyle/>
-          <a:p>
-            <a:r>
-              <a:rPr sz="1000" b="1"/>
-              <a:t>改善對策</a:t>
-            </a:r>
-          </a:p>
-        </p:txBody>
-      </p:sp>
-      <p:sp>
-        <p:nvSpPr>
-          <p:cNvPr id="30" name="Rectangle 29"/>
-          <p:cNvSpPr/>
-          <p:nvPr/>
-        </p:nvSpPr>
-        <p:spPr>
-          <a:xfrm>
-            <a:off x="2286000" y="6096000"/>
-            <a:ext cx="9448800" cy="167640"/>
-          </a:xfrm>
-          <a:prstGeom prst="rect">
-            <a:avLst/>
-          </a:prstGeom>
-          <a:solidFill>
-            <a:srgbClr val="D9D9D9"/>
-          </a:solidFill>
-          <a:ln>
-            <a:noFill/>
-          </a:ln>
-        </p:spPr>
-        <p:style>
-          <a:lnRef idx="1">
-            <a:schemeClr val="accent1"/>
-          </a:lnRef>
-          <a:fillRef idx="3">
-            <a:schemeClr val="accent1"/>
-          </a:fillRef>
-          <a:effectRef idx="2">
-            <a:schemeClr val="accent1"/>
-          </a:effectRef>
-          <a:fontRef idx="minor">
-            <a:schemeClr val="lt1"/>
-          </a:fontRef>
-        </p:style>
-        <p:txBody>
-          <a:bodyPr rtlCol="0" anchor="ctr"/>
-          <a:lstStyle/>
-          <a:p>
-            <a:pPr algn="ctr"/>
-          </a:p>
-        </p:txBody>
-      </p:sp>
-      <p:sp>
-        <p:nvSpPr>
-          <p:cNvPr id="31" name="TextBox 30"/>
-          <p:cNvSpPr txBox="1"/>
-          <p:nvPr/>
-        </p:nvSpPr>
-        <p:spPr>
-          <a:xfrm>
-            <a:off x="11780520" y="6050280"/>
-            <a:ext cx="411480" cy="259080"/>
-          </a:xfrm>
-          <a:prstGeom prst="rect">
-            <a:avLst/>
-          </a:prstGeom>
-          <a:noFill/>
-        </p:spPr>
-        <p:txBody>
-          <a:bodyPr wrap="none" anchor="ctr">
-            <a:spAutoFit/>
-          </a:bodyPr>
-          <a:lstStyle/>
-          <a:p>
-            <a:r>
-              <a:rPr sz="900" b="1">
-                <a:solidFill>
-                  <a:srgbClr val="C00000"/>
-                </a:solidFill>
-              </a:rPr>
-              <a:t>0/100</a:t>
-            </a:r>
-          </a:p>
-        </p:txBody>
-      </p:sp>
-      <p:sp>
-        <p:nvSpPr>
-          <p:cNvPr id="32" name="TextBox 31"/>
-          <p:cNvSpPr txBox="1"/>
-          <p:nvPr/>
-        </p:nvSpPr>
-        <p:spPr>
-          <a:xfrm>
-            <a:off x="7620000" y="2743200"/>
-            <a:ext cx="4114800" cy="1371600"/>
-          </a:xfrm>
-          <a:prstGeom prst="rect">
-            <a:avLst/>
-          </a:prstGeom>
-          <a:noFill/>
-        </p:spPr>
-        <p:txBody>
-          <a:bodyPr wrap="square">
-            <a:spAutoFit/>
-          </a:bodyPr>
-          <a:lstStyle/>
-          <a:p>
-            <a:pPr>
-              <a:defRPr b="1" sz="1400">
-                <a:solidFill>
-                  <a:srgbClr val="0070C0"/>
-                </a:solidFill>
-              </a:defRPr>
-            </a:pPr>
-            <a:r>
-              <a:t>Executive Summary</a:t>
-            </a:r>
-          </a:p>
-          <a:p>
-            <a:pPr>
-              <a:defRPr sz="1100"/>
-            </a:pPr>
-            <a:r>
-              <a:t>此報告目前僅能被視為一份「測試紀錄 (Test Log)」，而非「失效分析報告 (Failure Analysis Report)」。報告僅記錄了測試失敗的結果，完全缺失了「為什麼會失敗」的分析過程與「如何解決」的對策。報告內容與失效分析的邏輯鏈嚴重斷裂，建議必須補齊根因分析與改善對策後方可作為正式文件。</a:t>
-            </a:r>
-          </a:p>
-        </p:txBody>
-      </p:sp>
-      <p:sp>
-        <p:nvSpPr>
-          <p:cNvPr id="33" name="TextBox 32"/>
-          <p:cNvSpPr txBox="1"/>
-          <p:nvPr/>
-        </p:nvSpPr>
-        <p:spPr>
-          <a:xfrm>
-            <a:off x="7620000" y="4206240"/>
-            <a:ext cx="4114800" cy="1828800"/>
-          </a:xfrm>
-          <a:prstGeom prst="rect">
-            <a:avLst/>
-          </a:prstGeom>
-          <a:noFill/>
-        </p:spPr>
-        <p:txBody>
-          <a:bodyPr wrap="square">
-            <a:spAutoFit/>
-          </a:bodyPr>
-          <a:lstStyle/>
-          <a:p>
-            <a:pPr>
-              <a:defRPr b="1" sz="1400">
-                <a:solidFill>
-                  <a:srgbClr val="FF0000"/>
-                </a:solidFill>
-              </a:defRPr>
-            </a:pPr>
-            <a:r>
-              <a:t>Key Improvements Required</a:t>
-            </a:r>
-          </a:p>
-          <a:p>
-            <a:pPr>
-              <a:defRPr sz="1000"/>
-            </a:pPr>
-            <a:r>
-              <a:t>• 僅提供部分編號與日期，缺乏產品型號、客戶資訊、製造日期及負責工程師等核心資訊。</a:t>
-            </a:r>
-          </a:p>
-          <a:p>
-            <a:pPr>
-              <a:defRPr sz="1000"/>
-            </a:pPr>
-            <a:r>
-              <a:t>• 有定義測試方法與失效狀態（Fail），但缺乏失效現象的具體描述、失效影響範圍及失效率統計。</a:t>
-            </a:r>
-          </a:p>
-          <a:p>
-            <a:pPr>
-              <a:defRPr sz="1000"/>
-            </a:pPr>
-            <a:r>
-              <a:t>• 僅呈現 Robot Log 與測試參數，完全沒有展示任何實質的失效分析手段（如 SEM, X-ray 或軟體 Debug 過程），流程極度不完整。</a:t>
-            </a:r>
-          </a:p>
-        </p:txBody>
-      </p:sp>
-      <p:sp>
-        <p:nvSpPr>
-          <p:cNvPr id="34" name="TextBox 33"/>
-          <p:cNvSpPr txBox="1"/>
-          <p:nvPr/>
-        </p:nvSpPr>
-        <p:spPr>
-          <a:xfrm>
-            <a:off x="1463040" y="4206240"/>
-            <a:ext cx="3291840" cy="1828800"/>
-          </a:xfrm>
-          <a:prstGeom prst="rect">
-            <a:avLst/>
-          </a:prstGeom>
-          <a:noFill/>
-        </p:spPr>
-        <p:txBody>
-          <a:bodyPr wrap="square">
-            <a:spAutoFit/>
-          </a:bodyPr>
-          <a:lstStyle/>
-          <a:p>
-            <a:pPr>
-              <a:defRPr b="1" sz="1400">
-                <a:solidFill>
-                  <a:srgbClr val="0070C0"/>
-                </a:solidFill>
-              </a:defRPr>
-            </a:pPr>
-            <a:r>
-              <a:t>分析優點與成功驗證</a:t>
-            </a:r>
-          </a:p>
-          <a:p>
-            <a:pPr>
-              <a:defRPr sz="1000"/>
-            </a:pPr>
-            <a:r>
-              <a:t>✓ 提供了清晰的測試參數定義表 (Parameter Table)</a:t>
-            </a:r>
-          </a:p>
-          <a:p>
-            <a:pPr>
-              <a:defRPr sz="1000"/>
-            </a:pPr>
-            <a:r>
-              <a:t>✓ 提供了測試序列的執行時間與結果對照表 (Sequence Log)</a:t>
-            </a:r>
           </a:p>
         </p:txBody>
       </p:sp>
@@ -18937,40 +18850,6 @@
       <p:grpSpPr/>
       <p:sp>
         <p:nvSpPr>
-          <p:cNvPr id="2" name="Text Placeholder 1"/>
-          <p:cNvSpPr>
-            <a:spLocks noGrp="1"/>
-          </p:cNvSpPr>
-          <p:nvPr>
-            <p:ph type="body" idx="10" sz="quarter"/>
-          </p:nvPr>
-        </p:nvSpPr>
-        <p:spPr/>
-        <p:txBody>
-          <a:bodyPr/>
-          <a:lstStyle/>
-          <a:p/>
-        </p:txBody>
-      </p:sp>
-      <p:sp>
-        <p:nvSpPr>
-          <p:cNvPr id="3" name="Text Placeholder 2"/>
-          <p:cNvSpPr>
-            <a:spLocks noGrp="1"/>
-          </p:cNvSpPr>
-          <p:nvPr>
-            <p:ph type="body" idx="12" sz="quarter"/>
-          </p:nvPr>
-        </p:nvSpPr>
-        <p:spPr/>
-        <p:txBody>
-          <a:bodyPr/>
-          <a:lstStyle/>
-          <a:p/>
-        </p:txBody>
-      </p:sp>
-      <p:sp>
-        <p:nvSpPr>
           <p:cNvPr id="4" name="TextBox 3"/>
           <p:cNvSpPr txBox="1"/>
           <p:nvPr/>
@@ -18986,9 +18865,7 @@
           <a:noFill/>
         </p:spPr>
         <p:txBody>
-          <a:bodyPr wrap="none">
-            <a:spAutoFit/>
-          </a:bodyPr>
+          <a:bodyPr wrap="square" lIns="45720" rIns="45720" tIns="18288" bIns="18288"/>
           <a:lstStyle/>
           <a:p>
             <a:r>
@@ -19588,9 +19465,7 @@
           <a:noFill/>
         </p:spPr>
         <p:txBody>
-          <a:bodyPr wrap="square">
-            <a:spAutoFit/>
-          </a:bodyPr>
+          <a:bodyPr wrap="square" lIns="45720" rIns="45720" tIns="18288" bIns="18288"/>
           <a:lstStyle/>
           <a:p>
             <a:pPr>
@@ -19634,40 +19509,6 @@
       <p:grpSpPr/>
       <p:sp>
         <p:nvSpPr>
-          <p:cNvPr id="2" name="Text Placeholder 1"/>
-          <p:cNvSpPr>
-            <a:spLocks noGrp="1"/>
-          </p:cNvSpPr>
-          <p:nvPr>
-            <p:ph type="body" idx="10" sz="quarter"/>
-          </p:nvPr>
-        </p:nvSpPr>
-        <p:spPr/>
-        <p:txBody>
-          <a:bodyPr/>
-          <a:lstStyle/>
-          <a:p/>
-        </p:txBody>
-      </p:sp>
-      <p:sp>
-        <p:nvSpPr>
-          <p:cNvPr id="3" name="Text Placeholder 2"/>
-          <p:cNvSpPr>
-            <a:spLocks noGrp="1"/>
-          </p:cNvSpPr>
-          <p:nvPr>
-            <p:ph type="body" idx="12" sz="quarter"/>
-          </p:nvPr>
-        </p:nvSpPr>
-        <p:spPr/>
-        <p:txBody>
-          <a:bodyPr/>
-          <a:lstStyle/>
-          <a:p/>
-        </p:txBody>
-      </p:sp>
-      <p:sp>
-        <p:nvSpPr>
           <p:cNvPr id="4" name="TextBox 3"/>
           <p:cNvSpPr txBox="1"/>
           <p:nvPr/>
@@ -19683,9 +19524,7 @@
           <a:noFill/>
         </p:spPr>
         <p:txBody>
-          <a:bodyPr wrap="none">
-            <a:spAutoFit/>
-          </a:bodyPr>
+          <a:bodyPr wrap="square" lIns="45720" rIns="45720" tIns="18288" bIns="18288"/>
           <a:lstStyle/>
           <a:p>
             <a:r>
@@ -20421,40 +20260,6 @@
       <p:grpSpPr/>
       <p:sp>
         <p:nvSpPr>
-          <p:cNvPr id="2" name="Text Placeholder 1"/>
-          <p:cNvSpPr>
-            <a:spLocks noGrp="1"/>
-          </p:cNvSpPr>
-          <p:nvPr>
-            <p:ph type="body" idx="10" sz="quarter"/>
-          </p:nvPr>
-        </p:nvSpPr>
-        <p:spPr/>
-        <p:txBody>
-          <a:bodyPr/>
-          <a:lstStyle/>
-          <a:p/>
-        </p:txBody>
-      </p:sp>
-      <p:sp>
-        <p:nvSpPr>
-          <p:cNvPr id="3" name="Text Placeholder 2"/>
-          <p:cNvSpPr>
-            <a:spLocks noGrp="1"/>
-          </p:cNvSpPr>
-          <p:nvPr>
-            <p:ph type="body" idx="12" sz="quarter"/>
-          </p:nvPr>
-        </p:nvSpPr>
-        <p:spPr/>
-        <p:txBody>
-          <a:bodyPr/>
-          <a:lstStyle/>
-          <a:p/>
-        </p:txBody>
-      </p:sp>
-      <p:sp>
-        <p:nvSpPr>
           <p:cNvPr id="4" name="TextBox 3"/>
           <p:cNvSpPr txBox="1"/>
           <p:nvPr/>
@@ -20470,9 +20275,7 @@
           <a:noFill/>
         </p:spPr>
         <p:txBody>
-          <a:bodyPr wrap="none">
-            <a:spAutoFit/>
-          </a:bodyPr>
+          <a:bodyPr wrap="square" lIns="45720" rIns="45720" tIns="18288" bIns="18288"/>
           <a:lstStyle/>
           <a:p>
             <a:r>
@@ -21577,40 +21380,6 @@
       <p:grpSpPr/>
       <p:sp>
         <p:nvSpPr>
-          <p:cNvPr id="2" name="Text Placeholder 1"/>
-          <p:cNvSpPr>
-            <a:spLocks noGrp="1"/>
-          </p:cNvSpPr>
-          <p:nvPr>
-            <p:ph type="body" idx="10" sz="quarter"/>
-          </p:nvPr>
-        </p:nvSpPr>
-        <p:spPr/>
-        <p:txBody>
-          <a:bodyPr/>
-          <a:lstStyle/>
-          <a:p/>
-        </p:txBody>
-      </p:sp>
-      <p:sp>
-        <p:nvSpPr>
-          <p:cNvPr id="3" name="Text Placeholder 2"/>
-          <p:cNvSpPr>
-            <a:spLocks noGrp="1"/>
-          </p:cNvSpPr>
-          <p:nvPr>
-            <p:ph type="body" idx="12" sz="quarter"/>
-          </p:nvPr>
-        </p:nvSpPr>
-        <p:spPr/>
-        <p:txBody>
-          <a:bodyPr/>
-          <a:lstStyle/>
-          <a:p/>
-        </p:txBody>
-      </p:sp>
-      <p:sp>
-        <p:nvSpPr>
           <p:cNvPr id="4" name="TextBox 3"/>
           <p:cNvSpPr txBox="1"/>
           <p:nvPr/>
@@ -21626,9 +21395,7 @@
           <a:noFill/>
         </p:spPr>
         <p:txBody>
-          <a:bodyPr wrap="none">
-            <a:spAutoFit/>
-          </a:bodyPr>
+          <a:bodyPr wrap="square" lIns="45720" rIns="45720" tIns="18288" bIns="18288"/>
           <a:lstStyle/>
           <a:p>
             <a:r>
